--- a/paper/figures/ppt_editable/fig02_image_edit_workflow.pptx
+++ b/paper/figures/ppt_editable/fig02_image_edit_workflow.pptx
@@ -1,6 +1,6 @@
 
 <file path=ppt/presentation.xml><?xml version="1.0" encoding="utf-8"?>
-<p:presentation xmlns:a="http://schemas.openxmlformats.org/drawingml/2006/main" xmlns:r="http://schemas.openxmlformats.org/officeDocument/2006/relationships" xmlns:p="http://schemas.openxmlformats.org/presentationml/2006/main" saveSubsetFonts="1">
+<p:presentation xmlns:a="http://schemas.openxmlformats.org/drawingml/2006/main" xmlns:r="http://schemas.openxmlformats.org/officeDocument/2006/relationships" xmlns:p="http://schemas.openxmlformats.org/presentationml/2006/main" embedTrueTypeFonts="1" saveSubsetFonts="1">
   <p:sldMasterIdLst>
     <p:sldMasterId id="2147483648" r:id="rId1"/>
   </p:sldMasterIdLst>
@@ -10,8 +10,19 @@
   <p:sldIdLst>
     <p:sldId id="256" r:id="rId2"/>
   </p:sldIdLst>
-  <p:sldSz cx="11684000" cy="9575800"/>
+  <p:sldSz cx="17526000" cy="8255000"/>
   <p:notesSz cx="6858000" cy="9144000"/>
+  <p:embeddedFontLst>
+    <p:embeddedFont>
+      <p:font typeface="等线" panose="02010600030101010101" pitchFamily="2" charset="-122"/>
+      <p:regular r:id="rId4"/>
+      <p:bold r:id="rId5"/>
+    </p:embeddedFont>
+    <p:embeddedFont>
+      <p:font typeface="等线 Light" panose="02010600030101010101" pitchFamily="2" charset="-122"/>
+      <p:regular r:id="rId6"/>
+    </p:embeddedFont>
+  </p:embeddedFontLst>
   <p:defaultTextStyle>
     <a:defPPr>
       <a:defRPr lang="zh-CN"/>
@@ -190,9 +201,9 @@
             </a:lvl1pPr>
           </a:lstStyle>
           <a:p>
-            <a:fld id="{46E86874-3B2B-46DF-AD46-EDF5E71C1782}" type="datetimeFigureOut">
+            <a:fld id="{E71A65AE-361D-4F3E-BEC6-4BCA23245EAC}" type="datetimeFigureOut">
               <a:rPr lang="zh-CN" altLang="en-US" smtClean="0"/>
-              <a:t>2026/10/6</a:t>
+              <a:t>2026/10/9</a:t>
             </a:fld>
             <a:endParaRPr lang="zh-CN" altLang="en-US"/>
           </a:p>
@@ -210,8 +221,8 @@
         </p:nvSpPr>
         <p:spPr>
           <a:xfrm>
-            <a:off x="1546225" y="1143000"/>
-            <a:ext cx="3765550" cy="3086100"/>
+            <a:off x="153988" y="1143000"/>
+            <a:ext cx="6550025" cy="3086100"/>
           </a:xfrm>
           <a:prstGeom prst="rect">
             <a:avLst/>
@@ -348,7 +359,7 @@
             </a:lvl1pPr>
           </a:lstStyle>
           <a:p>
-            <a:fld id="{8A772E08-94EF-481E-946F-76302C3CA260}" type="slidenum">
+            <a:fld id="{2E3CECA2-F27B-4885-917A-899DE023F0E0}" type="slidenum">
               <a:rPr lang="zh-CN" altLang="en-US" smtClean="0"/>
               <a:t>‹#›</a:t>
             </a:fld>
@@ -359,7 +370,7 @@
     </p:spTree>
     <p:extLst>
       <p:ext uri="{BB962C8B-B14F-4D97-AF65-F5344CB8AC3E}">
-        <p14:creationId xmlns:p14="http://schemas.microsoft.com/office/powerpoint/2010/main" val="3728011595"/>
+        <p14:creationId xmlns:p14="http://schemas.microsoft.com/office/powerpoint/2010/main" val="2610132352"/>
       </p:ext>
     </p:extLst>
   </p:cSld>
@@ -507,7 +518,7 @@
               <a:rPr lang="en-US" altLang="zh-CN" sz="1000">
                 <a:latin typeface="Arial" panose="020B0604020202020204" pitchFamily="34" charset="0"/>
               </a:rPr>
-              <a:t>Author workflow: reference in archive/drafts/fig1_pipeline.pptx. Exact models: qwen_image_edit_2509_fp8_e4m3fn.safetensors; qwen_2.5_vl_7b_fp8_scaled.safetensors; qwen_image_vae.safetensors; Qwen-Image-Edit-2509-Lightning-4steps-V1.0-bf16.safetensors. The standard/Lightning switch is available; the diagram does not assert all retained C images used four-step sampling. Source photographs and retained example are illustrative and unpaired. Exact per-image C sampling parameters and retained workflow provenance still need archival.</a:t>
+              <a:t>Image-Edit workflow. Styling only adapted from supplied Li2025 reference: pale-blue field, separated input/processing regions, pastel modules and direct arrows. No reference scientific content is reused. C example Placement_Issues_0301.png: PNG prompt nodes 23 and 25 explicitly load real_photo_12.png and real_photo_36.png; node 7 conditions on both. The displayed instruction is an English summary, not a verbatim prompt. Model and encoders: docs/v5_prompts/generation_models.md. Lightning is optional across C; do not infer all 1085 images used the same sampling settings. Final C dataset has 1085 retained and annotated images.</a:t>
             </a:r>
             <a:endParaRPr lang="zh-CN" altLang="en-US" sz="1000">
               <a:latin typeface="Arial" panose="020B0604020202020204" pitchFamily="34" charset="0"/>
@@ -530,7 +541,7 @@
           <a:bodyPr/>
           <a:lstStyle/>
           <a:p>
-            <a:fld id="{8A772E08-94EF-481E-946F-76302C3CA260}" type="slidenum">
+            <a:fld id="{2E3CECA2-F27B-4885-917A-899DE023F0E0}" type="slidenum">
               <a:rPr lang="zh-CN" altLang="en-US" smtClean="0"/>
               <a:t>1</a:t>
             </a:fld>
@@ -541,7 +552,7 @@
     </p:spTree>
     <p:extLst>
       <p:ext uri="{BB962C8B-B14F-4D97-AF65-F5344CB8AC3E}">
-        <p14:creationId xmlns:p14="http://schemas.microsoft.com/office/powerpoint/2010/main" val="460676855"/>
+        <p14:creationId xmlns:p14="http://schemas.microsoft.com/office/powerpoint/2010/main" val="2146028317"/>
       </p:ext>
     </p:extLst>
   </p:cSld>
@@ -573,7 +584,7 @@
           <p:cNvPr id="2" name="标题 1">
             <a:extLst>
               <a:ext uri="{FF2B5EF4-FFF2-40B4-BE49-F238E27FC236}">
-                <a16:creationId xmlns:a16="http://schemas.microsoft.com/office/drawing/2014/main" id="{C3B9307F-D47A-6F08-55DB-D5B255D439E8}"/>
+                <a16:creationId xmlns:a16="http://schemas.microsoft.com/office/drawing/2014/main" id="{0A2B95CD-B802-4ED6-FB2D-2162B5E7B7C5}"/>
               </a:ext>
             </a:extLst>
           </p:cNvPr>
@@ -586,15 +597,15 @@
         </p:nvSpPr>
         <p:spPr>
           <a:xfrm>
-            <a:off x="1460500" y="1567151"/>
-            <a:ext cx="8763000" cy="3333797"/>
+            <a:off x="2190750" y="1350992"/>
+            <a:ext cx="13144500" cy="2873963"/>
           </a:xfrm>
         </p:spPr>
         <p:txBody>
           <a:bodyPr anchor="b"/>
           <a:lstStyle>
             <a:lvl1pPr algn="ctr">
-              <a:defRPr sz="5750"/>
+              <a:defRPr sz="6000"/>
             </a:lvl1pPr>
           </a:lstStyle>
           <a:p>
@@ -610,7 +621,7 @@
           <p:cNvPr id="3" name="副标题 2">
             <a:extLst>
               <a:ext uri="{FF2B5EF4-FFF2-40B4-BE49-F238E27FC236}">
-                <a16:creationId xmlns:a16="http://schemas.microsoft.com/office/drawing/2014/main" id="{2524D986-20DE-97BE-B865-F9377A09F6FD}"/>
+                <a16:creationId xmlns:a16="http://schemas.microsoft.com/office/drawing/2014/main" id="{713EE811-92DA-48E9-F005-733EE8ECB143}"/>
               </a:ext>
             </a:extLst>
           </p:cNvPr>
@@ -623,8 +634,8 @@
         </p:nvSpPr>
         <p:spPr>
           <a:xfrm>
-            <a:off x="1460500" y="5029512"/>
-            <a:ext cx="8763000" cy="2311934"/>
+            <a:off x="2190750" y="4335786"/>
+            <a:ext cx="13144500" cy="1993047"/>
           </a:xfrm>
         </p:spPr>
         <p:txBody>
@@ -632,39 +643,39 @@
           <a:lstStyle>
             <a:lvl1pPr marL="0" indent="0" algn="ctr">
               <a:buNone/>
-              <a:defRPr sz="2300"/>
+              <a:defRPr sz="2400"/>
             </a:lvl1pPr>
-            <a:lvl2pPr marL="438135" indent="0" algn="ctr">
+            <a:lvl2pPr marL="457200" indent="0" algn="ctr">
               <a:buNone/>
-              <a:defRPr sz="1917"/>
+              <a:defRPr sz="2000"/>
             </a:lvl2pPr>
-            <a:lvl3pPr marL="876270" indent="0" algn="ctr">
+            <a:lvl3pPr marL="914400" indent="0" algn="ctr">
               <a:buNone/>
-              <a:defRPr sz="1725"/>
+              <a:defRPr sz="1800"/>
             </a:lvl3pPr>
-            <a:lvl4pPr marL="1314404" indent="0" algn="ctr">
+            <a:lvl4pPr marL="1371600" indent="0" algn="ctr">
               <a:buNone/>
-              <a:defRPr sz="1533"/>
+              <a:defRPr sz="1600"/>
             </a:lvl4pPr>
-            <a:lvl5pPr marL="1752539" indent="0" algn="ctr">
+            <a:lvl5pPr marL="1828800" indent="0" algn="ctr">
               <a:buNone/>
-              <a:defRPr sz="1533"/>
+              <a:defRPr sz="1600"/>
             </a:lvl5pPr>
-            <a:lvl6pPr marL="2190674" indent="0" algn="ctr">
+            <a:lvl6pPr marL="2286000" indent="0" algn="ctr">
               <a:buNone/>
-              <a:defRPr sz="1533"/>
+              <a:defRPr sz="1600"/>
             </a:lvl6pPr>
-            <a:lvl7pPr marL="2628809" indent="0" algn="ctr">
+            <a:lvl7pPr marL="2743200" indent="0" algn="ctr">
               <a:buNone/>
-              <a:defRPr sz="1533"/>
+              <a:defRPr sz="1600"/>
             </a:lvl7pPr>
-            <a:lvl8pPr marL="3066943" indent="0" algn="ctr">
+            <a:lvl8pPr marL="3200400" indent="0" algn="ctr">
               <a:buNone/>
-              <a:defRPr sz="1533"/>
+              <a:defRPr sz="1600"/>
             </a:lvl8pPr>
-            <a:lvl9pPr marL="3505078" indent="0" algn="ctr">
+            <a:lvl9pPr marL="3657600" indent="0" algn="ctr">
               <a:buNone/>
-              <a:defRPr sz="1533"/>
+              <a:defRPr sz="1600"/>
             </a:lvl9pPr>
           </a:lstStyle>
           <a:p>
@@ -680,7 +691,7 @@
           <p:cNvPr id="4" name="日期占位符 3">
             <a:extLst>
               <a:ext uri="{FF2B5EF4-FFF2-40B4-BE49-F238E27FC236}">
-                <a16:creationId xmlns:a16="http://schemas.microsoft.com/office/drawing/2014/main" id="{D7D16B22-3819-EBC7-7086-EB87D6635057}"/>
+                <a16:creationId xmlns:a16="http://schemas.microsoft.com/office/drawing/2014/main" id="{D1DEDD3C-C757-9BEB-1C02-EA0665A5665F}"/>
               </a:ext>
             </a:extLst>
           </p:cNvPr>
@@ -696,9 +707,9 @@
           <a:bodyPr/>
           <a:lstStyle/>
           <a:p>
-            <a:fld id="{3BFD762F-A6DF-4976-BAF9-7ED4F9CC0F9F}" type="datetimeFigureOut">
+            <a:fld id="{1C947BBF-35D0-4785-BB1A-24495BBE301F}" type="datetimeFigureOut">
               <a:rPr lang="zh-CN" altLang="en-US" smtClean="0"/>
-              <a:t>2026/10/6</a:t>
+              <a:t>2026/10/9</a:t>
             </a:fld>
             <a:endParaRPr lang="zh-CN" altLang="en-US"/>
           </a:p>
@@ -709,7 +720,7 @@
           <p:cNvPr id="5" name="页脚占位符 4">
             <a:extLst>
               <a:ext uri="{FF2B5EF4-FFF2-40B4-BE49-F238E27FC236}">
-                <a16:creationId xmlns:a16="http://schemas.microsoft.com/office/drawing/2014/main" id="{62FC0595-5838-428B-534D-647503E551F0}"/>
+                <a16:creationId xmlns:a16="http://schemas.microsoft.com/office/drawing/2014/main" id="{DFE072B0-898A-1BBF-6031-C9F8601DB9E3}"/>
               </a:ext>
             </a:extLst>
           </p:cNvPr>
@@ -734,7 +745,7 @@
           <p:cNvPr id="6" name="灯片编号占位符 5">
             <a:extLst>
               <a:ext uri="{FF2B5EF4-FFF2-40B4-BE49-F238E27FC236}">
-                <a16:creationId xmlns:a16="http://schemas.microsoft.com/office/drawing/2014/main" id="{8BB87876-7B6C-5F67-58A3-5B118D0D5B62}"/>
+                <a16:creationId xmlns:a16="http://schemas.microsoft.com/office/drawing/2014/main" id="{C7887975-E48F-7B64-1A64-580AA9398737}"/>
               </a:ext>
             </a:extLst>
           </p:cNvPr>
@@ -750,7 +761,7 @@
           <a:bodyPr/>
           <a:lstStyle/>
           <a:p>
-            <a:fld id="{6D9F8A20-A1EF-442E-94A9-FA0659D951CB}" type="slidenum">
+            <a:fld id="{A35C3B88-3BED-4C5A-A8AB-C7491EE0F2B5}" type="slidenum">
               <a:rPr lang="zh-CN" altLang="en-US" smtClean="0"/>
               <a:t>‹#›</a:t>
             </a:fld>
@@ -761,7 +772,7 @@
     </p:spTree>
     <p:extLst>
       <p:ext uri="{BB962C8B-B14F-4D97-AF65-F5344CB8AC3E}">
-        <p14:creationId xmlns:p14="http://schemas.microsoft.com/office/powerpoint/2010/main" val="3211039493"/>
+        <p14:creationId xmlns:p14="http://schemas.microsoft.com/office/powerpoint/2010/main" val="246822437"/>
       </p:ext>
     </p:extLst>
   </p:cSld>
@@ -793,7 +804,7 @@
           <p:cNvPr id="2" name="标题 1">
             <a:extLst>
               <a:ext uri="{FF2B5EF4-FFF2-40B4-BE49-F238E27FC236}">
-                <a16:creationId xmlns:a16="http://schemas.microsoft.com/office/drawing/2014/main" id="{18F76182-E921-1A42-1472-9F9C5475887D}"/>
+                <a16:creationId xmlns:a16="http://schemas.microsoft.com/office/drawing/2014/main" id="{8EE62E60-DD84-4058-4087-65424175704E}"/>
               </a:ext>
             </a:extLst>
           </p:cNvPr>
@@ -821,7 +832,7 @@
           <p:cNvPr id="3" name="竖排文字占位符 2">
             <a:extLst>
               <a:ext uri="{FF2B5EF4-FFF2-40B4-BE49-F238E27FC236}">
-                <a16:creationId xmlns:a16="http://schemas.microsoft.com/office/drawing/2014/main" id="{636588F9-F318-902B-1FFE-BB9F4AA3F956}"/>
+                <a16:creationId xmlns:a16="http://schemas.microsoft.com/office/drawing/2014/main" id="{BA7D36C0-1941-3338-8AFC-EE4E5F3E1FC1}"/>
               </a:ext>
             </a:extLst>
           </p:cNvPr>
@@ -878,7 +889,7 @@
           <p:cNvPr id="4" name="日期占位符 3">
             <a:extLst>
               <a:ext uri="{FF2B5EF4-FFF2-40B4-BE49-F238E27FC236}">
-                <a16:creationId xmlns:a16="http://schemas.microsoft.com/office/drawing/2014/main" id="{0D4EE386-780A-CFE5-EB23-8D556D1CDEE3}"/>
+                <a16:creationId xmlns:a16="http://schemas.microsoft.com/office/drawing/2014/main" id="{6E319067-AEAD-10E3-25EE-F4040140288E}"/>
               </a:ext>
             </a:extLst>
           </p:cNvPr>
@@ -894,9 +905,9 @@
           <a:bodyPr/>
           <a:lstStyle/>
           <a:p>
-            <a:fld id="{3BFD762F-A6DF-4976-BAF9-7ED4F9CC0F9F}" type="datetimeFigureOut">
+            <a:fld id="{1C947BBF-35D0-4785-BB1A-24495BBE301F}" type="datetimeFigureOut">
               <a:rPr lang="zh-CN" altLang="en-US" smtClean="0"/>
-              <a:t>2026/10/6</a:t>
+              <a:t>2026/10/9</a:t>
             </a:fld>
             <a:endParaRPr lang="zh-CN" altLang="en-US"/>
           </a:p>
@@ -907,7 +918,7 @@
           <p:cNvPr id="5" name="页脚占位符 4">
             <a:extLst>
               <a:ext uri="{FF2B5EF4-FFF2-40B4-BE49-F238E27FC236}">
-                <a16:creationId xmlns:a16="http://schemas.microsoft.com/office/drawing/2014/main" id="{3E5053F1-7CF6-D63E-E946-D67EEC3312D1}"/>
+                <a16:creationId xmlns:a16="http://schemas.microsoft.com/office/drawing/2014/main" id="{F9294E27-1DA6-52BD-9C6F-8BC759907F06}"/>
               </a:ext>
             </a:extLst>
           </p:cNvPr>
@@ -932,7 +943,7 @@
           <p:cNvPr id="6" name="灯片编号占位符 5">
             <a:extLst>
               <a:ext uri="{FF2B5EF4-FFF2-40B4-BE49-F238E27FC236}">
-                <a16:creationId xmlns:a16="http://schemas.microsoft.com/office/drawing/2014/main" id="{5886975C-46E3-1AB8-01C0-78D62DF52FB7}"/>
+                <a16:creationId xmlns:a16="http://schemas.microsoft.com/office/drawing/2014/main" id="{C84C296A-0DA8-ECFA-2CED-BED5FC1C1DD1}"/>
               </a:ext>
             </a:extLst>
           </p:cNvPr>
@@ -948,7 +959,7 @@
           <a:bodyPr/>
           <a:lstStyle/>
           <a:p>
-            <a:fld id="{6D9F8A20-A1EF-442E-94A9-FA0659D951CB}" type="slidenum">
+            <a:fld id="{A35C3B88-3BED-4C5A-A8AB-C7491EE0F2B5}" type="slidenum">
               <a:rPr lang="zh-CN" altLang="en-US" smtClean="0"/>
               <a:t>‹#›</a:t>
             </a:fld>
@@ -959,7 +970,7 @@
     </p:spTree>
     <p:extLst>
       <p:ext uri="{BB962C8B-B14F-4D97-AF65-F5344CB8AC3E}">
-        <p14:creationId xmlns:p14="http://schemas.microsoft.com/office/powerpoint/2010/main" val="2839309603"/>
+        <p14:creationId xmlns:p14="http://schemas.microsoft.com/office/powerpoint/2010/main" val="3873233366"/>
       </p:ext>
     </p:extLst>
   </p:cSld>
@@ -991,7 +1002,7 @@
           <p:cNvPr id="2" name="竖排标题 1">
             <a:extLst>
               <a:ext uri="{FF2B5EF4-FFF2-40B4-BE49-F238E27FC236}">
-                <a16:creationId xmlns:a16="http://schemas.microsoft.com/office/drawing/2014/main" id="{856E0B2F-4163-9703-B2FE-911A7EFBD1FD}"/>
+                <a16:creationId xmlns:a16="http://schemas.microsoft.com/office/drawing/2014/main" id="{9A28FC9C-D536-914B-8D3A-74424A252EAB}"/>
               </a:ext>
             </a:extLst>
           </p:cNvPr>
@@ -1004,8 +1015,8 @@
         </p:nvSpPr>
         <p:spPr>
           <a:xfrm>
-            <a:off x="8361363" y="509823"/>
-            <a:ext cx="2519363" cy="8115048"/>
+            <a:off x="12542044" y="439502"/>
+            <a:ext cx="3779044" cy="6995731"/>
           </a:xfrm>
         </p:spPr>
         <p:txBody>
@@ -1024,7 +1035,7 @@
           <p:cNvPr id="3" name="竖排文字占位符 2">
             <a:extLst>
               <a:ext uri="{FF2B5EF4-FFF2-40B4-BE49-F238E27FC236}">
-                <a16:creationId xmlns:a16="http://schemas.microsoft.com/office/drawing/2014/main" id="{8607F183-4077-4FCE-E535-A7DD6B97808B}"/>
+                <a16:creationId xmlns:a16="http://schemas.microsoft.com/office/drawing/2014/main" id="{EE947201-C36F-7611-ECA7-BD7F4461FC30}"/>
               </a:ext>
             </a:extLst>
           </p:cNvPr>
@@ -1037,8 +1048,8 @@
         </p:nvSpPr>
         <p:spPr>
           <a:xfrm>
-            <a:off x="803275" y="509823"/>
-            <a:ext cx="7412038" cy="8115048"/>
+            <a:off x="1204913" y="439502"/>
+            <a:ext cx="11118056" cy="6995731"/>
           </a:xfrm>
         </p:spPr>
         <p:txBody>
@@ -1086,7 +1097,7 @@
           <p:cNvPr id="4" name="日期占位符 3">
             <a:extLst>
               <a:ext uri="{FF2B5EF4-FFF2-40B4-BE49-F238E27FC236}">
-                <a16:creationId xmlns:a16="http://schemas.microsoft.com/office/drawing/2014/main" id="{E9FD261D-46E7-1576-B1AE-FBAC24DBB774}"/>
+                <a16:creationId xmlns:a16="http://schemas.microsoft.com/office/drawing/2014/main" id="{DDB0D8E4-0146-EDD2-0616-06EB79700A1C}"/>
               </a:ext>
             </a:extLst>
           </p:cNvPr>
@@ -1102,9 +1113,9 @@
           <a:bodyPr/>
           <a:lstStyle/>
           <a:p>
-            <a:fld id="{3BFD762F-A6DF-4976-BAF9-7ED4F9CC0F9F}" type="datetimeFigureOut">
+            <a:fld id="{1C947BBF-35D0-4785-BB1A-24495BBE301F}" type="datetimeFigureOut">
               <a:rPr lang="zh-CN" altLang="en-US" smtClean="0"/>
-              <a:t>2026/10/6</a:t>
+              <a:t>2026/10/9</a:t>
             </a:fld>
             <a:endParaRPr lang="zh-CN" altLang="en-US"/>
           </a:p>
@@ -1115,7 +1126,7 @@
           <p:cNvPr id="5" name="页脚占位符 4">
             <a:extLst>
               <a:ext uri="{FF2B5EF4-FFF2-40B4-BE49-F238E27FC236}">
-                <a16:creationId xmlns:a16="http://schemas.microsoft.com/office/drawing/2014/main" id="{E5F2F7FD-811E-9281-8C1B-ECAA717E1FBA}"/>
+                <a16:creationId xmlns:a16="http://schemas.microsoft.com/office/drawing/2014/main" id="{1B68727E-A94C-70B4-5857-08A1F8F6F264}"/>
               </a:ext>
             </a:extLst>
           </p:cNvPr>
@@ -1140,7 +1151,7 @@
           <p:cNvPr id="6" name="灯片编号占位符 5">
             <a:extLst>
               <a:ext uri="{FF2B5EF4-FFF2-40B4-BE49-F238E27FC236}">
-                <a16:creationId xmlns:a16="http://schemas.microsoft.com/office/drawing/2014/main" id="{807D6934-264F-2CA7-F878-6BF933FD9FA2}"/>
+                <a16:creationId xmlns:a16="http://schemas.microsoft.com/office/drawing/2014/main" id="{0117F477-FB67-180A-800D-50C27FE42B78}"/>
               </a:ext>
             </a:extLst>
           </p:cNvPr>
@@ -1156,7 +1167,7 @@
           <a:bodyPr/>
           <a:lstStyle/>
           <a:p>
-            <a:fld id="{6D9F8A20-A1EF-442E-94A9-FA0659D951CB}" type="slidenum">
+            <a:fld id="{A35C3B88-3BED-4C5A-A8AB-C7491EE0F2B5}" type="slidenum">
               <a:rPr lang="zh-CN" altLang="en-US" smtClean="0"/>
               <a:t>‹#›</a:t>
             </a:fld>
@@ -1167,7 +1178,7 @@
     </p:spTree>
     <p:extLst>
       <p:ext uri="{BB962C8B-B14F-4D97-AF65-F5344CB8AC3E}">
-        <p14:creationId xmlns:p14="http://schemas.microsoft.com/office/powerpoint/2010/main" val="3291353700"/>
+        <p14:creationId xmlns:p14="http://schemas.microsoft.com/office/powerpoint/2010/main" val="4010677386"/>
       </p:ext>
     </p:extLst>
   </p:cSld>
@@ -1199,7 +1210,7 @@
           <p:cNvPr id="2" name="标题 1">
             <a:extLst>
               <a:ext uri="{FF2B5EF4-FFF2-40B4-BE49-F238E27FC236}">
-                <a16:creationId xmlns:a16="http://schemas.microsoft.com/office/drawing/2014/main" id="{CBF5A224-1EE4-B5EB-C4F6-C17D3CCED612}"/>
+                <a16:creationId xmlns:a16="http://schemas.microsoft.com/office/drawing/2014/main" id="{08F3C8C0-3F3B-9BF2-A413-182C76947E09}"/>
               </a:ext>
             </a:extLst>
           </p:cNvPr>
@@ -1227,7 +1238,7 @@
           <p:cNvPr id="3" name="内容占位符 2">
             <a:extLst>
               <a:ext uri="{FF2B5EF4-FFF2-40B4-BE49-F238E27FC236}">
-                <a16:creationId xmlns:a16="http://schemas.microsoft.com/office/drawing/2014/main" id="{6E3B899B-3DEF-DFB6-464C-CE60E89B18EE}"/>
+                <a16:creationId xmlns:a16="http://schemas.microsoft.com/office/drawing/2014/main" id="{1C59CE09-6D1E-CE6D-8788-A359265C1E97}"/>
               </a:ext>
             </a:extLst>
           </p:cNvPr>
@@ -1284,7 +1295,7 @@
           <p:cNvPr id="4" name="日期占位符 3">
             <a:extLst>
               <a:ext uri="{FF2B5EF4-FFF2-40B4-BE49-F238E27FC236}">
-                <a16:creationId xmlns:a16="http://schemas.microsoft.com/office/drawing/2014/main" id="{27946DFA-7B2C-7A8C-0714-AFF310C8FDA7}"/>
+                <a16:creationId xmlns:a16="http://schemas.microsoft.com/office/drawing/2014/main" id="{35B26CD4-5A2C-AB50-F85D-A1625F4988C9}"/>
               </a:ext>
             </a:extLst>
           </p:cNvPr>
@@ -1300,9 +1311,9 @@
           <a:bodyPr/>
           <a:lstStyle/>
           <a:p>
-            <a:fld id="{3BFD762F-A6DF-4976-BAF9-7ED4F9CC0F9F}" type="datetimeFigureOut">
+            <a:fld id="{1C947BBF-35D0-4785-BB1A-24495BBE301F}" type="datetimeFigureOut">
               <a:rPr lang="zh-CN" altLang="en-US" smtClean="0"/>
-              <a:t>2026/10/6</a:t>
+              <a:t>2026/10/9</a:t>
             </a:fld>
             <a:endParaRPr lang="zh-CN" altLang="en-US"/>
           </a:p>
@@ -1313,7 +1324,7 @@
           <p:cNvPr id="5" name="页脚占位符 4">
             <a:extLst>
               <a:ext uri="{FF2B5EF4-FFF2-40B4-BE49-F238E27FC236}">
-                <a16:creationId xmlns:a16="http://schemas.microsoft.com/office/drawing/2014/main" id="{BB369C89-DD4F-D51D-2C0D-5FEE4257B83E}"/>
+                <a16:creationId xmlns:a16="http://schemas.microsoft.com/office/drawing/2014/main" id="{C2019678-B577-9C5B-E694-379D7108181B}"/>
               </a:ext>
             </a:extLst>
           </p:cNvPr>
@@ -1338,7 +1349,7 @@
           <p:cNvPr id="6" name="灯片编号占位符 5">
             <a:extLst>
               <a:ext uri="{FF2B5EF4-FFF2-40B4-BE49-F238E27FC236}">
-                <a16:creationId xmlns:a16="http://schemas.microsoft.com/office/drawing/2014/main" id="{E7BAAC19-C735-88BE-04BB-7CD522226018}"/>
+                <a16:creationId xmlns:a16="http://schemas.microsoft.com/office/drawing/2014/main" id="{A7B92CD3-8D16-C995-B549-82D1AB556078}"/>
               </a:ext>
             </a:extLst>
           </p:cNvPr>
@@ -1354,7 +1365,7 @@
           <a:bodyPr/>
           <a:lstStyle/>
           <a:p>
-            <a:fld id="{6D9F8A20-A1EF-442E-94A9-FA0659D951CB}" type="slidenum">
+            <a:fld id="{A35C3B88-3BED-4C5A-A8AB-C7491EE0F2B5}" type="slidenum">
               <a:rPr lang="zh-CN" altLang="en-US" smtClean="0"/>
               <a:t>‹#›</a:t>
             </a:fld>
@@ -1365,7 +1376,7 @@
     </p:spTree>
     <p:extLst>
       <p:ext uri="{BB962C8B-B14F-4D97-AF65-F5344CB8AC3E}">
-        <p14:creationId xmlns:p14="http://schemas.microsoft.com/office/powerpoint/2010/main" val="1380837119"/>
+        <p14:creationId xmlns:p14="http://schemas.microsoft.com/office/powerpoint/2010/main" val="1160324011"/>
       </p:ext>
     </p:extLst>
   </p:cSld>
@@ -1397,7 +1408,7 @@
           <p:cNvPr id="2" name="标题 1">
             <a:extLst>
               <a:ext uri="{FF2B5EF4-FFF2-40B4-BE49-F238E27FC236}">
-                <a16:creationId xmlns:a16="http://schemas.microsoft.com/office/drawing/2014/main" id="{08F27F27-01C9-2983-0994-750E76CD3876}"/>
+                <a16:creationId xmlns:a16="http://schemas.microsoft.com/office/drawing/2014/main" id="{7C58D898-3233-688E-18D8-40D5543548CF}"/>
               </a:ext>
             </a:extLst>
           </p:cNvPr>
@@ -1410,15 +1421,15 @@
         </p:nvSpPr>
         <p:spPr>
           <a:xfrm>
-            <a:off x="797190" y="2387303"/>
-            <a:ext cx="10077450" cy="3983266"/>
+            <a:off x="1195785" y="2058020"/>
+            <a:ext cx="15116175" cy="3433850"/>
           </a:xfrm>
         </p:spPr>
         <p:txBody>
           <a:bodyPr anchor="b"/>
           <a:lstStyle>
             <a:lvl1pPr>
-              <a:defRPr sz="5750"/>
+              <a:defRPr sz="6000"/>
             </a:lvl1pPr>
           </a:lstStyle>
           <a:p>
@@ -1434,7 +1445,7 @@
           <p:cNvPr id="3" name="文本占位符 2">
             <a:extLst>
               <a:ext uri="{FF2B5EF4-FFF2-40B4-BE49-F238E27FC236}">
-                <a16:creationId xmlns:a16="http://schemas.microsoft.com/office/drawing/2014/main" id="{4A4B1797-067F-E719-63A1-ABC93CA0B99B}"/>
+                <a16:creationId xmlns:a16="http://schemas.microsoft.com/office/drawing/2014/main" id="{47D30023-BDC8-8916-FFC5-207AE9DC3BDB}"/>
               </a:ext>
             </a:extLst>
           </p:cNvPr>
@@ -1447,8 +1458,8 @@
         </p:nvSpPr>
         <p:spPr>
           <a:xfrm>
-            <a:off x="797190" y="6408252"/>
-            <a:ext cx="10077450" cy="2094706"/>
+            <a:off x="1195785" y="5524355"/>
+            <a:ext cx="15116175" cy="1805781"/>
           </a:xfrm>
         </p:spPr>
         <p:txBody>
@@ -1456,7 +1467,7 @@
           <a:lstStyle>
             <a:lvl1pPr marL="0" indent="0">
               <a:buNone/>
-              <a:defRPr sz="2300">
+              <a:defRPr sz="2400">
                 <a:solidFill>
                   <a:schemeClr val="tx1">
                     <a:tint val="82000"/>
@@ -1464,9 +1475,9 @@
                 </a:solidFill>
               </a:defRPr>
             </a:lvl1pPr>
-            <a:lvl2pPr marL="438135" indent="0">
+            <a:lvl2pPr marL="457200" indent="0">
               <a:buNone/>
-              <a:defRPr sz="1917">
+              <a:defRPr sz="2000">
                 <a:solidFill>
                   <a:schemeClr val="tx1">
                     <a:tint val="82000"/>
@@ -1474,9 +1485,9 @@
                 </a:solidFill>
               </a:defRPr>
             </a:lvl2pPr>
-            <a:lvl3pPr marL="876270" indent="0">
+            <a:lvl3pPr marL="914400" indent="0">
               <a:buNone/>
-              <a:defRPr sz="1725">
+              <a:defRPr sz="1800">
                 <a:solidFill>
                   <a:schemeClr val="tx1">
                     <a:tint val="82000"/>
@@ -1484,9 +1495,9 @@
                 </a:solidFill>
               </a:defRPr>
             </a:lvl3pPr>
-            <a:lvl4pPr marL="1314404" indent="0">
+            <a:lvl4pPr marL="1371600" indent="0">
               <a:buNone/>
-              <a:defRPr sz="1533">
+              <a:defRPr sz="1600">
                 <a:solidFill>
                   <a:schemeClr val="tx1">
                     <a:tint val="82000"/>
@@ -1494,9 +1505,9 @@
                 </a:solidFill>
               </a:defRPr>
             </a:lvl4pPr>
-            <a:lvl5pPr marL="1752539" indent="0">
+            <a:lvl5pPr marL="1828800" indent="0">
               <a:buNone/>
-              <a:defRPr sz="1533">
+              <a:defRPr sz="1600">
                 <a:solidFill>
                   <a:schemeClr val="tx1">
                     <a:tint val="82000"/>
@@ -1504,9 +1515,9 @@
                 </a:solidFill>
               </a:defRPr>
             </a:lvl5pPr>
-            <a:lvl6pPr marL="2190674" indent="0">
+            <a:lvl6pPr marL="2286000" indent="0">
               <a:buNone/>
-              <a:defRPr sz="1533">
+              <a:defRPr sz="1600">
                 <a:solidFill>
                   <a:schemeClr val="tx1">
                     <a:tint val="82000"/>
@@ -1514,9 +1525,9 @@
                 </a:solidFill>
               </a:defRPr>
             </a:lvl6pPr>
-            <a:lvl7pPr marL="2628809" indent="0">
+            <a:lvl7pPr marL="2743200" indent="0">
               <a:buNone/>
-              <a:defRPr sz="1533">
+              <a:defRPr sz="1600">
                 <a:solidFill>
                   <a:schemeClr val="tx1">
                     <a:tint val="82000"/>
@@ -1524,9 +1535,9 @@
                 </a:solidFill>
               </a:defRPr>
             </a:lvl7pPr>
-            <a:lvl8pPr marL="3066943" indent="0">
+            <a:lvl8pPr marL="3200400" indent="0">
               <a:buNone/>
-              <a:defRPr sz="1533">
+              <a:defRPr sz="1600">
                 <a:solidFill>
                   <a:schemeClr val="tx1">
                     <a:tint val="82000"/>
@@ -1534,9 +1545,9 @@
                 </a:solidFill>
               </a:defRPr>
             </a:lvl8pPr>
-            <a:lvl9pPr marL="3505078" indent="0">
+            <a:lvl9pPr marL="3657600" indent="0">
               <a:buNone/>
-              <a:defRPr sz="1533">
+              <a:defRPr sz="1600">
                 <a:solidFill>
                   <a:schemeClr val="tx1">
                     <a:tint val="82000"/>
@@ -1559,7 +1570,7 @@
           <p:cNvPr id="4" name="日期占位符 3">
             <a:extLst>
               <a:ext uri="{FF2B5EF4-FFF2-40B4-BE49-F238E27FC236}">
-                <a16:creationId xmlns:a16="http://schemas.microsoft.com/office/drawing/2014/main" id="{59CAC33A-CC94-80D3-AF02-D48B0706AD5A}"/>
+                <a16:creationId xmlns:a16="http://schemas.microsoft.com/office/drawing/2014/main" id="{8B4E564A-C10C-0960-F8E2-F7E6C79F7DCF}"/>
               </a:ext>
             </a:extLst>
           </p:cNvPr>
@@ -1575,9 +1586,9 @@
           <a:bodyPr/>
           <a:lstStyle/>
           <a:p>
-            <a:fld id="{3BFD762F-A6DF-4976-BAF9-7ED4F9CC0F9F}" type="datetimeFigureOut">
+            <a:fld id="{1C947BBF-35D0-4785-BB1A-24495BBE301F}" type="datetimeFigureOut">
               <a:rPr lang="zh-CN" altLang="en-US" smtClean="0"/>
-              <a:t>2026/10/6</a:t>
+              <a:t>2026/10/9</a:t>
             </a:fld>
             <a:endParaRPr lang="zh-CN" altLang="en-US"/>
           </a:p>
@@ -1588,7 +1599,7 @@
           <p:cNvPr id="5" name="页脚占位符 4">
             <a:extLst>
               <a:ext uri="{FF2B5EF4-FFF2-40B4-BE49-F238E27FC236}">
-                <a16:creationId xmlns:a16="http://schemas.microsoft.com/office/drawing/2014/main" id="{1AE24EA3-42BC-BFC2-114D-D65AD82A967B}"/>
+                <a16:creationId xmlns:a16="http://schemas.microsoft.com/office/drawing/2014/main" id="{4C486163-59DE-9A01-BCDA-32C2E87BBCF5}"/>
               </a:ext>
             </a:extLst>
           </p:cNvPr>
@@ -1613,7 +1624,7 @@
           <p:cNvPr id="6" name="灯片编号占位符 5">
             <a:extLst>
               <a:ext uri="{FF2B5EF4-FFF2-40B4-BE49-F238E27FC236}">
-                <a16:creationId xmlns:a16="http://schemas.microsoft.com/office/drawing/2014/main" id="{786D2DD4-0F83-38DC-E065-AA026447B10C}"/>
+                <a16:creationId xmlns:a16="http://schemas.microsoft.com/office/drawing/2014/main" id="{F78F3A9A-23A9-0D80-5A44-23E42D8E02B1}"/>
               </a:ext>
             </a:extLst>
           </p:cNvPr>
@@ -1629,7 +1640,7 @@
           <a:bodyPr/>
           <a:lstStyle/>
           <a:p>
-            <a:fld id="{6D9F8A20-A1EF-442E-94A9-FA0659D951CB}" type="slidenum">
+            <a:fld id="{A35C3B88-3BED-4C5A-A8AB-C7491EE0F2B5}" type="slidenum">
               <a:rPr lang="zh-CN" altLang="en-US" smtClean="0"/>
               <a:t>‹#›</a:t>
             </a:fld>
@@ -1640,7 +1651,7 @@
     </p:spTree>
     <p:extLst>
       <p:ext uri="{BB962C8B-B14F-4D97-AF65-F5344CB8AC3E}">
-        <p14:creationId xmlns:p14="http://schemas.microsoft.com/office/powerpoint/2010/main" val="1131485058"/>
+        <p14:creationId xmlns:p14="http://schemas.microsoft.com/office/powerpoint/2010/main" val="2116722338"/>
       </p:ext>
     </p:extLst>
   </p:cSld>
@@ -1672,7 +1683,7 @@
           <p:cNvPr id="2" name="标题 1">
             <a:extLst>
               <a:ext uri="{FF2B5EF4-FFF2-40B4-BE49-F238E27FC236}">
-                <a16:creationId xmlns:a16="http://schemas.microsoft.com/office/drawing/2014/main" id="{B3A733F2-047E-192B-D8CC-740A217060A9}"/>
+                <a16:creationId xmlns:a16="http://schemas.microsoft.com/office/drawing/2014/main" id="{BCFA410D-C6DB-21E1-B698-BAC5C977205D}"/>
               </a:ext>
             </a:extLst>
           </p:cNvPr>
@@ -1700,7 +1711,7 @@
           <p:cNvPr id="3" name="内容占位符 2">
             <a:extLst>
               <a:ext uri="{FF2B5EF4-FFF2-40B4-BE49-F238E27FC236}">
-                <a16:creationId xmlns:a16="http://schemas.microsoft.com/office/drawing/2014/main" id="{061D32E1-E469-4F48-8BED-C2A19FAC1FE0}"/>
+                <a16:creationId xmlns:a16="http://schemas.microsoft.com/office/drawing/2014/main" id="{F0493C2A-1B57-788A-E50D-5AC3B34C52E4}"/>
               </a:ext>
             </a:extLst>
           </p:cNvPr>
@@ -1713,8 +1724,8 @@
         </p:nvSpPr>
         <p:spPr>
           <a:xfrm>
-            <a:off x="803275" y="2549113"/>
-            <a:ext cx="4965700" cy="6075757"/>
+            <a:off x="1204913" y="2197511"/>
+            <a:ext cx="7448550" cy="5237722"/>
           </a:xfrm>
         </p:spPr>
         <p:txBody>
@@ -1762,7 +1773,7 @@
           <p:cNvPr id="4" name="内容占位符 3">
             <a:extLst>
               <a:ext uri="{FF2B5EF4-FFF2-40B4-BE49-F238E27FC236}">
-                <a16:creationId xmlns:a16="http://schemas.microsoft.com/office/drawing/2014/main" id="{1E8A34F7-C7FD-FE90-9013-9439B9F2D9DA}"/>
+                <a16:creationId xmlns:a16="http://schemas.microsoft.com/office/drawing/2014/main" id="{43B8288A-0635-83C1-8314-CE2CAD3A3973}"/>
               </a:ext>
             </a:extLst>
           </p:cNvPr>
@@ -1775,8 +1786,8 @@
         </p:nvSpPr>
         <p:spPr>
           <a:xfrm>
-            <a:off x="5915025" y="2549113"/>
-            <a:ext cx="4965700" cy="6075757"/>
+            <a:off x="8872538" y="2197511"/>
+            <a:ext cx="7448550" cy="5237722"/>
           </a:xfrm>
         </p:spPr>
         <p:txBody>
@@ -1824,7 +1835,7 @@
           <p:cNvPr id="5" name="日期占位符 4">
             <a:extLst>
               <a:ext uri="{FF2B5EF4-FFF2-40B4-BE49-F238E27FC236}">
-                <a16:creationId xmlns:a16="http://schemas.microsoft.com/office/drawing/2014/main" id="{6907DEFE-F205-032B-A202-D1C2CBCB27F4}"/>
+                <a16:creationId xmlns:a16="http://schemas.microsoft.com/office/drawing/2014/main" id="{C61276A1-E665-6602-36B5-93CCDCEEAB07}"/>
               </a:ext>
             </a:extLst>
           </p:cNvPr>
@@ -1840,9 +1851,9 @@
           <a:bodyPr/>
           <a:lstStyle/>
           <a:p>
-            <a:fld id="{3BFD762F-A6DF-4976-BAF9-7ED4F9CC0F9F}" type="datetimeFigureOut">
+            <a:fld id="{1C947BBF-35D0-4785-BB1A-24495BBE301F}" type="datetimeFigureOut">
               <a:rPr lang="zh-CN" altLang="en-US" smtClean="0"/>
-              <a:t>2026/10/6</a:t>
+              <a:t>2026/10/9</a:t>
             </a:fld>
             <a:endParaRPr lang="zh-CN" altLang="en-US"/>
           </a:p>
@@ -1853,7 +1864,7 @@
           <p:cNvPr id="6" name="页脚占位符 5">
             <a:extLst>
               <a:ext uri="{FF2B5EF4-FFF2-40B4-BE49-F238E27FC236}">
-                <a16:creationId xmlns:a16="http://schemas.microsoft.com/office/drawing/2014/main" id="{A89D614F-AB48-9850-562F-B674494CEE1C}"/>
+                <a16:creationId xmlns:a16="http://schemas.microsoft.com/office/drawing/2014/main" id="{BB9803D8-534F-4827-DD54-D2EEF3293589}"/>
               </a:ext>
             </a:extLst>
           </p:cNvPr>
@@ -1878,7 +1889,7 @@
           <p:cNvPr id="7" name="灯片编号占位符 6">
             <a:extLst>
               <a:ext uri="{FF2B5EF4-FFF2-40B4-BE49-F238E27FC236}">
-                <a16:creationId xmlns:a16="http://schemas.microsoft.com/office/drawing/2014/main" id="{D7B16568-26F7-3209-530D-E2BF5EA02A79}"/>
+                <a16:creationId xmlns:a16="http://schemas.microsoft.com/office/drawing/2014/main" id="{BDD0742F-B4A1-0788-F803-22A59E3E7960}"/>
               </a:ext>
             </a:extLst>
           </p:cNvPr>
@@ -1894,7 +1905,7 @@
           <a:bodyPr/>
           <a:lstStyle/>
           <a:p>
-            <a:fld id="{6D9F8A20-A1EF-442E-94A9-FA0659D951CB}" type="slidenum">
+            <a:fld id="{A35C3B88-3BED-4C5A-A8AB-C7491EE0F2B5}" type="slidenum">
               <a:rPr lang="zh-CN" altLang="en-US" smtClean="0"/>
               <a:t>‹#›</a:t>
             </a:fld>
@@ -1905,7 +1916,7 @@
     </p:spTree>
     <p:extLst>
       <p:ext uri="{BB962C8B-B14F-4D97-AF65-F5344CB8AC3E}">
-        <p14:creationId xmlns:p14="http://schemas.microsoft.com/office/powerpoint/2010/main" val="3182900356"/>
+        <p14:creationId xmlns:p14="http://schemas.microsoft.com/office/powerpoint/2010/main" val="1386177728"/>
       </p:ext>
     </p:extLst>
   </p:cSld>
@@ -1937,7 +1948,7 @@
           <p:cNvPr id="2" name="标题 1">
             <a:extLst>
               <a:ext uri="{FF2B5EF4-FFF2-40B4-BE49-F238E27FC236}">
-                <a16:creationId xmlns:a16="http://schemas.microsoft.com/office/drawing/2014/main" id="{525ED55D-3455-3B23-3988-DACE93F03C30}"/>
+                <a16:creationId xmlns:a16="http://schemas.microsoft.com/office/drawing/2014/main" id="{F6FF6AE2-EC4F-EAF2-34CB-05072EACBB51}"/>
               </a:ext>
             </a:extLst>
           </p:cNvPr>
@@ -1950,8 +1961,8 @@
         </p:nvSpPr>
         <p:spPr>
           <a:xfrm>
-            <a:off x="804797" y="509825"/>
-            <a:ext cx="10077450" cy="1850879"/>
+            <a:off x="1207196" y="439504"/>
+            <a:ext cx="15116175" cy="1595585"/>
           </a:xfrm>
         </p:spPr>
         <p:txBody>
@@ -1970,7 +1981,7 @@
           <p:cNvPr id="3" name="文本占位符 2">
             <a:extLst>
               <a:ext uri="{FF2B5EF4-FFF2-40B4-BE49-F238E27FC236}">
-                <a16:creationId xmlns:a16="http://schemas.microsoft.com/office/drawing/2014/main" id="{C5AF8531-7689-43E1-3592-F1E9716A319D}"/>
+                <a16:creationId xmlns:a16="http://schemas.microsoft.com/office/drawing/2014/main" id="{10949D15-074E-C6D6-2AF6-C9065DD00E90}"/>
               </a:ext>
             </a:extLst>
           </p:cNvPr>
@@ -1983,8 +1994,8 @@
         </p:nvSpPr>
         <p:spPr>
           <a:xfrm>
-            <a:off x="804798" y="2347402"/>
-            <a:ext cx="4942879" cy="1150425"/>
+            <a:off x="1207197" y="2023622"/>
+            <a:ext cx="7414319" cy="991746"/>
           </a:xfrm>
         </p:spPr>
         <p:txBody>
@@ -1992,39 +2003,39 @@
           <a:lstStyle>
             <a:lvl1pPr marL="0" indent="0">
               <a:buNone/>
-              <a:defRPr sz="2300" b="1"/>
+              <a:defRPr sz="2400" b="1"/>
             </a:lvl1pPr>
-            <a:lvl2pPr marL="438135" indent="0">
+            <a:lvl2pPr marL="457200" indent="0">
               <a:buNone/>
-              <a:defRPr sz="1917" b="1"/>
+              <a:defRPr sz="2000" b="1"/>
             </a:lvl2pPr>
-            <a:lvl3pPr marL="876270" indent="0">
+            <a:lvl3pPr marL="914400" indent="0">
               <a:buNone/>
-              <a:defRPr sz="1725" b="1"/>
+              <a:defRPr sz="1800" b="1"/>
             </a:lvl3pPr>
-            <a:lvl4pPr marL="1314404" indent="0">
+            <a:lvl4pPr marL="1371600" indent="0">
               <a:buNone/>
-              <a:defRPr sz="1533" b="1"/>
+              <a:defRPr sz="1600" b="1"/>
             </a:lvl4pPr>
-            <a:lvl5pPr marL="1752539" indent="0">
+            <a:lvl5pPr marL="1828800" indent="0">
               <a:buNone/>
-              <a:defRPr sz="1533" b="1"/>
+              <a:defRPr sz="1600" b="1"/>
             </a:lvl5pPr>
-            <a:lvl6pPr marL="2190674" indent="0">
+            <a:lvl6pPr marL="2286000" indent="0">
               <a:buNone/>
-              <a:defRPr sz="1533" b="1"/>
+              <a:defRPr sz="1600" b="1"/>
             </a:lvl6pPr>
-            <a:lvl7pPr marL="2628809" indent="0">
+            <a:lvl7pPr marL="2743200" indent="0">
               <a:buNone/>
-              <a:defRPr sz="1533" b="1"/>
+              <a:defRPr sz="1600" b="1"/>
             </a:lvl7pPr>
-            <a:lvl8pPr marL="3066943" indent="0">
+            <a:lvl8pPr marL="3200400" indent="0">
               <a:buNone/>
-              <a:defRPr sz="1533" b="1"/>
+              <a:defRPr sz="1600" b="1"/>
             </a:lvl8pPr>
-            <a:lvl9pPr marL="3505078" indent="0">
+            <a:lvl9pPr marL="3657600" indent="0">
               <a:buNone/>
-              <a:defRPr sz="1533" b="1"/>
+              <a:defRPr sz="1600" b="1"/>
             </a:lvl9pPr>
           </a:lstStyle>
           <a:p>
@@ -2041,7 +2052,7 @@
           <p:cNvPr id="4" name="内容占位符 3">
             <a:extLst>
               <a:ext uri="{FF2B5EF4-FFF2-40B4-BE49-F238E27FC236}">
-                <a16:creationId xmlns:a16="http://schemas.microsoft.com/office/drawing/2014/main" id="{6CBCC9EC-576F-F1AB-8B0A-8B480EAA379C}"/>
+                <a16:creationId xmlns:a16="http://schemas.microsoft.com/office/drawing/2014/main" id="{76BDA9DC-E2A6-2CC5-04CF-8BE9D5A1EA51}"/>
               </a:ext>
             </a:extLst>
           </p:cNvPr>
@@ -2054,8 +2065,8 @@
         </p:nvSpPr>
         <p:spPr>
           <a:xfrm>
-            <a:off x="804798" y="3497827"/>
-            <a:ext cx="4942879" cy="5144777"/>
+            <a:off x="1207197" y="3015368"/>
+            <a:ext cx="7414319" cy="4435152"/>
           </a:xfrm>
         </p:spPr>
         <p:txBody>
@@ -2103,7 +2114,7 @@
           <p:cNvPr id="5" name="文本占位符 4">
             <a:extLst>
               <a:ext uri="{FF2B5EF4-FFF2-40B4-BE49-F238E27FC236}">
-                <a16:creationId xmlns:a16="http://schemas.microsoft.com/office/drawing/2014/main" id="{12AEB0CC-167E-3265-A56D-1C97FCE4898A}"/>
+                <a16:creationId xmlns:a16="http://schemas.microsoft.com/office/drawing/2014/main" id="{917E7F55-6514-1BFB-A1EB-AA09D6FDD030}"/>
               </a:ext>
             </a:extLst>
           </p:cNvPr>
@@ -2116,8 +2127,8 @@
         </p:nvSpPr>
         <p:spPr>
           <a:xfrm>
-            <a:off x="5915025" y="2347402"/>
-            <a:ext cx="4967222" cy="1150425"/>
+            <a:off x="8872538" y="2023622"/>
+            <a:ext cx="7450833" cy="991746"/>
           </a:xfrm>
         </p:spPr>
         <p:txBody>
@@ -2125,39 +2136,39 @@
           <a:lstStyle>
             <a:lvl1pPr marL="0" indent="0">
               <a:buNone/>
-              <a:defRPr sz="2300" b="1"/>
+              <a:defRPr sz="2400" b="1"/>
             </a:lvl1pPr>
-            <a:lvl2pPr marL="438135" indent="0">
+            <a:lvl2pPr marL="457200" indent="0">
               <a:buNone/>
-              <a:defRPr sz="1917" b="1"/>
+              <a:defRPr sz="2000" b="1"/>
             </a:lvl2pPr>
-            <a:lvl3pPr marL="876270" indent="0">
+            <a:lvl3pPr marL="914400" indent="0">
               <a:buNone/>
-              <a:defRPr sz="1725" b="1"/>
+              <a:defRPr sz="1800" b="1"/>
             </a:lvl3pPr>
-            <a:lvl4pPr marL="1314404" indent="0">
+            <a:lvl4pPr marL="1371600" indent="0">
               <a:buNone/>
-              <a:defRPr sz="1533" b="1"/>
+              <a:defRPr sz="1600" b="1"/>
             </a:lvl4pPr>
-            <a:lvl5pPr marL="1752539" indent="0">
+            <a:lvl5pPr marL="1828800" indent="0">
               <a:buNone/>
-              <a:defRPr sz="1533" b="1"/>
+              <a:defRPr sz="1600" b="1"/>
             </a:lvl5pPr>
-            <a:lvl6pPr marL="2190674" indent="0">
+            <a:lvl6pPr marL="2286000" indent="0">
               <a:buNone/>
-              <a:defRPr sz="1533" b="1"/>
+              <a:defRPr sz="1600" b="1"/>
             </a:lvl6pPr>
-            <a:lvl7pPr marL="2628809" indent="0">
+            <a:lvl7pPr marL="2743200" indent="0">
               <a:buNone/>
-              <a:defRPr sz="1533" b="1"/>
+              <a:defRPr sz="1600" b="1"/>
             </a:lvl7pPr>
-            <a:lvl8pPr marL="3066943" indent="0">
+            <a:lvl8pPr marL="3200400" indent="0">
               <a:buNone/>
-              <a:defRPr sz="1533" b="1"/>
+              <a:defRPr sz="1600" b="1"/>
             </a:lvl8pPr>
-            <a:lvl9pPr marL="3505078" indent="0">
+            <a:lvl9pPr marL="3657600" indent="0">
               <a:buNone/>
-              <a:defRPr sz="1533" b="1"/>
+              <a:defRPr sz="1600" b="1"/>
             </a:lvl9pPr>
           </a:lstStyle>
           <a:p>
@@ -2174,7 +2185,7 @@
           <p:cNvPr id="6" name="内容占位符 5">
             <a:extLst>
               <a:ext uri="{FF2B5EF4-FFF2-40B4-BE49-F238E27FC236}">
-                <a16:creationId xmlns:a16="http://schemas.microsoft.com/office/drawing/2014/main" id="{790D5072-47BF-69E1-1EB5-5ACB7A0A1F96}"/>
+                <a16:creationId xmlns:a16="http://schemas.microsoft.com/office/drawing/2014/main" id="{1980F17D-330D-0681-41DE-BFA9C2A50F18}"/>
               </a:ext>
             </a:extLst>
           </p:cNvPr>
@@ -2187,8 +2198,8 @@
         </p:nvSpPr>
         <p:spPr>
           <a:xfrm>
-            <a:off x="5915025" y="3497827"/>
-            <a:ext cx="4967222" cy="5144777"/>
+            <a:off x="8872538" y="3015368"/>
+            <a:ext cx="7450833" cy="4435152"/>
           </a:xfrm>
         </p:spPr>
         <p:txBody>
@@ -2236,7 +2247,7 @@
           <p:cNvPr id="7" name="日期占位符 6">
             <a:extLst>
               <a:ext uri="{FF2B5EF4-FFF2-40B4-BE49-F238E27FC236}">
-                <a16:creationId xmlns:a16="http://schemas.microsoft.com/office/drawing/2014/main" id="{8063315C-052E-61A6-BD6B-4F33B2838711}"/>
+                <a16:creationId xmlns:a16="http://schemas.microsoft.com/office/drawing/2014/main" id="{99B20C7F-5AE9-E53E-E51B-00EC5C1C054E}"/>
               </a:ext>
             </a:extLst>
           </p:cNvPr>
@@ -2252,9 +2263,9 @@
           <a:bodyPr/>
           <a:lstStyle/>
           <a:p>
-            <a:fld id="{3BFD762F-A6DF-4976-BAF9-7ED4F9CC0F9F}" type="datetimeFigureOut">
+            <a:fld id="{1C947BBF-35D0-4785-BB1A-24495BBE301F}" type="datetimeFigureOut">
               <a:rPr lang="zh-CN" altLang="en-US" smtClean="0"/>
-              <a:t>2026/10/6</a:t>
+              <a:t>2026/10/9</a:t>
             </a:fld>
             <a:endParaRPr lang="zh-CN" altLang="en-US"/>
           </a:p>
@@ -2265,7 +2276,7 @@
           <p:cNvPr id="8" name="页脚占位符 7">
             <a:extLst>
               <a:ext uri="{FF2B5EF4-FFF2-40B4-BE49-F238E27FC236}">
-                <a16:creationId xmlns:a16="http://schemas.microsoft.com/office/drawing/2014/main" id="{50B105F4-F461-A708-9B9D-5A9240F03148}"/>
+                <a16:creationId xmlns:a16="http://schemas.microsoft.com/office/drawing/2014/main" id="{462776D0-CD23-D403-E866-8F342070F01C}"/>
               </a:ext>
             </a:extLst>
           </p:cNvPr>
@@ -2290,7 +2301,7 @@
           <p:cNvPr id="9" name="灯片编号占位符 8">
             <a:extLst>
               <a:ext uri="{FF2B5EF4-FFF2-40B4-BE49-F238E27FC236}">
-                <a16:creationId xmlns:a16="http://schemas.microsoft.com/office/drawing/2014/main" id="{A304E192-14C6-A4A9-A515-8C2760778973}"/>
+                <a16:creationId xmlns:a16="http://schemas.microsoft.com/office/drawing/2014/main" id="{923645FB-ADF9-9D1F-ACFC-D3AE70ED2046}"/>
               </a:ext>
             </a:extLst>
           </p:cNvPr>
@@ -2306,7 +2317,7 @@
           <a:bodyPr/>
           <a:lstStyle/>
           <a:p>
-            <a:fld id="{6D9F8A20-A1EF-442E-94A9-FA0659D951CB}" type="slidenum">
+            <a:fld id="{A35C3B88-3BED-4C5A-A8AB-C7491EE0F2B5}" type="slidenum">
               <a:rPr lang="zh-CN" altLang="en-US" smtClean="0"/>
               <a:t>‹#›</a:t>
             </a:fld>
@@ -2317,7 +2328,7 @@
     </p:spTree>
     <p:extLst>
       <p:ext uri="{BB962C8B-B14F-4D97-AF65-F5344CB8AC3E}">
-        <p14:creationId xmlns:p14="http://schemas.microsoft.com/office/powerpoint/2010/main" val="2960881526"/>
+        <p14:creationId xmlns:p14="http://schemas.microsoft.com/office/powerpoint/2010/main" val="3626930520"/>
       </p:ext>
     </p:extLst>
   </p:cSld>
@@ -2349,7 +2360,7 @@
           <p:cNvPr id="2" name="标题 1">
             <a:extLst>
               <a:ext uri="{FF2B5EF4-FFF2-40B4-BE49-F238E27FC236}">
-                <a16:creationId xmlns:a16="http://schemas.microsoft.com/office/drawing/2014/main" id="{21140740-C86B-C57F-C74E-BC36D18911FA}"/>
+                <a16:creationId xmlns:a16="http://schemas.microsoft.com/office/drawing/2014/main" id="{69033BCA-1652-85D6-644E-BAE32A369AA6}"/>
               </a:ext>
             </a:extLst>
           </p:cNvPr>
@@ -2377,7 +2388,7 @@
           <p:cNvPr id="3" name="日期占位符 2">
             <a:extLst>
               <a:ext uri="{FF2B5EF4-FFF2-40B4-BE49-F238E27FC236}">
-                <a16:creationId xmlns:a16="http://schemas.microsoft.com/office/drawing/2014/main" id="{D7499792-96F6-D078-E521-6CB491BE7439}"/>
+                <a16:creationId xmlns:a16="http://schemas.microsoft.com/office/drawing/2014/main" id="{7BBDC3D0-3A2E-9E22-3C3B-D7806E7E8171}"/>
               </a:ext>
             </a:extLst>
           </p:cNvPr>
@@ -2393,9 +2404,9 @@
           <a:bodyPr/>
           <a:lstStyle/>
           <a:p>
-            <a:fld id="{3BFD762F-A6DF-4976-BAF9-7ED4F9CC0F9F}" type="datetimeFigureOut">
+            <a:fld id="{1C947BBF-35D0-4785-BB1A-24495BBE301F}" type="datetimeFigureOut">
               <a:rPr lang="zh-CN" altLang="en-US" smtClean="0"/>
-              <a:t>2026/10/6</a:t>
+              <a:t>2026/10/9</a:t>
             </a:fld>
             <a:endParaRPr lang="zh-CN" altLang="en-US"/>
           </a:p>
@@ -2406,7 +2417,7 @@
           <p:cNvPr id="4" name="页脚占位符 3">
             <a:extLst>
               <a:ext uri="{FF2B5EF4-FFF2-40B4-BE49-F238E27FC236}">
-                <a16:creationId xmlns:a16="http://schemas.microsoft.com/office/drawing/2014/main" id="{5B90F3AF-D54B-5E82-CB0B-A0963D6F9AE6}"/>
+                <a16:creationId xmlns:a16="http://schemas.microsoft.com/office/drawing/2014/main" id="{01EAB6B2-9EDC-FFB0-7AE6-C2F3B7A79290}"/>
               </a:ext>
             </a:extLst>
           </p:cNvPr>
@@ -2431,7 +2442,7 @@
           <p:cNvPr id="5" name="灯片编号占位符 4">
             <a:extLst>
               <a:ext uri="{FF2B5EF4-FFF2-40B4-BE49-F238E27FC236}">
-                <a16:creationId xmlns:a16="http://schemas.microsoft.com/office/drawing/2014/main" id="{675E8892-C557-3038-6B1B-598F774BA371}"/>
+                <a16:creationId xmlns:a16="http://schemas.microsoft.com/office/drawing/2014/main" id="{15BF0587-2BE8-8F42-8456-F25BB3C58094}"/>
               </a:ext>
             </a:extLst>
           </p:cNvPr>
@@ -2447,7 +2458,7 @@
           <a:bodyPr/>
           <a:lstStyle/>
           <a:p>
-            <a:fld id="{6D9F8A20-A1EF-442E-94A9-FA0659D951CB}" type="slidenum">
+            <a:fld id="{A35C3B88-3BED-4C5A-A8AB-C7491EE0F2B5}" type="slidenum">
               <a:rPr lang="zh-CN" altLang="en-US" smtClean="0"/>
               <a:t>‹#›</a:t>
             </a:fld>
@@ -2458,7 +2469,7 @@
     </p:spTree>
     <p:extLst>
       <p:ext uri="{BB962C8B-B14F-4D97-AF65-F5344CB8AC3E}">
-        <p14:creationId xmlns:p14="http://schemas.microsoft.com/office/powerpoint/2010/main" val="3705675083"/>
+        <p14:creationId xmlns:p14="http://schemas.microsoft.com/office/powerpoint/2010/main" val="3259287251"/>
       </p:ext>
     </p:extLst>
   </p:cSld>
@@ -2490,7 +2501,7 @@
           <p:cNvPr id="2" name="日期占位符 1">
             <a:extLst>
               <a:ext uri="{FF2B5EF4-FFF2-40B4-BE49-F238E27FC236}">
-                <a16:creationId xmlns:a16="http://schemas.microsoft.com/office/drawing/2014/main" id="{2564CBF0-1283-ED63-1CDE-C0F4295AE740}"/>
+                <a16:creationId xmlns:a16="http://schemas.microsoft.com/office/drawing/2014/main" id="{6B509878-8C80-562A-17E1-92A925A2004C}"/>
               </a:ext>
             </a:extLst>
           </p:cNvPr>
@@ -2506,9 +2517,9 @@
           <a:bodyPr/>
           <a:lstStyle/>
           <a:p>
-            <a:fld id="{3BFD762F-A6DF-4976-BAF9-7ED4F9CC0F9F}" type="datetimeFigureOut">
+            <a:fld id="{1C947BBF-35D0-4785-BB1A-24495BBE301F}" type="datetimeFigureOut">
               <a:rPr lang="zh-CN" altLang="en-US" smtClean="0"/>
-              <a:t>2026/10/6</a:t>
+              <a:t>2026/10/9</a:t>
             </a:fld>
             <a:endParaRPr lang="zh-CN" altLang="en-US"/>
           </a:p>
@@ -2519,7 +2530,7 @@
           <p:cNvPr id="3" name="页脚占位符 2">
             <a:extLst>
               <a:ext uri="{FF2B5EF4-FFF2-40B4-BE49-F238E27FC236}">
-                <a16:creationId xmlns:a16="http://schemas.microsoft.com/office/drawing/2014/main" id="{5A6FCA50-8FD6-317B-D8E6-C27F57795DAF}"/>
+                <a16:creationId xmlns:a16="http://schemas.microsoft.com/office/drawing/2014/main" id="{F59C558F-34C1-F6FB-A650-3F7EDD03E3CA}"/>
               </a:ext>
             </a:extLst>
           </p:cNvPr>
@@ -2544,7 +2555,7 @@
           <p:cNvPr id="4" name="灯片编号占位符 3">
             <a:extLst>
               <a:ext uri="{FF2B5EF4-FFF2-40B4-BE49-F238E27FC236}">
-                <a16:creationId xmlns:a16="http://schemas.microsoft.com/office/drawing/2014/main" id="{F08ADA48-73AC-8A38-1F45-9D63CF13B3DC}"/>
+                <a16:creationId xmlns:a16="http://schemas.microsoft.com/office/drawing/2014/main" id="{7C1CE6E2-69B7-0DDA-F961-DF9A270A1B45}"/>
               </a:ext>
             </a:extLst>
           </p:cNvPr>
@@ -2560,7 +2571,7 @@
           <a:bodyPr/>
           <a:lstStyle/>
           <a:p>
-            <a:fld id="{6D9F8A20-A1EF-442E-94A9-FA0659D951CB}" type="slidenum">
+            <a:fld id="{A35C3B88-3BED-4C5A-A8AB-C7491EE0F2B5}" type="slidenum">
               <a:rPr lang="zh-CN" altLang="en-US" smtClean="0"/>
               <a:t>‹#›</a:t>
             </a:fld>
@@ -2571,7 +2582,7 @@
     </p:spTree>
     <p:extLst>
       <p:ext uri="{BB962C8B-B14F-4D97-AF65-F5344CB8AC3E}">
-        <p14:creationId xmlns:p14="http://schemas.microsoft.com/office/powerpoint/2010/main" val="64761800"/>
+        <p14:creationId xmlns:p14="http://schemas.microsoft.com/office/powerpoint/2010/main" val="2968130633"/>
       </p:ext>
     </p:extLst>
   </p:cSld>
@@ -2603,7 +2614,7 @@
           <p:cNvPr id="2" name="标题 1">
             <a:extLst>
               <a:ext uri="{FF2B5EF4-FFF2-40B4-BE49-F238E27FC236}">
-                <a16:creationId xmlns:a16="http://schemas.microsoft.com/office/drawing/2014/main" id="{FB3760B3-9E50-82CF-9925-C283DD70702A}"/>
+                <a16:creationId xmlns:a16="http://schemas.microsoft.com/office/drawing/2014/main" id="{1FB45DA6-E027-AF58-08FA-EEC539C6D452}"/>
               </a:ext>
             </a:extLst>
           </p:cNvPr>
@@ -2616,15 +2627,15 @@
         </p:nvSpPr>
         <p:spPr>
           <a:xfrm>
-            <a:off x="804797" y="638387"/>
-            <a:ext cx="3768394" cy="2234353"/>
+            <a:off x="1207197" y="550333"/>
+            <a:ext cx="5652591" cy="1926167"/>
           </a:xfrm>
         </p:spPr>
         <p:txBody>
           <a:bodyPr anchor="b"/>
           <a:lstStyle>
             <a:lvl1pPr>
-              <a:defRPr sz="3067"/>
+              <a:defRPr sz="3200"/>
             </a:lvl1pPr>
           </a:lstStyle>
           <a:p>
@@ -2640,7 +2651,7 @@
           <p:cNvPr id="3" name="内容占位符 2">
             <a:extLst>
               <a:ext uri="{FF2B5EF4-FFF2-40B4-BE49-F238E27FC236}">
-                <a16:creationId xmlns:a16="http://schemas.microsoft.com/office/drawing/2014/main" id="{A55118B5-B4F1-18F5-4D2E-4484741653FF}"/>
+                <a16:creationId xmlns:a16="http://schemas.microsoft.com/office/drawing/2014/main" id="{4D267C20-3812-0542-6041-B8C87EF2B716}"/>
               </a:ext>
             </a:extLst>
           </p:cNvPr>
@@ -2653,39 +2664,39 @@
         </p:nvSpPr>
         <p:spPr>
           <a:xfrm>
-            <a:off x="4967223" y="1378740"/>
-            <a:ext cx="5915025" cy="6805025"/>
+            <a:off x="7450832" y="1188569"/>
+            <a:ext cx="8872538" cy="5866400"/>
           </a:xfrm>
         </p:spPr>
         <p:txBody>
           <a:bodyPr/>
           <a:lstStyle>
             <a:lvl1pPr>
-              <a:defRPr sz="3067"/>
+              <a:defRPr sz="3200"/>
             </a:lvl1pPr>
             <a:lvl2pPr>
-              <a:defRPr sz="2683"/>
+              <a:defRPr sz="2800"/>
             </a:lvl2pPr>
             <a:lvl3pPr>
-              <a:defRPr sz="2300"/>
+              <a:defRPr sz="2400"/>
             </a:lvl3pPr>
             <a:lvl4pPr>
-              <a:defRPr sz="1917"/>
+              <a:defRPr sz="2000"/>
             </a:lvl4pPr>
             <a:lvl5pPr>
-              <a:defRPr sz="1917"/>
+              <a:defRPr sz="2000"/>
             </a:lvl5pPr>
             <a:lvl6pPr>
-              <a:defRPr sz="1917"/>
+              <a:defRPr sz="2000"/>
             </a:lvl6pPr>
             <a:lvl7pPr>
-              <a:defRPr sz="1917"/>
+              <a:defRPr sz="2000"/>
             </a:lvl7pPr>
             <a:lvl8pPr>
-              <a:defRPr sz="1917"/>
+              <a:defRPr sz="2000"/>
             </a:lvl8pPr>
             <a:lvl9pPr>
-              <a:defRPr sz="1917"/>
+              <a:defRPr sz="2000"/>
             </a:lvl9pPr>
           </a:lstStyle>
           <a:p>
@@ -2730,7 +2741,7 @@
           <p:cNvPr id="4" name="文本占位符 3">
             <a:extLst>
               <a:ext uri="{FF2B5EF4-FFF2-40B4-BE49-F238E27FC236}">
-                <a16:creationId xmlns:a16="http://schemas.microsoft.com/office/drawing/2014/main" id="{6D7FC83D-F84C-8D36-EE1B-D60FDFED10CA}"/>
+                <a16:creationId xmlns:a16="http://schemas.microsoft.com/office/drawing/2014/main" id="{5055771A-D660-D5A2-8596-9107F5861F0B}"/>
               </a:ext>
             </a:extLst>
           </p:cNvPr>
@@ -2743,8 +2754,8 @@
         </p:nvSpPr>
         <p:spPr>
           <a:xfrm>
-            <a:off x="804797" y="2872740"/>
-            <a:ext cx="3768394" cy="5322106"/>
+            <a:off x="1207197" y="2476500"/>
+            <a:ext cx="5652591" cy="4588023"/>
           </a:xfrm>
         </p:spPr>
         <p:txBody>
@@ -2752,39 +2763,39 @@
           <a:lstStyle>
             <a:lvl1pPr marL="0" indent="0">
               <a:buNone/>
-              <a:defRPr sz="1533"/>
+              <a:defRPr sz="1600"/>
             </a:lvl1pPr>
-            <a:lvl2pPr marL="438135" indent="0">
+            <a:lvl2pPr marL="457200" indent="0">
               <a:buNone/>
-              <a:defRPr sz="1342"/>
+              <a:defRPr sz="1400"/>
             </a:lvl2pPr>
-            <a:lvl3pPr marL="876270" indent="0">
+            <a:lvl3pPr marL="914400" indent="0">
               <a:buNone/>
-              <a:defRPr sz="1150"/>
+              <a:defRPr sz="1200"/>
             </a:lvl3pPr>
-            <a:lvl4pPr marL="1314404" indent="0">
+            <a:lvl4pPr marL="1371600" indent="0">
               <a:buNone/>
-              <a:defRPr sz="958"/>
+              <a:defRPr sz="1000"/>
             </a:lvl4pPr>
-            <a:lvl5pPr marL="1752539" indent="0">
+            <a:lvl5pPr marL="1828800" indent="0">
               <a:buNone/>
-              <a:defRPr sz="958"/>
+              <a:defRPr sz="1000"/>
             </a:lvl5pPr>
-            <a:lvl6pPr marL="2190674" indent="0">
+            <a:lvl6pPr marL="2286000" indent="0">
               <a:buNone/>
-              <a:defRPr sz="958"/>
+              <a:defRPr sz="1000"/>
             </a:lvl6pPr>
-            <a:lvl7pPr marL="2628809" indent="0">
+            <a:lvl7pPr marL="2743200" indent="0">
               <a:buNone/>
-              <a:defRPr sz="958"/>
+              <a:defRPr sz="1000"/>
             </a:lvl7pPr>
-            <a:lvl8pPr marL="3066943" indent="0">
+            <a:lvl8pPr marL="3200400" indent="0">
               <a:buNone/>
-              <a:defRPr sz="958"/>
+              <a:defRPr sz="1000"/>
             </a:lvl8pPr>
-            <a:lvl9pPr marL="3505078" indent="0">
+            <a:lvl9pPr marL="3657600" indent="0">
               <a:buNone/>
-              <a:defRPr sz="958"/>
+              <a:defRPr sz="1000"/>
             </a:lvl9pPr>
           </a:lstStyle>
           <a:p>
@@ -2801,7 +2812,7 @@
           <p:cNvPr id="5" name="日期占位符 4">
             <a:extLst>
               <a:ext uri="{FF2B5EF4-FFF2-40B4-BE49-F238E27FC236}">
-                <a16:creationId xmlns:a16="http://schemas.microsoft.com/office/drawing/2014/main" id="{1E208FAE-5137-C714-F04D-F8DBFFEC5705}"/>
+                <a16:creationId xmlns:a16="http://schemas.microsoft.com/office/drawing/2014/main" id="{BDDC9A03-7ACF-AFF5-DD3E-75CD6F25F81D}"/>
               </a:ext>
             </a:extLst>
           </p:cNvPr>
@@ -2817,9 +2828,9 @@
           <a:bodyPr/>
           <a:lstStyle/>
           <a:p>
-            <a:fld id="{3BFD762F-A6DF-4976-BAF9-7ED4F9CC0F9F}" type="datetimeFigureOut">
+            <a:fld id="{1C947BBF-35D0-4785-BB1A-24495BBE301F}" type="datetimeFigureOut">
               <a:rPr lang="zh-CN" altLang="en-US" smtClean="0"/>
-              <a:t>2026/10/6</a:t>
+              <a:t>2026/10/9</a:t>
             </a:fld>
             <a:endParaRPr lang="zh-CN" altLang="en-US"/>
           </a:p>
@@ -2830,7 +2841,7 @@
           <p:cNvPr id="6" name="页脚占位符 5">
             <a:extLst>
               <a:ext uri="{FF2B5EF4-FFF2-40B4-BE49-F238E27FC236}">
-                <a16:creationId xmlns:a16="http://schemas.microsoft.com/office/drawing/2014/main" id="{4D17BFE9-1FCC-DFE2-6E0B-BE3B91DF674B}"/>
+                <a16:creationId xmlns:a16="http://schemas.microsoft.com/office/drawing/2014/main" id="{746E0695-8859-632F-1BE5-ECE1E695D94C}"/>
               </a:ext>
             </a:extLst>
           </p:cNvPr>
@@ -2855,7 +2866,7 @@
           <p:cNvPr id="7" name="灯片编号占位符 6">
             <a:extLst>
               <a:ext uri="{FF2B5EF4-FFF2-40B4-BE49-F238E27FC236}">
-                <a16:creationId xmlns:a16="http://schemas.microsoft.com/office/drawing/2014/main" id="{715757BF-BC9B-E663-F07C-7CAF91C88A8B}"/>
+                <a16:creationId xmlns:a16="http://schemas.microsoft.com/office/drawing/2014/main" id="{480C2BDE-865D-EAEC-54D5-A682314829C8}"/>
               </a:ext>
             </a:extLst>
           </p:cNvPr>
@@ -2871,7 +2882,7 @@
           <a:bodyPr/>
           <a:lstStyle/>
           <a:p>
-            <a:fld id="{6D9F8A20-A1EF-442E-94A9-FA0659D951CB}" type="slidenum">
+            <a:fld id="{A35C3B88-3BED-4C5A-A8AB-C7491EE0F2B5}" type="slidenum">
               <a:rPr lang="zh-CN" altLang="en-US" smtClean="0"/>
               <a:t>‹#›</a:t>
             </a:fld>
@@ -2882,7 +2893,7 @@
     </p:spTree>
     <p:extLst>
       <p:ext uri="{BB962C8B-B14F-4D97-AF65-F5344CB8AC3E}">
-        <p14:creationId xmlns:p14="http://schemas.microsoft.com/office/powerpoint/2010/main" val="1332909891"/>
+        <p14:creationId xmlns:p14="http://schemas.microsoft.com/office/powerpoint/2010/main" val="2620424583"/>
       </p:ext>
     </p:extLst>
   </p:cSld>
@@ -2914,7 +2925,7 @@
           <p:cNvPr id="2" name="标题 1">
             <a:extLst>
               <a:ext uri="{FF2B5EF4-FFF2-40B4-BE49-F238E27FC236}">
-                <a16:creationId xmlns:a16="http://schemas.microsoft.com/office/drawing/2014/main" id="{EE13C864-28CB-437C-1D83-F2F06BB06EBB}"/>
+                <a16:creationId xmlns:a16="http://schemas.microsoft.com/office/drawing/2014/main" id="{649086A3-E957-E146-32D0-FA19A7F59859}"/>
               </a:ext>
             </a:extLst>
           </p:cNvPr>
@@ -2927,15 +2938,15 @@
         </p:nvSpPr>
         <p:spPr>
           <a:xfrm>
-            <a:off x="804797" y="638387"/>
-            <a:ext cx="3768394" cy="2234353"/>
+            <a:off x="1207197" y="550333"/>
+            <a:ext cx="5652591" cy="1926167"/>
           </a:xfrm>
         </p:spPr>
         <p:txBody>
           <a:bodyPr anchor="b"/>
           <a:lstStyle>
             <a:lvl1pPr>
-              <a:defRPr sz="3067"/>
+              <a:defRPr sz="3200"/>
             </a:lvl1pPr>
           </a:lstStyle>
           <a:p>
@@ -2951,7 +2962,7 @@
           <p:cNvPr id="3" name="图片占位符 2">
             <a:extLst>
               <a:ext uri="{FF2B5EF4-FFF2-40B4-BE49-F238E27FC236}">
-                <a16:creationId xmlns:a16="http://schemas.microsoft.com/office/drawing/2014/main" id="{FDD94252-A13F-7645-7046-D415AE75D2CC}"/>
+                <a16:creationId xmlns:a16="http://schemas.microsoft.com/office/drawing/2014/main" id="{BED336D3-DBDF-5A92-C33D-5A06221CA2E0}"/>
               </a:ext>
             </a:extLst>
           </p:cNvPr>
@@ -2964,8 +2975,8 @@
         </p:nvSpPr>
         <p:spPr>
           <a:xfrm>
-            <a:off x="4967223" y="1378740"/>
-            <a:ext cx="5915025" cy="6805025"/>
+            <a:off x="7450832" y="1188569"/>
+            <a:ext cx="8872538" cy="5866400"/>
           </a:xfrm>
         </p:spPr>
         <p:txBody>
@@ -2973,39 +2984,39 @@
           <a:lstStyle>
             <a:lvl1pPr marL="0" indent="0">
               <a:buNone/>
-              <a:defRPr sz="3067"/>
+              <a:defRPr sz="3200"/>
             </a:lvl1pPr>
-            <a:lvl2pPr marL="438135" indent="0">
+            <a:lvl2pPr marL="457200" indent="0">
               <a:buNone/>
-              <a:defRPr sz="2683"/>
+              <a:defRPr sz="2800"/>
             </a:lvl2pPr>
-            <a:lvl3pPr marL="876270" indent="0">
+            <a:lvl3pPr marL="914400" indent="0">
               <a:buNone/>
-              <a:defRPr sz="2300"/>
+              <a:defRPr sz="2400"/>
             </a:lvl3pPr>
-            <a:lvl4pPr marL="1314404" indent="0">
+            <a:lvl4pPr marL="1371600" indent="0">
               <a:buNone/>
-              <a:defRPr sz="1917"/>
+              <a:defRPr sz="2000"/>
             </a:lvl4pPr>
-            <a:lvl5pPr marL="1752539" indent="0">
+            <a:lvl5pPr marL="1828800" indent="0">
               <a:buNone/>
-              <a:defRPr sz="1917"/>
+              <a:defRPr sz="2000"/>
             </a:lvl5pPr>
-            <a:lvl6pPr marL="2190674" indent="0">
+            <a:lvl6pPr marL="2286000" indent="0">
               <a:buNone/>
-              <a:defRPr sz="1917"/>
+              <a:defRPr sz="2000"/>
             </a:lvl6pPr>
-            <a:lvl7pPr marL="2628809" indent="0">
+            <a:lvl7pPr marL="2743200" indent="0">
               <a:buNone/>
-              <a:defRPr sz="1917"/>
+              <a:defRPr sz="2000"/>
             </a:lvl7pPr>
-            <a:lvl8pPr marL="3066943" indent="0">
+            <a:lvl8pPr marL="3200400" indent="0">
               <a:buNone/>
-              <a:defRPr sz="1917"/>
+              <a:defRPr sz="2000"/>
             </a:lvl8pPr>
-            <a:lvl9pPr marL="3505078" indent="0">
+            <a:lvl9pPr marL="3657600" indent="0">
               <a:buNone/>
-              <a:defRPr sz="1917"/>
+              <a:defRPr sz="2000"/>
             </a:lvl9pPr>
           </a:lstStyle>
           <a:p>
@@ -3018,7 +3029,7 @@
           <p:cNvPr id="4" name="文本占位符 3">
             <a:extLst>
               <a:ext uri="{FF2B5EF4-FFF2-40B4-BE49-F238E27FC236}">
-                <a16:creationId xmlns:a16="http://schemas.microsoft.com/office/drawing/2014/main" id="{6A33EF9A-E4C8-E206-E4F7-DFE85E584BD9}"/>
+                <a16:creationId xmlns:a16="http://schemas.microsoft.com/office/drawing/2014/main" id="{7EE3D000-ADB2-C9FA-BE9A-DD29E623FC60}"/>
               </a:ext>
             </a:extLst>
           </p:cNvPr>
@@ -3031,8 +3042,8 @@
         </p:nvSpPr>
         <p:spPr>
           <a:xfrm>
-            <a:off x="804797" y="2872740"/>
-            <a:ext cx="3768394" cy="5322106"/>
+            <a:off x="1207197" y="2476500"/>
+            <a:ext cx="5652591" cy="4588023"/>
           </a:xfrm>
         </p:spPr>
         <p:txBody>
@@ -3040,39 +3051,39 @@
           <a:lstStyle>
             <a:lvl1pPr marL="0" indent="0">
               <a:buNone/>
-              <a:defRPr sz="1533"/>
+              <a:defRPr sz="1600"/>
             </a:lvl1pPr>
-            <a:lvl2pPr marL="438135" indent="0">
+            <a:lvl2pPr marL="457200" indent="0">
               <a:buNone/>
-              <a:defRPr sz="1342"/>
+              <a:defRPr sz="1400"/>
             </a:lvl2pPr>
-            <a:lvl3pPr marL="876270" indent="0">
+            <a:lvl3pPr marL="914400" indent="0">
               <a:buNone/>
-              <a:defRPr sz="1150"/>
+              <a:defRPr sz="1200"/>
             </a:lvl3pPr>
-            <a:lvl4pPr marL="1314404" indent="0">
+            <a:lvl4pPr marL="1371600" indent="0">
               <a:buNone/>
-              <a:defRPr sz="958"/>
+              <a:defRPr sz="1000"/>
             </a:lvl4pPr>
-            <a:lvl5pPr marL="1752539" indent="0">
+            <a:lvl5pPr marL="1828800" indent="0">
               <a:buNone/>
-              <a:defRPr sz="958"/>
+              <a:defRPr sz="1000"/>
             </a:lvl5pPr>
-            <a:lvl6pPr marL="2190674" indent="0">
+            <a:lvl6pPr marL="2286000" indent="0">
               <a:buNone/>
-              <a:defRPr sz="958"/>
+              <a:defRPr sz="1000"/>
             </a:lvl6pPr>
-            <a:lvl7pPr marL="2628809" indent="0">
+            <a:lvl7pPr marL="2743200" indent="0">
               <a:buNone/>
-              <a:defRPr sz="958"/>
+              <a:defRPr sz="1000"/>
             </a:lvl7pPr>
-            <a:lvl8pPr marL="3066943" indent="0">
+            <a:lvl8pPr marL="3200400" indent="0">
               <a:buNone/>
-              <a:defRPr sz="958"/>
+              <a:defRPr sz="1000"/>
             </a:lvl8pPr>
-            <a:lvl9pPr marL="3505078" indent="0">
+            <a:lvl9pPr marL="3657600" indent="0">
               <a:buNone/>
-              <a:defRPr sz="958"/>
+              <a:defRPr sz="1000"/>
             </a:lvl9pPr>
           </a:lstStyle>
           <a:p>
@@ -3089,7 +3100,7 @@
           <p:cNvPr id="5" name="日期占位符 4">
             <a:extLst>
               <a:ext uri="{FF2B5EF4-FFF2-40B4-BE49-F238E27FC236}">
-                <a16:creationId xmlns:a16="http://schemas.microsoft.com/office/drawing/2014/main" id="{FB2ECB69-FB5A-DB10-F562-DC02B5E7C8A9}"/>
+                <a16:creationId xmlns:a16="http://schemas.microsoft.com/office/drawing/2014/main" id="{3612F061-4B58-6BDB-E91D-68982ABDB9F5}"/>
               </a:ext>
             </a:extLst>
           </p:cNvPr>
@@ -3105,9 +3116,9 @@
           <a:bodyPr/>
           <a:lstStyle/>
           <a:p>
-            <a:fld id="{3BFD762F-A6DF-4976-BAF9-7ED4F9CC0F9F}" type="datetimeFigureOut">
+            <a:fld id="{1C947BBF-35D0-4785-BB1A-24495BBE301F}" type="datetimeFigureOut">
               <a:rPr lang="zh-CN" altLang="en-US" smtClean="0"/>
-              <a:t>2026/10/6</a:t>
+              <a:t>2026/10/9</a:t>
             </a:fld>
             <a:endParaRPr lang="zh-CN" altLang="en-US"/>
           </a:p>
@@ -3118,7 +3129,7 @@
           <p:cNvPr id="6" name="页脚占位符 5">
             <a:extLst>
               <a:ext uri="{FF2B5EF4-FFF2-40B4-BE49-F238E27FC236}">
-                <a16:creationId xmlns:a16="http://schemas.microsoft.com/office/drawing/2014/main" id="{94B18F74-FAC3-2C8E-9B9B-6C4898ECA65E}"/>
+                <a16:creationId xmlns:a16="http://schemas.microsoft.com/office/drawing/2014/main" id="{3CC566DA-1247-E436-4E0F-6F98B1A3276C}"/>
               </a:ext>
             </a:extLst>
           </p:cNvPr>
@@ -3143,7 +3154,7 @@
           <p:cNvPr id="7" name="灯片编号占位符 6">
             <a:extLst>
               <a:ext uri="{FF2B5EF4-FFF2-40B4-BE49-F238E27FC236}">
-                <a16:creationId xmlns:a16="http://schemas.microsoft.com/office/drawing/2014/main" id="{882F3092-3D0D-459A-44BB-2199EFEED59B}"/>
+                <a16:creationId xmlns:a16="http://schemas.microsoft.com/office/drawing/2014/main" id="{10F63F5A-FE0B-BDAF-C11A-85BB7E570CE5}"/>
               </a:ext>
             </a:extLst>
           </p:cNvPr>
@@ -3159,7 +3170,7 @@
           <a:bodyPr/>
           <a:lstStyle/>
           <a:p>
-            <a:fld id="{6D9F8A20-A1EF-442E-94A9-FA0659D951CB}" type="slidenum">
+            <a:fld id="{A35C3B88-3BED-4C5A-A8AB-C7491EE0F2B5}" type="slidenum">
               <a:rPr lang="zh-CN" altLang="en-US" smtClean="0"/>
               <a:t>‹#›</a:t>
             </a:fld>
@@ -3170,7 +3181,7 @@
     </p:spTree>
     <p:extLst>
       <p:ext uri="{BB962C8B-B14F-4D97-AF65-F5344CB8AC3E}">
-        <p14:creationId xmlns:p14="http://schemas.microsoft.com/office/powerpoint/2010/main" val="101856206"/>
+        <p14:creationId xmlns:p14="http://schemas.microsoft.com/office/powerpoint/2010/main" val="2532471339"/>
       </p:ext>
     </p:extLst>
   </p:cSld>
@@ -3207,7 +3218,7 @@
           <p:cNvPr id="2" name="标题占位符 1">
             <a:extLst>
               <a:ext uri="{FF2B5EF4-FFF2-40B4-BE49-F238E27FC236}">
-                <a16:creationId xmlns:a16="http://schemas.microsoft.com/office/drawing/2014/main" id="{B028719B-24D9-9573-527C-F1448AF0253A}"/>
+                <a16:creationId xmlns:a16="http://schemas.microsoft.com/office/drawing/2014/main" id="{E02C90F6-BC5E-2BE1-CE1D-633A2C8313D9}"/>
               </a:ext>
             </a:extLst>
           </p:cNvPr>
@@ -3220,8 +3231,8 @@
         </p:nvSpPr>
         <p:spPr>
           <a:xfrm>
-            <a:off x="803275" y="509825"/>
-            <a:ext cx="10077450" cy="1850879"/>
+            <a:off x="1204914" y="439504"/>
+            <a:ext cx="15116175" cy="1595585"/>
           </a:xfrm>
           <a:prstGeom prst="rect">
             <a:avLst/>
@@ -3245,7 +3256,7 @@
           <p:cNvPr id="3" name="文本占位符 2">
             <a:extLst>
               <a:ext uri="{FF2B5EF4-FFF2-40B4-BE49-F238E27FC236}">
-                <a16:creationId xmlns:a16="http://schemas.microsoft.com/office/drawing/2014/main" id="{F41D0213-6453-EBB3-D538-7A0F21506367}"/>
+                <a16:creationId xmlns:a16="http://schemas.microsoft.com/office/drawing/2014/main" id="{4370E067-0BD5-0C0D-7684-6E2FB6F2C299}"/>
               </a:ext>
             </a:extLst>
           </p:cNvPr>
@@ -3258,8 +3269,8 @@
         </p:nvSpPr>
         <p:spPr>
           <a:xfrm>
-            <a:off x="803275" y="2549113"/>
-            <a:ext cx="10077450" cy="6075757"/>
+            <a:off x="1204914" y="2197511"/>
+            <a:ext cx="15116175" cy="5237722"/>
           </a:xfrm>
           <a:prstGeom prst="rect">
             <a:avLst/>
@@ -3312,7 +3323,7 @@
           <p:cNvPr id="4" name="日期占位符 3">
             <a:extLst>
               <a:ext uri="{FF2B5EF4-FFF2-40B4-BE49-F238E27FC236}">
-                <a16:creationId xmlns:a16="http://schemas.microsoft.com/office/drawing/2014/main" id="{C66C72BE-856E-08AE-D7E1-73185D944C81}"/>
+                <a16:creationId xmlns:a16="http://schemas.microsoft.com/office/drawing/2014/main" id="{9E3EC889-B462-7C05-DFEF-224BFCED5F1C}"/>
               </a:ext>
             </a:extLst>
           </p:cNvPr>
@@ -3325,8 +3336,8 @@
         </p:nvSpPr>
         <p:spPr>
           <a:xfrm>
-            <a:off x="803275" y="8875350"/>
-            <a:ext cx="2628900" cy="509823"/>
+            <a:off x="1204913" y="7651164"/>
+            <a:ext cx="3943350" cy="439502"/>
           </a:xfrm>
           <a:prstGeom prst="rect">
             <a:avLst/>
@@ -3336,7 +3347,7 @@
           <a:bodyPr vert="horz" lIns="91440" tIns="45720" rIns="91440" bIns="45720" rtlCol="0" anchor="ctr"/>
           <a:lstStyle>
             <a:lvl1pPr algn="l">
-              <a:defRPr sz="1150">
+              <a:defRPr sz="1200">
                 <a:solidFill>
                   <a:schemeClr val="tx1">
                     <a:tint val="82000"/>
@@ -3346,9 +3357,9 @@
             </a:lvl1pPr>
           </a:lstStyle>
           <a:p>
-            <a:fld id="{3BFD762F-A6DF-4976-BAF9-7ED4F9CC0F9F}" type="datetimeFigureOut">
+            <a:fld id="{1C947BBF-35D0-4785-BB1A-24495BBE301F}" type="datetimeFigureOut">
               <a:rPr lang="zh-CN" altLang="en-US" smtClean="0"/>
-              <a:t>2026/10/6</a:t>
+              <a:t>2026/10/9</a:t>
             </a:fld>
             <a:endParaRPr lang="zh-CN" altLang="en-US"/>
           </a:p>
@@ -3359,7 +3370,7 @@
           <p:cNvPr id="5" name="页脚占位符 4">
             <a:extLst>
               <a:ext uri="{FF2B5EF4-FFF2-40B4-BE49-F238E27FC236}">
-                <a16:creationId xmlns:a16="http://schemas.microsoft.com/office/drawing/2014/main" id="{C2B79980-8F1B-CF07-79F5-3097E0E14441}"/>
+                <a16:creationId xmlns:a16="http://schemas.microsoft.com/office/drawing/2014/main" id="{A0E81FA1-7CFA-DB5B-07DD-5B3987C1577C}"/>
               </a:ext>
             </a:extLst>
           </p:cNvPr>
@@ -3372,8 +3383,8 @@
         </p:nvSpPr>
         <p:spPr>
           <a:xfrm>
-            <a:off x="3870325" y="8875350"/>
-            <a:ext cx="3943350" cy="509823"/>
+            <a:off x="5805489" y="7651164"/>
+            <a:ext cx="5915025" cy="439502"/>
           </a:xfrm>
           <a:prstGeom prst="rect">
             <a:avLst/>
@@ -3383,7 +3394,7 @@
           <a:bodyPr vert="horz" lIns="91440" tIns="45720" rIns="91440" bIns="45720" rtlCol="0" anchor="ctr"/>
           <a:lstStyle>
             <a:lvl1pPr algn="ctr">
-              <a:defRPr sz="1150">
+              <a:defRPr sz="1200">
                 <a:solidFill>
                   <a:schemeClr val="tx1">
                     <a:tint val="82000"/>
@@ -3402,7 +3413,7 @@
           <p:cNvPr id="6" name="灯片编号占位符 5">
             <a:extLst>
               <a:ext uri="{FF2B5EF4-FFF2-40B4-BE49-F238E27FC236}">
-                <a16:creationId xmlns:a16="http://schemas.microsoft.com/office/drawing/2014/main" id="{05538924-59D4-8D38-279A-46B89B1A3939}"/>
+                <a16:creationId xmlns:a16="http://schemas.microsoft.com/office/drawing/2014/main" id="{2BBDF811-4A59-1DD4-5DF8-2FB57F2A86E0}"/>
               </a:ext>
             </a:extLst>
           </p:cNvPr>
@@ -3415,8 +3426,8 @@
         </p:nvSpPr>
         <p:spPr>
           <a:xfrm>
-            <a:off x="8251825" y="8875350"/>
-            <a:ext cx="2628900" cy="509823"/>
+            <a:off x="12377738" y="7651164"/>
+            <a:ext cx="3943350" cy="439502"/>
           </a:xfrm>
           <a:prstGeom prst="rect">
             <a:avLst/>
@@ -3426,7 +3437,7 @@
           <a:bodyPr vert="horz" lIns="91440" tIns="45720" rIns="91440" bIns="45720" rtlCol="0" anchor="ctr"/>
           <a:lstStyle>
             <a:lvl1pPr algn="r">
-              <a:defRPr sz="1150">
+              <a:defRPr sz="1200">
                 <a:solidFill>
                   <a:schemeClr val="tx1">
                     <a:tint val="82000"/>
@@ -3436,7 +3447,7 @@
             </a:lvl1pPr>
           </a:lstStyle>
           <a:p>
-            <a:fld id="{6D9F8A20-A1EF-442E-94A9-FA0659D951CB}" type="slidenum">
+            <a:fld id="{A35C3B88-3BED-4C5A-A8AB-C7491EE0F2B5}" type="slidenum">
               <a:rPr lang="zh-CN" altLang="en-US" smtClean="0"/>
               <a:t>‹#›</a:t>
             </a:fld>
@@ -3447,7 +3458,7 @@
     </p:spTree>
     <p:extLst>
       <p:ext uri="{BB962C8B-B14F-4D97-AF65-F5344CB8AC3E}">
-        <p14:creationId xmlns:p14="http://schemas.microsoft.com/office/powerpoint/2010/main" val="320528271"/>
+        <p14:creationId xmlns:p14="http://schemas.microsoft.com/office/powerpoint/2010/main" val="2117098124"/>
       </p:ext>
     </p:extLst>
   </p:cSld>
@@ -3467,7 +3478,7 @@
   </p:sldLayoutIdLst>
   <p:txStyles>
     <p:titleStyle>
-      <a:lvl1pPr algn="l" defTabSz="876270" rtl="0" eaLnBrk="1" latinLnBrk="0" hangingPunct="1">
+      <a:lvl1pPr algn="l" defTabSz="914400" rtl="0" eaLnBrk="1" latinLnBrk="0" hangingPunct="1">
         <a:lnSpc>
           <a:spcPct val="90000"/>
         </a:lnSpc>
@@ -3475,7 +3486,7 @@
           <a:spcPct val="0"/>
         </a:spcBef>
         <a:buNone/>
-        <a:defRPr sz="4217" kern="1200">
+        <a:defRPr sz="4400" kern="1200">
           <a:solidFill>
             <a:schemeClr val="tx1"/>
           </a:solidFill>
@@ -3486,16 +3497,16 @@
       </a:lvl1pPr>
     </p:titleStyle>
     <p:bodyStyle>
-      <a:lvl1pPr marL="219067" indent="-219067" algn="l" defTabSz="876270" rtl="0" eaLnBrk="1" latinLnBrk="0" hangingPunct="1">
+      <a:lvl1pPr marL="228600" indent="-228600" algn="l" defTabSz="914400" rtl="0" eaLnBrk="1" latinLnBrk="0" hangingPunct="1">
         <a:lnSpc>
           <a:spcPct val="90000"/>
         </a:lnSpc>
         <a:spcBef>
-          <a:spcPts val="958"/>
+          <a:spcPts val="1000"/>
         </a:spcBef>
         <a:buFont typeface="Arial" panose="020B0604020202020204" pitchFamily="34" charset="0"/>
         <a:buChar char="•"/>
-        <a:defRPr sz="2683" kern="1200">
+        <a:defRPr sz="2800" kern="1200">
           <a:solidFill>
             <a:schemeClr val="tx1"/>
           </a:solidFill>
@@ -3504,16 +3515,16 @@
           <a:cs typeface="+mn-cs"/>
         </a:defRPr>
       </a:lvl1pPr>
-      <a:lvl2pPr marL="657202" indent="-219067" algn="l" defTabSz="876270" rtl="0" eaLnBrk="1" latinLnBrk="0" hangingPunct="1">
+      <a:lvl2pPr marL="685800" indent="-228600" algn="l" defTabSz="914400" rtl="0" eaLnBrk="1" latinLnBrk="0" hangingPunct="1">
         <a:lnSpc>
           <a:spcPct val="90000"/>
         </a:lnSpc>
         <a:spcBef>
-          <a:spcPts val="479"/>
+          <a:spcPts val="500"/>
         </a:spcBef>
         <a:buFont typeface="Arial" panose="020B0604020202020204" pitchFamily="34" charset="0"/>
         <a:buChar char="•"/>
-        <a:defRPr sz="2300" kern="1200">
+        <a:defRPr sz="2400" kern="1200">
           <a:solidFill>
             <a:schemeClr val="tx1"/>
           </a:solidFill>
@@ -3522,16 +3533,16 @@
           <a:cs typeface="+mn-cs"/>
         </a:defRPr>
       </a:lvl2pPr>
-      <a:lvl3pPr marL="1095337" indent="-219067" algn="l" defTabSz="876270" rtl="0" eaLnBrk="1" latinLnBrk="0" hangingPunct="1">
+      <a:lvl3pPr marL="1143000" indent="-228600" algn="l" defTabSz="914400" rtl="0" eaLnBrk="1" latinLnBrk="0" hangingPunct="1">
         <a:lnSpc>
           <a:spcPct val="90000"/>
         </a:lnSpc>
         <a:spcBef>
-          <a:spcPts val="479"/>
+          <a:spcPts val="500"/>
         </a:spcBef>
         <a:buFont typeface="Arial" panose="020B0604020202020204" pitchFamily="34" charset="0"/>
         <a:buChar char="•"/>
-        <a:defRPr sz="1917" kern="1200">
+        <a:defRPr sz="2000" kern="1200">
           <a:solidFill>
             <a:schemeClr val="tx1"/>
           </a:solidFill>
@@ -3540,16 +3551,16 @@
           <a:cs typeface="+mn-cs"/>
         </a:defRPr>
       </a:lvl3pPr>
-      <a:lvl4pPr marL="1533472" indent="-219067" algn="l" defTabSz="876270" rtl="0" eaLnBrk="1" latinLnBrk="0" hangingPunct="1">
+      <a:lvl4pPr marL="1600200" indent="-228600" algn="l" defTabSz="914400" rtl="0" eaLnBrk="1" latinLnBrk="0" hangingPunct="1">
         <a:lnSpc>
           <a:spcPct val="90000"/>
         </a:lnSpc>
         <a:spcBef>
-          <a:spcPts val="479"/>
+          <a:spcPts val="500"/>
         </a:spcBef>
         <a:buFont typeface="Arial" panose="020B0604020202020204" pitchFamily="34" charset="0"/>
         <a:buChar char="•"/>
-        <a:defRPr sz="1725" kern="1200">
+        <a:defRPr sz="1800" kern="1200">
           <a:solidFill>
             <a:schemeClr val="tx1"/>
           </a:solidFill>
@@ -3558,16 +3569,16 @@
           <a:cs typeface="+mn-cs"/>
         </a:defRPr>
       </a:lvl4pPr>
-      <a:lvl5pPr marL="1971606" indent="-219067" algn="l" defTabSz="876270" rtl="0" eaLnBrk="1" latinLnBrk="0" hangingPunct="1">
+      <a:lvl5pPr marL="2057400" indent="-228600" algn="l" defTabSz="914400" rtl="0" eaLnBrk="1" latinLnBrk="0" hangingPunct="1">
         <a:lnSpc>
           <a:spcPct val="90000"/>
         </a:lnSpc>
         <a:spcBef>
-          <a:spcPts val="479"/>
+          <a:spcPts val="500"/>
         </a:spcBef>
         <a:buFont typeface="Arial" panose="020B0604020202020204" pitchFamily="34" charset="0"/>
         <a:buChar char="•"/>
-        <a:defRPr sz="1725" kern="1200">
+        <a:defRPr sz="1800" kern="1200">
           <a:solidFill>
             <a:schemeClr val="tx1"/>
           </a:solidFill>
@@ -3576,16 +3587,16 @@
           <a:cs typeface="+mn-cs"/>
         </a:defRPr>
       </a:lvl5pPr>
-      <a:lvl6pPr marL="2409741" indent="-219067" algn="l" defTabSz="876270" rtl="0" eaLnBrk="1" latinLnBrk="0" hangingPunct="1">
+      <a:lvl6pPr marL="2514600" indent="-228600" algn="l" defTabSz="914400" rtl="0" eaLnBrk="1" latinLnBrk="0" hangingPunct="1">
         <a:lnSpc>
           <a:spcPct val="90000"/>
         </a:lnSpc>
         <a:spcBef>
-          <a:spcPts val="479"/>
+          <a:spcPts val="500"/>
         </a:spcBef>
         <a:buFont typeface="Arial" panose="020B0604020202020204" pitchFamily="34" charset="0"/>
         <a:buChar char="•"/>
-        <a:defRPr sz="1725" kern="1200">
+        <a:defRPr sz="1800" kern="1200">
           <a:solidFill>
             <a:schemeClr val="tx1"/>
           </a:solidFill>
@@ -3594,16 +3605,16 @@
           <a:cs typeface="+mn-cs"/>
         </a:defRPr>
       </a:lvl6pPr>
-      <a:lvl7pPr marL="2847876" indent="-219067" algn="l" defTabSz="876270" rtl="0" eaLnBrk="1" latinLnBrk="0" hangingPunct="1">
+      <a:lvl7pPr marL="2971800" indent="-228600" algn="l" defTabSz="914400" rtl="0" eaLnBrk="1" latinLnBrk="0" hangingPunct="1">
         <a:lnSpc>
           <a:spcPct val="90000"/>
         </a:lnSpc>
         <a:spcBef>
-          <a:spcPts val="479"/>
+          <a:spcPts val="500"/>
         </a:spcBef>
         <a:buFont typeface="Arial" panose="020B0604020202020204" pitchFamily="34" charset="0"/>
         <a:buChar char="•"/>
-        <a:defRPr sz="1725" kern="1200">
+        <a:defRPr sz="1800" kern="1200">
           <a:solidFill>
             <a:schemeClr val="tx1"/>
           </a:solidFill>
@@ -3612,16 +3623,16 @@
           <a:cs typeface="+mn-cs"/>
         </a:defRPr>
       </a:lvl7pPr>
-      <a:lvl8pPr marL="3286011" indent="-219067" algn="l" defTabSz="876270" rtl="0" eaLnBrk="1" latinLnBrk="0" hangingPunct="1">
+      <a:lvl8pPr marL="3429000" indent="-228600" algn="l" defTabSz="914400" rtl="0" eaLnBrk="1" latinLnBrk="0" hangingPunct="1">
         <a:lnSpc>
           <a:spcPct val="90000"/>
         </a:lnSpc>
         <a:spcBef>
-          <a:spcPts val="479"/>
+          <a:spcPts val="500"/>
         </a:spcBef>
         <a:buFont typeface="Arial" panose="020B0604020202020204" pitchFamily="34" charset="0"/>
         <a:buChar char="•"/>
-        <a:defRPr sz="1725" kern="1200">
+        <a:defRPr sz="1800" kern="1200">
           <a:solidFill>
             <a:schemeClr val="tx1"/>
           </a:solidFill>
@@ -3630,16 +3641,16 @@
           <a:cs typeface="+mn-cs"/>
         </a:defRPr>
       </a:lvl8pPr>
-      <a:lvl9pPr marL="3724145" indent="-219067" algn="l" defTabSz="876270" rtl="0" eaLnBrk="1" latinLnBrk="0" hangingPunct="1">
+      <a:lvl9pPr marL="3886200" indent="-228600" algn="l" defTabSz="914400" rtl="0" eaLnBrk="1" latinLnBrk="0" hangingPunct="1">
         <a:lnSpc>
           <a:spcPct val="90000"/>
         </a:lnSpc>
         <a:spcBef>
-          <a:spcPts val="479"/>
+          <a:spcPts val="500"/>
         </a:spcBef>
         <a:buFont typeface="Arial" panose="020B0604020202020204" pitchFamily="34" charset="0"/>
         <a:buChar char="•"/>
-        <a:defRPr sz="1725" kern="1200">
+        <a:defRPr sz="1800" kern="1200">
           <a:solidFill>
             <a:schemeClr val="tx1"/>
           </a:solidFill>
@@ -3653,8 +3664,8 @@
       <a:defPPr>
         <a:defRPr lang="zh-CN"/>
       </a:defPPr>
-      <a:lvl1pPr marL="0" algn="l" defTabSz="876270" rtl="0" eaLnBrk="1" latinLnBrk="0" hangingPunct="1">
-        <a:defRPr sz="1725" kern="1200">
+      <a:lvl1pPr marL="0" algn="l" defTabSz="914400" rtl="0" eaLnBrk="1" latinLnBrk="0" hangingPunct="1">
+        <a:defRPr sz="1800" kern="1200">
           <a:solidFill>
             <a:schemeClr val="tx1"/>
           </a:solidFill>
@@ -3663,8 +3674,8 @@
           <a:cs typeface="+mn-cs"/>
         </a:defRPr>
       </a:lvl1pPr>
-      <a:lvl2pPr marL="438135" algn="l" defTabSz="876270" rtl="0" eaLnBrk="1" latinLnBrk="0" hangingPunct="1">
-        <a:defRPr sz="1725" kern="1200">
+      <a:lvl2pPr marL="457200" algn="l" defTabSz="914400" rtl="0" eaLnBrk="1" latinLnBrk="0" hangingPunct="1">
+        <a:defRPr sz="1800" kern="1200">
           <a:solidFill>
             <a:schemeClr val="tx1"/>
           </a:solidFill>
@@ -3673,8 +3684,8 @@
           <a:cs typeface="+mn-cs"/>
         </a:defRPr>
       </a:lvl2pPr>
-      <a:lvl3pPr marL="876270" algn="l" defTabSz="876270" rtl="0" eaLnBrk="1" latinLnBrk="0" hangingPunct="1">
-        <a:defRPr sz="1725" kern="1200">
+      <a:lvl3pPr marL="914400" algn="l" defTabSz="914400" rtl="0" eaLnBrk="1" latinLnBrk="0" hangingPunct="1">
+        <a:defRPr sz="1800" kern="1200">
           <a:solidFill>
             <a:schemeClr val="tx1"/>
           </a:solidFill>
@@ -3683,8 +3694,8 @@
           <a:cs typeface="+mn-cs"/>
         </a:defRPr>
       </a:lvl3pPr>
-      <a:lvl4pPr marL="1314404" algn="l" defTabSz="876270" rtl="0" eaLnBrk="1" latinLnBrk="0" hangingPunct="1">
-        <a:defRPr sz="1725" kern="1200">
+      <a:lvl4pPr marL="1371600" algn="l" defTabSz="914400" rtl="0" eaLnBrk="1" latinLnBrk="0" hangingPunct="1">
+        <a:defRPr sz="1800" kern="1200">
           <a:solidFill>
             <a:schemeClr val="tx1"/>
           </a:solidFill>
@@ -3693,8 +3704,8 @@
           <a:cs typeface="+mn-cs"/>
         </a:defRPr>
       </a:lvl4pPr>
-      <a:lvl5pPr marL="1752539" algn="l" defTabSz="876270" rtl="0" eaLnBrk="1" latinLnBrk="0" hangingPunct="1">
-        <a:defRPr sz="1725" kern="1200">
+      <a:lvl5pPr marL="1828800" algn="l" defTabSz="914400" rtl="0" eaLnBrk="1" latinLnBrk="0" hangingPunct="1">
+        <a:defRPr sz="1800" kern="1200">
           <a:solidFill>
             <a:schemeClr val="tx1"/>
           </a:solidFill>
@@ -3703,8 +3714,8 @@
           <a:cs typeface="+mn-cs"/>
         </a:defRPr>
       </a:lvl5pPr>
-      <a:lvl6pPr marL="2190674" algn="l" defTabSz="876270" rtl="0" eaLnBrk="1" latinLnBrk="0" hangingPunct="1">
-        <a:defRPr sz="1725" kern="1200">
+      <a:lvl6pPr marL="2286000" algn="l" defTabSz="914400" rtl="0" eaLnBrk="1" latinLnBrk="0" hangingPunct="1">
+        <a:defRPr sz="1800" kern="1200">
           <a:solidFill>
             <a:schemeClr val="tx1"/>
           </a:solidFill>
@@ -3713,8 +3724,8 @@
           <a:cs typeface="+mn-cs"/>
         </a:defRPr>
       </a:lvl6pPr>
-      <a:lvl7pPr marL="2628809" algn="l" defTabSz="876270" rtl="0" eaLnBrk="1" latinLnBrk="0" hangingPunct="1">
-        <a:defRPr sz="1725" kern="1200">
+      <a:lvl7pPr marL="2743200" algn="l" defTabSz="914400" rtl="0" eaLnBrk="1" latinLnBrk="0" hangingPunct="1">
+        <a:defRPr sz="1800" kern="1200">
           <a:solidFill>
             <a:schemeClr val="tx1"/>
           </a:solidFill>
@@ -3723,8 +3734,8 @@
           <a:cs typeface="+mn-cs"/>
         </a:defRPr>
       </a:lvl7pPr>
-      <a:lvl8pPr marL="3066943" algn="l" defTabSz="876270" rtl="0" eaLnBrk="1" latinLnBrk="0" hangingPunct="1">
-        <a:defRPr sz="1725" kern="1200">
+      <a:lvl8pPr marL="3200400" algn="l" defTabSz="914400" rtl="0" eaLnBrk="1" latinLnBrk="0" hangingPunct="1">
+        <a:defRPr sz="1800" kern="1200">
           <a:solidFill>
             <a:schemeClr val="tx1"/>
           </a:solidFill>
@@ -3733,8 +3744,8 @@
           <a:cs typeface="+mn-cs"/>
         </a:defRPr>
       </a:lvl8pPr>
-      <a:lvl9pPr marL="3505078" algn="l" defTabSz="876270" rtl="0" eaLnBrk="1" latinLnBrk="0" hangingPunct="1">
-        <a:defRPr sz="1725" kern="1200">
+      <a:lvl9pPr marL="3657600" algn="l" defTabSz="914400" rtl="0" eaLnBrk="1" latinLnBrk="0" hangingPunct="1">
+        <a:defRPr sz="1800" kern="1200">
           <a:solidFill>
             <a:schemeClr val="tx1"/>
           </a:solidFill>
@@ -3775,220 +3786,10 @@
       </p:grpSpPr>
       <p:sp>
         <p:nvSpPr>
-          <p:cNvPr id="2" name="text_001">
-            <a:extLst>
-              <a:ext uri="{FF2B5EF4-FFF2-40B4-BE49-F238E27FC236}">
-                <a16:creationId xmlns:a16="http://schemas.microsoft.com/office/drawing/2014/main" id="{F0BD54B2-265E-DA56-E2DF-895BA04E54A6}"/>
-              </a:ext>
-            </a:extLst>
-          </p:cNvPr>
-          <p:cNvSpPr txBox="1"/>
-          <p:nvPr/>
-        </p:nvSpPr>
-        <p:spPr>
-          <a:xfrm>
-            <a:off x="304800" y="177799"/>
-            <a:ext cx="5702300" cy="381000"/>
-          </a:xfrm>
-          <a:prstGeom prst="rect">
-            <a:avLst/>
-          </a:prstGeom>
-          <a:noFill/>
-        </p:spPr>
-        <p:txBody>
-          <a:bodyPr vert="horz" wrap="square" lIns="0" tIns="0" rIns="0" bIns="0" rtlCol="0" anchor="ctr">
-            <a:noAutofit/>
-          </a:bodyPr>
-          <a:lstStyle/>
-          <a:p>
-            <a:r>
-              <a:rPr lang="en-US" altLang="zh-CN" sz="1600" b="1">
-                <a:solidFill>
-                  <a:srgbClr val="181818"/>
-                </a:solidFill>
-                <a:latin typeface="Arial" panose="020B0604020202020204" pitchFamily="34" charset="0"/>
-              </a:rPr>
-              <a:t>(a) Conditioning and model preparation</a:t>
-            </a:r>
-            <a:endParaRPr lang="zh-CN" altLang="en-US" sz="1600" b="1">
-              <a:solidFill>
-                <a:srgbClr val="181818"/>
-              </a:solidFill>
-              <a:latin typeface="Arial" panose="020B0604020202020204" pitchFamily="34" charset="0"/>
-            </a:endParaRPr>
-          </a:p>
-        </p:txBody>
-      </p:sp>
-      <p:sp>
-        <p:nvSpPr>
-          <p:cNvPr id="3" name="text_002">
-            <a:extLst>
-              <a:ext uri="{FF2B5EF4-FFF2-40B4-BE49-F238E27FC236}">
-                <a16:creationId xmlns:a16="http://schemas.microsoft.com/office/drawing/2014/main" id="{A42BE4DA-B10D-FBD0-1255-CF17DFCB02D9}"/>
-              </a:ext>
-            </a:extLst>
-          </p:cNvPr>
-          <p:cNvSpPr txBox="1"/>
-          <p:nvPr/>
-        </p:nvSpPr>
-        <p:spPr>
-          <a:xfrm>
-            <a:off x="6718300" y="177799"/>
-            <a:ext cx="4660900" cy="381000"/>
-          </a:xfrm>
-          <a:prstGeom prst="rect">
-            <a:avLst/>
-          </a:prstGeom>
-          <a:noFill/>
-        </p:spPr>
-        <p:txBody>
-          <a:bodyPr vert="horz" wrap="square" lIns="0" tIns="0" rIns="0" bIns="0" rtlCol="0" anchor="ctr">
-            <a:noAutofit/>
-          </a:bodyPr>
-          <a:lstStyle/>
-          <a:p>
-            <a:r>
-              <a:rPr lang="en-US" altLang="zh-CN" sz="1600" b="1">
-                <a:solidFill>
-                  <a:srgbClr val="181818"/>
-                </a:solidFill>
-                <a:latin typeface="Arial" panose="020B0604020202020204" pitchFamily="34" charset="0"/>
-              </a:rPr>
-              <a:t>(b) Sampling and dataset assembly</a:t>
-            </a:r>
-            <a:endParaRPr lang="zh-CN" altLang="en-US" sz="1600" b="1">
-              <a:solidFill>
-                <a:srgbClr val="181818"/>
-              </a:solidFill>
-              <a:latin typeface="Arial" panose="020B0604020202020204" pitchFamily="34" charset="0"/>
-            </a:endParaRPr>
-          </a:p>
-        </p:txBody>
-      </p:sp>
-      <p:cxnSp>
-        <p:nvCxnSpPr>
-          <p:cNvPr id="4" name="line_003">
-            <a:extLst>
-              <a:ext uri="{FF2B5EF4-FFF2-40B4-BE49-F238E27FC236}">
-                <a16:creationId xmlns:a16="http://schemas.microsoft.com/office/drawing/2014/main" id="{E1E7001A-AB1B-32EA-C26F-DCF298D97C7B}"/>
-              </a:ext>
-            </a:extLst>
-          </p:cNvPr>
-          <p:cNvCxnSpPr/>
-          <p:nvPr/>
-        </p:nvCxnSpPr>
-        <p:spPr>
-          <a:xfrm>
-            <a:off x="304800" y="673100"/>
-            <a:ext cx="5600700" cy="0"/>
-          </a:xfrm>
-          <a:prstGeom prst="line">
-            <a:avLst/>
-          </a:prstGeom>
-          <a:ln w="13970">
-            <a:solidFill>
-              <a:srgbClr val="266A71"/>
-            </a:solidFill>
-          </a:ln>
-        </p:spPr>
-        <p:style>
-          <a:lnRef idx="2">
-            <a:schemeClr val="accent1"/>
-          </a:lnRef>
-          <a:fillRef idx="0">
-            <a:schemeClr val="accent1"/>
-          </a:fillRef>
-          <a:effectRef idx="1">
-            <a:schemeClr val="accent1"/>
-          </a:effectRef>
-          <a:fontRef idx="minor">
-            <a:schemeClr val="tx1"/>
-          </a:fontRef>
-        </p:style>
-      </p:cxnSp>
-      <p:cxnSp>
-        <p:nvCxnSpPr>
-          <p:cNvPr id="5" name="line_004">
-            <a:extLst>
-              <a:ext uri="{FF2B5EF4-FFF2-40B4-BE49-F238E27FC236}">
-                <a16:creationId xmlns:a16="http://schemas.microsoft.com/office/drawing/2014/main" id="{CB2C1CF9-1369-145A-AF05-DEAF7D73429C}"/>
-              </a:ext>
-            </a:extLst>
-          </p:cNvPr>
-          <p:cNvCxnSpPr/>
-          <p:nvPr/>
-        </p:nvCxnSpPr>
-        <p:spPr>
-          <a:xfrm>
-            <a:off x="6718300" y="673100"/>
-            <a:ext cx="4660900" cy="0"/>
-          </a:xfrm>
-          <a:prstGeom prst="line">
-            <a:avLst/>
-          </a:prstGeom>
-          <a:ln w="13970">
-            <a:solidFill>
-              <a:srgbClr val="266A71"/>
-            </a:solidFill>
-          </a:ln>
-        </p:spPr>
-        <p:style>
-          <a:lnRef idx="2">
-            <a:schemeClr val="accent1"/>
-          </a:lnRef>
-          <a:fillRef idx="0">
-            <a:schemeClr val="accent1"/>
-          </a:fillRef>
-          <a:effectRef idx="1">
-            <a:schemeClr val="accent1"/>
-          </a:effectRef>
-          <a:fontRef idx="minor">
-            <a:schemeClr val="tx1"/>
-          </a:fontRef>
-        </p:style>
-      </p:cxnSp>
-      <p:pic>
-        <p:nvPicPr>
-          <p:cNvPr id="7" name="picture_005">
-            <a:extLst>
-              <a:ext uri="{FF2B5EF4-FFF2-40B4-BE49-F238E27FC236}">
-                <a16:creationId xmlns:a16="http://schemas.microsoft.com/office/drawing/2014/main" id="{D0A52BF2-DDCD-9B12-C45F-1F127709061F}"/>
-              </a:ext>
-            </a:extLst>
-          </p:cNvPr>
-          <p:cNvPicPr>
-            <a:picLocks/>
-          </p:cNvPicPr>
-          <p:nvPr/>
-        </p:nvPicPr>
-        <p:blipFill>
-          <a:blip r:embed="rId4">
-            <a:extLst>
-              <a:ext uri="{28A0092B-C50C-407E-A947-70E740481C1C}">
-                <a14:useLocalDpi xmlns:a14="http://schemas.microsoft.com/office/drawing/2010/main" val="0"/>
-              </a:ext>
-            </a:extLst>
-          </a:blip>
-          <a:stretch>
-            <a:fillRect/>
-          </a:stretch>
-        </p:blipFill>
-        <p:spPr>
-          <a:xfrm>
-            <a:off x="745067" y="977900"/>
-            <a:ext cx="1557867" cy="1168400"/>
-          </a:xfrm>
-          <a:prstGeom prst="rect">
-            <a:avLst/>
-          </a:prstGeom>
-        </p:spPr>
-      </p:pic>
-      <p:sp>
-        <p:nvSpPr>
-          <p:cNvPr id="8" name="rect_006">
-            <a:extLst>
-              <a:ext uri="{FF2B5EF4-FFF2-40B4-BE49-F238E27FC236}">
-                <a16:creationId xmlns:a16="http://schemas.microsoft.com/office/drawing/2014/main" id="{5DE1D129-1B14-DDA5-0221-DAF88D59C153}"/>
+          <p:cNvPr id="2" name="roundrect_001">
+            <a:extLst>
+              <a:ext uri="{FF2B5EF4-FFF2-40B4-BE49-F238E27FC236}">
+                <a16:creationId xmlns:a16="http://schemas.microsoft.com/office/drawing/2014/main" id="{4AE5931D-3338-F3D0-2E29-0730E0C2A65F}"/>
               </a:ext>
             </a:extLst>
           </p:cNvPr>
@@ -3997,1729 +3798,16 @@
         </p:nvSpPr>
         <p:spPr>
           <a:xfrm>
-            <a:off x="745067" y="977900"/>
-            <a:ext cx="1557866" cy="1168400"/>
-          </a:xfrm>
-          <a:prstGeom prst="rect">
-            <a:avLst/>
-          </a:prstGeom>
-          <a:noFill/>
-          <a:ln w="4445" cap="flat" cmpd="sng" algn="ctr">
-            <a:solidFill>
-              <a:srgbClr val="BDBDBD"/>
-            </a:solidFill>
-            <a:prstDash val="solid"/>
-            <a:miter lim="800000"/>
-          </a:ln>
-          <a:effectLst/>
-          <a:extLst>
-            <a:ext uri="{909E8E84-426E-40DD-AFC4-6F175D3DCCD1}">
-              <a14:hiddenFill xmlns:a14="http://schemas.microsoft.com/office/drawing/2010/main">
-                <a:solidFill>
-                  <a:schemeClr val="accent1"/>
-                </a:solidFill>
-              </a14:hiddenFill>
-            </a:ext>
-          </a:extLst>
-        </p:spPr>
-        <p:style>
-          <a:lnRef idx="2">
-            <a:schemeClr val="accent1">
-              <a:shade val="15000"/>
-            </a:schemeClr>
-          </a:lnRef>
-          <a:fillRef idx="1">
-            <a:schemeClr val="accent1"/>
-          </a:fillRef>
-          <a:effectRef idx="0">
-            <a:schemeClr val="accent1"/>
-          </a:effectRef>
-          <a:fontRef idx="minor">
-            <a:schemeClr val="lt1"/>
-          </a:fontRef>
-        </p:style>
-        <p:txBody>
-          <a:bodyPr rtlCol="0" anchor="ctr"/>
-          <a:lstStyle/>
-          <a:p>
-            <a:pPr algn="ctr"/>
-            <a:endParaRPr lang="zh-CN" altLang="en-US"/>
-          </a:p>
-        </p:txBody>
-      </p:sp>
-      <p:sp>
-        <p:nvSpPr>
-          <p:cNvPr id="9" name="text_007">
-            <a:extLst>
-              <a:ext uri="{FF2B5EF4-FFF2-40B4-BE49-F238E27FC236}">
-                <a16:creationId xmlns:a16="http://schemas.microsoft.com/office/drawing/2014/main" id="{A9B4EA20-1FEB-D25A-3655-20F7F2525977}"/>
-              </a:ext>
-            </a:extLst>
-          </p:cNvPr>
-          <p:cNvSpPr txBox="1"/>
-          <p:nvPr/>
-        </p:nvSpPr>
-        <p:spPr>
-          <a:xfrm>
-            <a:off x="558800" y="2235199"/>
-            <a:ext cx="1943100" cy="317500"/>
-          </a:xfrm>
-          <a:prstGeom prst="rect">
-            <a:avLst/>
-          </a:prstGeom>
-          <a:noFill/>
-        </p:spPr>
-        <p:txBody>
-          <a:bodyPr vert="horz" wrap="square" lIns="0" tIns="0" rIns="0" bIns="0" rtlCol="0" anchor="ctr">
-            <a:noAutofit/>
-          </a:bodyPr>
-          <a:lstStyle/>
-          <a:p>
-            <a:pPr algn="ctr"/>
-            <a:r>
-              <a:rPr lang="en-US" altLang="zh-CN" sz="1400">
-                <a:solidFill>
-                  <a:srgbClr val="181818"/>
-                </a:solidFill>
-                <a:latin typeface="Times New Roman" panose="02020603050405020304" pitchFamily="18" charset="0"/>
-              </a:rPr>
-              <a:t>Reference photograph</a:t>
-            </a:r>
-            <a:endParaRPr lang="zh-CN" altLang="en-US" sz="1400">
-              <a:solidFill>
-                <a:srgbClr val="181818"/>
-              </a:solidFill>
-              <a:latin typeface="Times New Roman" panose="02020603050405020304" pitchFamily="18" charset="0"/>
-            </a:endParaRPr>
-          </a:p>
-        </p:txBody>
-      </p:sp>
-      <p:sp>
-        <p:nvSpPr>
-          <p:cNvPr id="10" name="rect_008">
-            <a:extLst>
-              <a:ext uri="{FF2B5EF4-FFF2-40B4-BE49-F238E27FC236}">
-                <a16:creationId xmlns:a16="http://schemas.microsoft.com/office/drawing/2014/main" id="{8589F119-9332-2187-FE7C-30EBB0D24FF4}"/>
-              </a:ext>
-            </a:extLst>
-          </p:cNvPr>
-          <p:cNvSpPr/>
-          <p:nvPr/>
-        </p:nvSpPr>
-        <p:spPr>
-          <a:xfrm>
-            <a:off x="3200400" y="1028700"/>
-            <a:ext cx="2451100" cy="1193800"/>
-          </a:xfrm>
-          <a:prstGeom prst="rect">
-            <a:avLst/>
+            <a:off x="152400" y="152400"/>
+            <a:ext cx="17221200" cy="7950200"/>
+          </a:xfrm>
+          <a:prstGeom prst="roundRect">
+            <a:avLst>
+              <a:gd name="adj" fmla="val 8000"/>
+            </a:avLst>
           </a:prstGeom>
           <a:solidFill>
-            <a:srgbClr val="F6F6F3"/>
-          </a:solidFill>
-          <a:ln w="5715">
-            <a:solidFill>
-              <a:srgbClr val="B7BCC0"/>
-            </a:solidFill>
-          </a:ln>
-        </p:spPr>
-        <p:style>
-          <a:lnRef idx="2">
-            <a:schemeClr val="accent1">
-              <a:shade val="15000"/>
-            </a:schemeClr>
-          </a:lnRef>
-          <a:fillRef idx="1">
-            <a:schemeClr val="accent1"/>
-          </a:fillRef>
-          <a:effectRef idx="0">
-            <a:schemeClr val="accent1"/>
-          </a:effectRef>
-          <a:fontRef idx="minor">
-            <a:schemeClr val="lt1"/>
-          </a:fontRef>
-        </p:style>
-        <p:txBody>
-          <a:bodyPr rtlCol="0" anchor="ctr"/>
-          <a:lstStyle/>
-          <a:p>
-            <a:pPr algn="ctr"/>
-            <a:endParaRPr lang="zh-CN" altLang="en-US"/>
-          </a:p>
-        </p:txBody>
-      </p:sp>
-      <p:sp>
-        <p:nvSpPr>
-          <p:cNvPr id="11" name="text_009">
-            <a:extLst>
-              <a:ext uri="{FF2B5EF4-FFF2-40B4-BE49-F238E27FC236}">
-                <a16:creationId xmlns:a16="http://schemas.microsoft.com/office/drawing/2014/main" id="{833EAD58-75D7-2D22-30A7-09D5407B439B}"/>
-              </a:ext>
-            </a:extLst>
-          </p:cNvPr>
-          <p:cNvSpPr txBox="1"/>
-          <p:nvPr/>
-        </p:nvSpPr>
-        <p:spPr>
-          <a:xfrm>
-            <a:off x="3365500" y="1117599"/>
-            <a:ext cx="2120900" cy="292100"/>
-          </a:xfrm>
-          <a:prstGeom prst="rect">
-            <a:avLst/>
-          </a:prstGeom>
-          <a:noFill/>
-        </p:spPr>
-        <p:txBody>
-          <a:bodyPr vert="horz" wrap="square" lIns="0" tIns="0" rIns="0" bIns="0" rtlCol="0" anchor="ctr">
-            <a:noAutofit/>
-          </a:bodyPr>
-          <a:lstStyle/>
-          <a:p>
-            <a:r>
-              <a:rPr lang="en-US" altLang="zh-CN" sz="1200" b="1">
-                <a:solidFill>
-                  <a:srgbClr val="181818"/>
-                </a:solidFill>
-                <a:latin typeface="Arial" panose="020B0604020202020204" pitchFamily="34" charset="0"/>
-              </a:rPr>
-              <a:t>Edit instruction</a:t>
-            </a:r>
-            <a:endParaRPr lang="zh-CN" altLang="en-US" sz="1200" b="1">
-              <a:solidFill>
-                <a:srgbClr val="181818"/>
-              </a:solidFill>
-              <a:latin typeface="Arial" panose="020B0604020202020204" pitchFamily="34" charset="0"/>
-            </a:endParaRPr>
-          </a:p>
-        </p:txBody>
-      </p:sp>
-      <p:sp>
-        <p:nvSpPr>
-          <p:cNvPr id="12" name="text_010">
-            <a:extLst>
-              <a:ext uri="{FF2B5EF4-FFF2-40B4-BE49-F238E27FC236}">
-                <a16:creationId xmlns:a16="http://schemas.microsoft.com/office/drawing/2014/main" id="{0F561009-DD57-BE6D-2EA3-94A2FE34DDF6}"/>
-              </a:ext>
-            </a:extLst>
-          </p:cNvPr>
-          <p:cNvSpPr txBox="1"/>
-          <p:nvPr/>
-        </p:nvSpPr>
-        <p:spPr>
-          <a:xfrm>
-            <a:off x="3365500" y="1498599"/>
-            <a:ext cx="2070100" cy="584200"/>
-          </a:xfrm>
-          <a:prstGeom prst="rect">
-            <a:avLst/>
-          </a:prstGeom>
-          <a:noFill/>
-        </p:spPr>
-        <p:txBody>
-          <a:bodyPr vert="horz" wrap="square" lIns="0" tIns="0" rIns="0" bIns="0" rtlCol="0" anchor="ctr">
-            <a:noAutofit/>
-          </a:bodyPr>
-          <a:lstStyle/>
-          <a:p>
-            <a:r>
-              <a:rPr lang="en-US" altLang="zh-CN" sz="1400">
-                <a:solidFill>
-                  <a:srgbClr val="181818"/>
-                </a:solidFill>
-                <a:latin typeface="Times New Roman" panose="02020603050405020304" pitchFamily="18" charset="0"/>
-              </a:rPr>
-              <a:t>Target safety state
-and scene description</a:t>
-            </a:r>
-            <a:endParaRPr lang="zh-CN" altLang="en-US" sz="1400">
-              <a:solidFill>
-                <a:srgbClr val="181818"/>
-              </a:solidFill>
-              <a:latin typeface="Times New Roman" panose="02020603050405020304" pitchFamily="18" charset="0"/>
-            </a:endParaRPr>
-          </a:p>
-        </p:txBody>
-      </p:sp>
-      <p:cxnSp>
-        <p:nvCxnSpPr>
-          <p:cNvPr id="13" name="line_011">
-            <a:extLst>
-              <a:ext uri="{FF2B5EF4-FFF2-40B4-BE49-F238E27FC236}">
-                <a16:creationId xmlns:a16="http://schemas.microsoft.com/office/drawing/2014/main" id="{6F5E939B-0718-154A-179F-D2AE07A0ADCC}"/>
-              </a:ext>
-            </a:extLst>
-          </p:cNvPr>
-          <p:cNvCxnSpPr/>
-          <p:nvPr/>
-        </p:nvCxnSpPr>
-        <p:spPr>
-          <a:xfrm>
-            <a:off x="1536700" y="2590800"/>
-            <a:ext cx="0" cy="342900"/>
-          </a:xfrm>
-          <a:prstGeom prst="line">
-            <a:avLst/>
-          </a:prstGeom>
-          <a:ln w="9525">
-            <a:solidFill>
-              <a:srgbClr val="181818"/>
-            </a:solidFill>
-            <a:tailEnd type="triangle" w="sm" len="sm"/>
-          </a:ln>
-        </p:spPr>
-        <p:style>
-          <a:lnRef idx="2">
-            <a:schemeClr val="accent1"/>
-          </a:lnRef>
-          <a:fillRef idx="0">
-            <a:schemeClr val="accent1"/>
-          </a:fillRef>
-          <a:effectRef idx="1">
-            <a:schemeClr val="accent1"/>
-          </a:effectRef>
-          <a:fontRef idx="minor">
-            <a:schemeClr val="tx1"/>
-          </a:fontRef>
-        </p:style>
-      </p:cxnSp>
-      <p:cxnSp>
-        <p:nvCxnSpPr>
-          <p:cNvPr id="14" name="line_012">
-            <a:extLst>
-              <a:ext uri="{FF2B5EF4-FFF2-40B4-BE49-F238E27FC236}">
-                <a16:creationId xmlns:a16="http://schemas.microsoft.com/office/drawing/2014/main" id="{A97DBFAC-E7DB-9B99-67AA-C586D63E8301}"/>
-              </a:ext>
-            </a:extLst>
-          </p:cNvPr>
-          <p:cNvCxnSpPr/>
-          <p:nvPr/>
-        </p:nvCxnSpPr>
-        <p:spPr>
-          <a:xfrm>
-            <a:off x="4419600" y="2222500"/>
-            <a:ext cx="0" cy="711200"/>
-          </a:xfrm>
-          <a:prstGeom prst="line">
-            <a:avLst/>
-          </a:prstGeom>
-          <a:ln w="9525">
-            <a:solidFill>
-              <a:srgbClr val="181818"/>
-            </a:solidFill>
-            <a:tailEnd type="triangle" w="sm" len="sm"/>
-          </a:ln>
-        </p:spPr>
-        <p:style>
-          <a:lnRef idx="2">
-            <a:schemeClr val="accent1"/>
-          </a:lnRef>
-          <a:fillRef idx="0">
-            <a:schemeClr val="accent1"/>
-          </a:fillRef>
-          <a:effectRef idx="1">
-            <a:schemeClr val="accent1"/>
-          </a:effectRef>
-          <a:fontRef idx="minor">
-            <a:schemeClr val="tx1"/>
-          </a:fontRef>
-        </p:style>
-      </p:cxnSp>
-      <p:cxnSp>
-        <p:nvCxnSpPr>
-          <p:cNvPr id="15" name="line_013">
-            <a:extLst>
-              <a:ext uri="{FF2B5EF4-FFF2-40B4-BE49-F238E27FC236}">
-                <a16:creationId xmlns:a16="http://schemas.microsoft.com/office/drawing/2014/main" id="{E4A35789-3D74-8E2F-622E-185D6733367F}"/>
-              </a:ext>
-            </a:extLst>
-          </p:cNvPr>
-          <p:cNvCxnSpPr/>
-          <p:nvPr/>
-        </p:nvCxnSpPr>
-        <p:spPr>
-          <a:xfrm>
-            <a:off x="2413000" y="1587500"/>
-            <a:ext cx="355600" cy="0"/>
-          </a:xfrm>
-          <a:prstGeom prst="line">
-            <a:avLst/>
-          </a:prstGeom>
-          <a:ln w="8255">
-            <a:solidFill>
-              <a:srgbClr val="266A71"/>
-            </a:solidFill>
-          </a:ln>
-        </p:spPr>
-        <p:style>
-          <a:lnRef idx="2">
-            <a:schemeClr val="accent1"/>
-          </a:lnRef>
-          <a:fillRef idx="0">
-            <a:schemeClr val="accent1"/>
-          </a:fillRef>
-          <a:effectRef idx="1">
-            <a:schemeClr val="accent1"/>
-          </a:effectRef>
-          <a:fontRef idx="minor">
-            <a:schemeClr val="tx1"/>
-          </a:fontRef>
-        </p:style>
-      </p:cxnSp>
-      <p:cxnSp>
-        <p:nvCxnSpPr>
-          <p:cNvPr id="16" name="line_014">
-            <a:extLst>
-              <a:ext uri="{FF2B5EF4-FFF2-40B4-BE49-F238E27FC236}">
-                <a16:creationId xmlns:a16="http://schemas.microsoft.com/office/drawing/2014/main" id="{A651F9A2-2A48-EE56-808E-211AB966ED6F}"/>
-              </a:ext>
-            </a:extLst>
-          </p:cNvPr>
-          <p:cNvCxnSpPr/>
-          <p:nvPr/>
-        </p:nvCxnSpPr>
-        <p:spPr>
-          <a:xfrm>
-            <a:off x="2768600" y="1587500"/>
-            <a:ext cx="0" cy="1193800"/>
-          </a:xfrm>
-          <a:prstGeom prst="line">
-            <a:avLst/>
-          </a:prstGeom>
-          <a:ln w="8255">
-            <a:solidFill>
-              <a:srgbClr val="266A71"/>
-            </a:solidFill>
-          </a:ln>
-        </p:spPr>
-        <p:style>
-          <a:lnRef idx="2">
-            <a:schemeClr val="accent1"/>
-          </a:lnRef>
-          <a:fillRef idx="0">
-            <a:schemeClr val="accent1"/>
-          </a:fillRef>
-          <a:effectRef idx="1">
-            <a:schemeClr val="accent1"/>
-          </a:effectRef>
-          <a:fontRef idx="minor">
-            <a:schemeClr val="tx1"/>
-          </a:fontRef>
-        </p:style>
-      </p:cxnSp>
-      <p:cxnSp>
-        <p:nvCxnSpPr>
-          <p:cNvPr id="17" name="line_015">
-            <a:extLst>
-              <a:ext uri="{FF2B5EF4-FFF2-40B4-BE49-F238E27FC236}">
-                <a16:creationId xmlns:a16="http://schemas.microsoft.com/office/drawing/2014/main" id="{5217EF29-EAF0-E0F7-F436-0168870E0C40}"/>
-              </a:ext>
-            </a:extLst>
-          </p:cNvPr>
-          <p:cNvCxnSpPr/>
-          <p:nvPr/>
-        </p:nvCxnSpPr>
-        <p:spPr>
-          <a:xfrm>
-            <a:off x="2768600" y="2781300"/>
-            <a:ext cx="1308100" cy="0"/>
-          </a:xfrm>
-          <a:prstGeom prst="line">
-            <a:avLst/>
-          </a:prstGeom>
-          <a:ln w="8255">
-            <a:solidFill>
-              <a:srgbClr val="266A71"/>
-            </a:solidFill>
-          </a:ln>
-        </p:spPr>
-        <p:style>
-          <a:lnRef idx="2">
-            <a:schemeClr val="accent1"/>
-          </a:lnRef>
-          <a:fillRef idx="0">
-            <a:schemeClr val="accent1"/>
-          </a:fillRef>
-          <a:effectRef idx="1">
-            <a:schemeClr val="accent1"/>
-          </a:effectRef>
-          <a:fontRef idx="minor">
-            <a:schemeClr val="tx1"/>
-          </a:fontRef>
-        </p:style>
-      </p:cxnSp>
-      <p:cxnSp>
-        <p:nvCxnSpPr>
-          <p:cNvPr id="18" name="line_016">
-            <a:extLst>
-              <a:ext uri="{FF2B5EF4-FFF2-40B4-BE49-F238E27FC236}">
-                <a16:creationId xmlns:a16="http://schemas.microsoft.com/office/drawing/2014/main" id="{E5E043B2-8C5D-C054-4BEA-DFDD9D37E345}"/>
-              </a:ext>
-            </a:extLst>
-          </p:cNvPr>
-          <p:cNvCxnSpPr/>
-          <p:nvPr/>
-        </p:nvCxnSpPr>
-        <p:spPr>
-          <a:xfrm>
-            <a:off x="4076700" y="2781300"/>
-            <a:ext cx="0" cy="152400"/>
-          </a:xfrm>
-          <a:prstGeom prst="line">
-            <a:avLst/>
-          </a:prstGeom>
-          <a:ln w="8255">
-            <a:solidFill>
-              <a:srgbClr val="266A71"/>
-            </a:solidFill>
-            <a:tailEnd type="triangle" w="sm" len="sm"/>
-          </a:ln>
-        </p:spPr>
-        <p:style>
-          <a:lnRef idx="2">
-            <a:schemeClr val="accent1"/>
-          </a:lnRef>
-          <a:fillRef idx="0">
-            <a:schemeClr val="accent1"/>
-          </a:fillRef>
-          <a:effectRef idx="1">
-            <a:schemeClr val="accent1"/>
-          </a:effectRef>
-          <a:fontRef idx="minor">
-            <a:schemeClr val="tx1"/>
-          </a:fontRef>
-        </p:style>
-      </p:cxnSp>
-      <p:sp>
-        <p:nvSpPr>
-          <p:cNvPr id="19" name="rect_017">
-            <a:extLst>
-              <a:ext uri="{FF2B5EF4-FFF2-40B4-BE49-F238E27FC236}">
-                <a16:creationId xmlns:a16="http://schemas.microsoft.com/office/drawing/2014/main" id="{10DC0DFE-9B0F-8E95-A3A3-66033F988CBD}"/>
-              </a:ext>
-            </a:extLst>
-          </p:cNvPr>
-          <p:cNvSpPr/>
-          <p:nvPr/>
-        </p:nvSpPr>
-        <p:spPr>
-          <a:xfrm>
-            <a:off x="622300" y="2933700"/>
-            <a:ext cx="2032000" cy="1028700"/>
-          </a:xfrm>
-          <a:prstGeom prst="rect">
-            <a:avLst/>
-          </a:prstGeom>
-          <a:solidFill>
-            <a:srgbClr val="EEF5F5"/>
-          </a:solidFill>
-          <a:ln w="8255">
-            <a:solidFill>
-              <a:srgbClr val="266A71"/>
-            </a:solidFill>
-          </a:ln>
-        </p:spPr>
-        <p:style>
-          <a:lnRef idx="2">
-            <a:schemeClr val="accent1">
-              <a:shade val="15000"/>
-            </a:schemeClr>
-          </a:lnRef>
-          <a:fillRef idx="1">
-            <a:schemeClr val="accent1"/>
-          </a:fillRef>
-          <a:effectRef idx="0">
-            <a:schemeClr val="accent1"/>
-          </a:effectRef>
-          <a:fontRef idx="minor">
-            <a:schemeClr val="lt1"/>
-          </a:fontRef>
-        </p:style>
-        <p:txBody>
-          <a:bodyPr rtlCol="0" anchor="ctr"/>
-          <a:lstStyle/>
-          <a:p>
-            <a:pPr algn="ctr"/>
-            <a:endParaRPr lang="zh-CN" altLang="en-US"/>
-          </a:p>
-        </p:txBody>
-      </p:sp>
-      <p:sp>
-        <p:nvSpPr>
-          <p:cNvPr id="20" name="text_018">
-            <a:extLst>
-              <a:ext uri="{FF2B5EF4-FFF2-40B4-BE49-F238E27FC236}">
-                <a16:creationId xmlns:a16="http://schemas.microsoft.com/office/drawing/2014/main" id="{66A1949E-E819-407D-4A8C-E22E3F75801E}"/>
-              </a:ext>
-            </a:extLst>
-          </p:cNvPr>
-          <p:cNvSpPr txBox="1"/>
-          <p:nvPr/>
-        </p:nvSpPr>
-        <p:spPr>
-          <a:xfrm>
-            <a:off x="774700" y="3022599"/>
-            <a:ext cx="1727200" cy="317500"/>
-          </a:xfrm>
-          <a:prstGeom prst="rect">
-            <a:avLst/>
-          </a:prstGeom>
-          <a:noFill/>
-        </p:spPr>
-        <p:txBody>
-          <a:bodyPr vert="horz" wrap="square" lIns="0" tIns="0" rIns="0" bIns="0" rtlCol="0" anchor="ctr">
-            <a:noAutofit/>
-          </a:bodyPr>
-          <a:lstStyle/>
-          <a:p>
-            <a:r>
-              <a:rPr lang="en-US" altLang="zh-CN" sz="1200" b="1">
-                <a:solidFill>
-                  <a:srgbClr val="266A71"/>
-                </a:solidFill>
-                <a:latin typeface="Arial" panose="020B0604020202020204" pitchFamily="34" charset="0"/>
-              </a:rPr>
-              <a:t>Image encoding</a:t>
-            </a:r>
-            <a:endParaRPr lang="zh-CN" altLang="en-US" sz="1200" b="1">
-              <a:solidFill>
-                <a:srgbClr val="266A71"/>
-              </a:solidFill>
-              <a:latin typeface="Arial" panose="020B0604020202020204" pitchFamily="34" charset="0"/>
-            </a:endParaRPr>
-          </a:p>
-        </p:txBody>
-      </p:sp>
-      <p:sp>
-        <p:nvSpPr>
-          <p:cNvPr id="21" name="text_019">
-            <a:extLst>
-              <a:ext uri="{FF2B5EF4-FFF2-40B4-BE49-F238E27FC236}">
-                <a16:creationId xmlns:a16="http://schemas.microsoft.com/office/drawing/2014/main" id="{E59DB68F-973C-F47D-23D8-59F1B1EF5E40}"/>
-              </a:ext>
-            </a:extLst>
-          </p:cNvPr>
-          <p:cNvSpPr txBox="1"/>
-          <p:nvPr/>
-        </p:nvSpPr>
-        <p:spPr>
-          <a:xfrm>
-            <a:off x="774700" y="3378199"/>
-            <a:ext cx="1727200" cy="520700"/>
-          </a:xfrm>
-          <a:prstGeom prst="rect">
-            <a:avLst/>
-          </a:prstGeom>
-          <a:noFill/>
-        </p:spPr>
-        <p:txBody>
-          <a:bodyPr vert="horz" wrap="square" lIns="0" tIns="0" rIns="0" bIns="0" rtlCol="0" anchor="ctr">
-            <a:noAutofit/>
-          </a:bodyPr>
-          <a:lstStyle/>
-          <a:p>
-            <a:r>
-              <a:rPr lang="en-US" altLang="zh-CN" sz="1400">
-                <a:solidFill>
-                  <a:srgbClr val="181818"/>
-                </a:solidFill>
-                <a:latin typeface="Times New Roman" panose="02020603050405020304" pitchFamily="18" charset="0"/>
-              </a:rPr>
-              <a:t>Scale + Qwen VAE</a:t>
-            </a:r>
-            <a:endParaRPr lang="zh-CN" altLang="en-US" sz="1400">
-              <a:solidFill>
-                <a:srgbClr val="181818"/>
-              </a:solidFill>
-              <a:latin typeface="Times New Roman" panose="02020603050405020304" pitchFamily="18" charset="0"/>
-            </a:endParaRPr>
-          </a:p>
-        </p:txBody>
-      </p:sp>
-      <p:sp>
-        <p:nvSpPr>
-          <p:cNvPr id="22" name="rect_020">
-            <a:extLst>
-              <a:ext uri="{FF2B5EF4-FFF2-40B4-BE49-F238E27FC236}">
-                <a16:creationId xmlns:a16="http://schemas.microsoft.com/office/drawing/2014/main" id="{200A7578-366D-5B8D-A743-41B7125F1FE4}"/>
-              </a:ext>
-            </a:extLst>
-          </p:cNvPr>
-          <p:cNvSpPr/>
-          <p:nvPr/>
-        </p:nvSpPr>
-        <p:spPr>
-          <a:xfrm>
-            <a:off x="3200400" y="2933700"/>
-            <a:ext cx="2451100" cy="1028700"/>
-          </a:xfrm>
-          <a:prstGeom prst="rect">
-            <a:avLst/>
-          </a:prstGeom>
-          <a:solidFill>
-            <a:srgbClr val="EEF5F5"/>
-          </a:solidFill>
-          <a:ln w="8255">
-            <a:solidFill>
-              <a:srgbClr val="266A71"/>
-            </a:solidFill>
-          </a:ln>
-        </p:spPr>
-        <p:style>
-          <a:lnRef idx="2">
-            <a:schemeClr val="accent1">
-              <a:shade val="15000"/>
-            </a:schemeClr>
-          </a:lnRef>
-          <a:fillRef idx="1">
-            <a:schemeClr val="accent1"/>
-          </a:fillRef>
-          <a:effectRef idx="0">
-            <a:schemeClr val="accent1"/>
-          </a:effectRef>
-          <a:fontRef idx="minor">
-            <a:schemeClr val="lt1"/>
-          </a:fontRef>
-        </p:style>
-        <p:txBody>
-          <a:bodyPr rtlCol="0" anchor="ctr"/>
-          <a:lstStyle/>
-          <a:p>
-            <a:pPr algn="ctr"/>
-            <a:endParaRPr lang="zh-CN" altLang="en-US"/>
-          </a:p>
-        </p:txBody>
-      </p:sp>
-      <p:sp>
-        <p:nvSpPr>
-          <p:cNvPr id="23" name="text_021">
-            <a:extLst>
-              <a:ext uri="{FF2B5EF4-FFF2-40B4-BE49-F238E27FC236}">
-                <a16:creationId xmlns:a16="http://schemas.microsoft.com/office/drawing/2014/main" id="{7B9F7044-A40C-56D6-9EDF-DFA9742A29D5}"/>
-              </a:ext>
-            </a:extLst>
-          </p:cNvPr>
-          <p:cNvSpPr txBox="1"/>
-          <p:nvPr/>
-        </p:nvSpPr>
-        <p:spPr>
-          <a:xfrm>
-            <a:off x="3352800" y="3022599"/>
-            <a:ext cx="2146300" cy="317500"/>
-          </a:xfrm>
-          <a:prstGeom prst="rect">
-            <a:avLst/>
-          </a:prstGeom>
-          <a:noFill/>
-        </p:spPr>
-        <p:txBody>
-          <a:bodyPr vert="horz" wrap="square" lIns="0" tIns="0" rIns="0" bIns="0" rtlCol="0" anchor="ctr">
-            <a:noAutofit/>
-          </a:bodyPr>
-          <a:lstStyle/>
-          <a:p>
-            <a:r>
-              <a:rPr lang="en-US" altLang="zh-CN" sz="1200" b="1">
-                <a:solidFill>
-                  <a:srgbClr val="266A71"/>
-                </a:solidFill>
-                <a:latin typeface="Arial" panose="020B0604020202020204" pitchFamily="34" charset="0"/>
-              </a:rPr>
-              <a:t>Multimodal encoding</a:t>
-            </a:r>
-            <a:endParaRPr lang="zh-CN" altLang="en-US" sz="1200" b="1">
-              <a:solidFill>
-                <a:srgbClr val="266A71"/>
-              </a:solidFill>
-              <a:latin typeface="Arial" panose="020B0604020202020204" pitchFamily="34" charset="0"/>
-            </a:endParaRPr>
-          </a:p>
-        </p:txBody>
-      </p:sp>
-      <p:sp>
-        <p:nvSpPr>
-          <p:cNvPr id="24" name="text_022">
-            <a:extLst>
-              <a:ext uri="{FF2B5EF4-FFF2-40B4-BE49-F238E27FC236}">
-                <a16:creationId xmlns:a16="http://schemas.microsoft.com/office/drawing/2014/main" id="{7BCF492A-FB0A-81A1-7A98-EAEB11D0F4FB}"/>
-              </a:ext>
-            </a:extLst>
-          </p:cNvPr>
-          <p:cNvSpPr txBox="1"/>
-          <p:nvPr/>
-        </p:nvSpPr>
-        <p:spPr>
-          <a:xfrm>
-            <a:off x="3352800" y="3378199"/>
-            <a:ext cx="2146300" cy="520700"/>
-          </a:xfrm>
-          <a:prstGeom prst="rect">
-            <a:avLst/>
-          </a:prstGeom>
-          <a:noFill/>
-        </p:spPr>
-        <p:txBody>
-          <a:bodyPr vert="horz" wrap="square" lIns="0" tIns="0" rIns="0" bIns="0" rtlCol="0" anchor="ctr">
-            <a:noAutofit/>
-          </a:bodyPr>
-          <a:lstStyle/>
-          <a:p>
-            <a:r>
-              <a:rPr lang="en-US" altLang="zh-CN" sz="1400">
-                <a:solidFill>
-                  <a:srgbClr val="181818"/>
-                </a:solidFill>
-                <a:latin typeface="Times New Roman" panose="02020603050405020304" pitchFamily="18" charset="0"/>
-              </a:rPr>
-              <a:t>Qwen2.5-VL 7B
-FP8 text encoder</a:t>
-            </a:r>
-            <a:endParaRPr lang="zh-CN" altLang="en-US" sz="1400">
-              <a:solidFill>
-                <a:srgbClr val="181818"/>
-              </a:solidFill>
-              <a:latin typeface="Times New Roman" panose="02020603050405020304" pitchFamily="18" charset="0"/>
-            </a:endParaRPr>
-          </a:p>
-        </p:txBody>
-      </p:sp>
-      <p:sp>
-        <p:nvSpPr>
-          <p:cNvPr id="25" name="text_023">
-            <a:extLst>
-              <a:ext uri="{FF2B5EF4-FFF2-40B4-BE49-F238E27FC236}">
-                <a16:creationId xmlns:a16="http://schemas.microsoft.com/office/drawing/2014/main" id="{52EC8ECF-EEB1-5522-FF41-BD6EEBE24240}"/>
-              </a:ext>
-            </a:extLst>
-          </p:cNvPr>
-          <p:cNvSpPr txBox="1"/>
-          <p:nvPr/>
-        </p:nvSpPr>
-        <p:spPr>
-          <a:xfrm>
-            <a:off x="685800" y="4051299"/>
-            <a:ext cx="1905000" cy="317500"/>
-          </a:xfrm>
-          <a:prstGeom prst="rect">
-            <a:avLst/>
-          </a:prstGeom>
-          <a:noFill/>
-        </p:spPr>
-        <p:txBody>
-          <a:bodyPr vert="horz" wrap="square" lIns="0" tIns="0" rIns="0" bIns="0" rtlCol="0" anchor="ctr">
-            <a:noAutofit/>
-          </a:bodyPr>
-          <a:lstStyle/>
-          <a:p>
-            <a:pPr algn="ctr"/>
-            <a:r>
-              <a:rPr lang="en-US" altLang="zh-CN" sz="1300" i="1">
-                <a:solidFill>
-                  <a:srgbClr val="181818"/>
-                </a:solidFill>
-                <a:latin typeface="Times New Roman" panose="02020603050405020304" pitchFamily="18" charset="0"/>
-              </a:rPr>
-              <a:t>Image latent</a:t>
-            </a:r>
-            <a:endParaRPr lang="zh-CN" altLang="en-US" sz="1300" i="1">
-              <a:solidFill>
-                <a:srgbClr val="181818"/>
-              </a:solidFill>
-              <a:latin typeface="Times New Roman" panose="02020603050405020304" pitchFamily="18" charset="0"/>
-            </a:endParaRPr>
-          </a:p>
-        </p:txBody>
-      </p:sp>
-      <p:sp>
-        <p:nvSpPr>
-          <p:cNvPr id="26" name="text_024">
-            <a:extLst>
-              <a:ext uri="{FF2B5EF4-FFF2-40B4-BE49-F238E27FC236}">
-                <a16:creationId xmlns:a16="http://schemas.microsoft.com/office/drawing/2014/main" id="{201E7963-8C4A-5A72-0E45-C10489028EBD}"/>
-              </a:ext>
-            </a:extLst>
-          </p:cNvPr>
-          <p:cNvSpPr txBox="1"/>
-          <p:nvPr/>
-        </p:nvSpPr>
-        <p:spPr>
-          <a:xfrm>
-            <a:off x="3378200" y="4051299"/>
-            <a:ext cx="2120900" cy="317500"/>
-          </a:xfrm>
-          <a:prstGeom prst="rect">
-            <a:avLst/>
-          </a:prstGeom>
-          <a:noFill/>
-        </p:spPr>
-        <p:txBody>
-          <a:bodyPr vert="horz" wrap="square" lIns="0" tIns="0" rIns="0" bIns="0" rtlCol="0" anchor="ctr">
-            <a:noAutofit/>
-          </a:bodyPr>
-          <a:lstStyle/>
-          <a:p>
-            <a:pPr algn="ctr"/>
-            <a:r>
-              <a:rPr lang="en-US" altLang="zh-CN" sz="1300" i="1">
-                <a:solidFill>
-                  <a:srgbClr val="181818"/>
-                </a:solidFill>
-                <a:latin typeface="Times New Roman" panose="02020603050405020304" pitchFamily="18" charset="0"/>
-              </a:rPr>
-              <a:t>Text conditioning</a:t>
-            </a:r>
-            <a:endParaRPr lang="zh-CN" altLang="en-US" sz="1300" i="1">
-              <a:solidFill>
-                <a:srgbClr val="181818"/>
-              </a:solidFill>
-              <a:latin typeface="Times New Roman" panose="02020603050405020304" pitchFamily="18" charset="0"/>
-            </a:endParaRPr>
-          </a:p>
-        </p:txBody>
-      </p:sp>
-      <p:cxnSp>
-        <p:nvCxnSpPr>
-          <p:cNvPr id="27" name="line_025">
-            <a:extLst>
-              <a:ext uri="{FF2B5EF4-FFF2-40B4-BE49-F238E27FC236}">
-                <a16:creationId xmlns:a16="http://schemas.microsoft.com/office/drawing/2014/main" id="{891A61DF-6FDF-3A04-2974-806567D5C30C}"/>
-              </a:ext>
-            </a:extLst>
-          </p:cNvPr>
-          <p:cNvCxnSpPr/>
-          <p:nvPr/>
-        </p:nvCxnSpPr>
-        <p:spPr>
-          <a:xfrm>
-            <a:off x="1536700" y="4368800"/>
-            <a:ext cx="0" cy="127000"/>
-          </a:xfrm>
-          <a:prstGeom prst="line">
-            <a:avLst/>
-          </a:prstGeom>
-          <a:ln w="9525">
-            <a:solidFill>
-              <a:srgbClr val="266A71"/>
-            </a:solidFill>
-          </a:ln>
-        </p:spPr>
-        <p:style>
-          <a:lnRef idx="2">
-            <a:schemeClr val="accent1"/>
-          </a:lnRef>
-          <a:fillRef idx="0">
-            <a:schemeClr val="accent1"/>
-          </a:fillRef>
-          <a:effectRef idx="1">
-            <a:schemeClr val="accent1"/>
-          </a:effectRef>
-          <a:fontRef idx="minor">
-            <a:schemeClr val="tx1"/>
-          </a:fontRef>
-        </p:style>
-      </p:cxnSp>
-      <p:cxnSp>
-        <p:nvCxnSpPr>
-          <p:cNvPr id="28" name="line_026">
-            <a:extLst>
-              <a:ext uri="{FF2B5EF4-FFF2-40B4-BE49-F238E27FC236}">
-                <a16:creationId xmlns:a16="http://schemas.microsoft.com/office/drawing/2014/main" id="{3AB98AF8-0B72-7C1D-C760-54E3126817C5}"/>
-              </a:ext>
-            </a:extLst>
-          </p:cNvPr>
-          <p:cNvCxnSpPr/>
-          <p:nvPr/>
-        </p:nvCxnSpPr>
-        <p:spPr>
-          <a:xfrm flipH="1">
-            <a:off x="393700" y="4495800"/>
-            <a:ext cx="1143000" cy="0"/>
-          </a:xfrm>
-          <a:prstGeom prst="line">
-            <a:avLst/>
-          </a:prstGeom>
-          <a:ln w="9525">
-            <a:solidFill>
-              <a:srgbClr val="266A71"/>
-            </a:solidFill>
-          </a:ln>
-        </p:spPr>
-        <p:style>
-          <a:lnRef idx="2">
-            <a:schemeClr val="accent1"/>
-          </a:lnRef>
-          <a:fillRef idx="0">
-            <a:schemeClr val="accent1"/>
-          </a:fillRef>
-          <a:effectRef idx="1">
-            <a:schemeClr val="accent1"/>
-          </a:effectRef>
-          <a:fontRef idx="minor">
-            <a:schemeClr val="tx1"/>
-          </a:fontRef>
-        </p:style>
-      </p:cxnSp>
-      <p:cxnSp>
-        <p:nvCxnSpPr>
-          <p:cNvPr id="29" name="line_027">
-            <a:extLst>
-              <a:ext uri="{FF2B5EF4-FFF2-40B4-BE49-F238E27FC236}">
-                <a16:creationId xmlns:a16="http://schemas.microsoft.com/office/drawing/2014/main" id="{5B7A7549-1AE6-DFD9-28B2-FA8920E0FA59}"/>
-              </a:ext>
-            </a:extLst>
-          </p:cNvPr>
-          <p:cNvCxnSpPr/>
-          <p:nvPr/>
-        </p:nvCxnSpPr>
-        <p:spPr>
-          <a:xfrm>
-            <a:off x="393700" y="4495800"/>
-            <a:ext cx="0" cy="3403600"/>
-          </a:xfrm>
-          <a:prstGeom prst="line">
-            <a:avLst/>
-          </a:prstGeom>
-          <a:ln w="9525">
-            <a:solidFill>
-              <a:srgbClr val="266A71"/>
-            </a:solidFill>
-          </a:ln>
-        </p:spPr>
-        <p:style>
-          <a:lnRef idx="2">
-            <a:schemeClr val="accent1"/>
-          </a:lnRef>
-          <a:fillRef idx="0">
-            <a:schemeClr val="accent1"/>
-          </a:fillRef>
-          <a:effectRef idx="1">
-            <a:schemeClr val="accent1"/>
-          </a:effectRef>
-          <a:fontRef idx="minor">
-            <a:schemeClr val="tx1"/>
-          </a:fontRef>
-        </p:style>
-      </p:cxnSp>
-      <p:cxnSp>
-        <p:nvCxnSpPr>
-          <p:cNvPr id="30" name="line_028">
-            <a:extLst>
-              <a:ext uri="{FF2B5EF4-FFF2-40B4-BE49-F238E27FC236}">
-                <a16:creationId xmlns:a16="http://schemas.microsoft.com/office/drawing/2014/main" id="{F8DB23CC-57FA-59F9-0A11-459E38FDFB5A}"/>
-              </a:ext>
-            </a:extLst>
-          </p:cNvPr>
-          <p:cNvCxnSpPr/>
-          <p:nvPr/>
-        </p:nvCxnSpPr>
-        <p:spPr>
-          <a:xfrm>
-            <a:off x="393700" y="7899400"/>
-            <a:ext cx="317500" cy="0"/>
-          </a:xfrm>
-          <a:prstGeom prst="line">
-            <a:avLst/>
-          </a:prstGeom>
-          <a:ln w="9525">
-            <a:solidFill>
-              <a:srgbClr val="266A71"/>
-            </a:solidFill>
-            <a:tailEnd type="triangle" w="sm" len="sm"/>
-          </a:ln>
-        </p:spPr>
-        <p:style>
-          <a:lnRef idx="2">
-            <a:schemeClr val="accent1"/>
-          </a:lnRef>
-          <a:fillRef idx="0">
-            <a:schemeClr val="accent1"/>
-          </a:fillRef>
-          <a:effectRef idx="1">
-            <a:schemeClr val="accent1"/>
-          </a:effectRef>
-          <a:fontRef idx="minor">
-            <a:schemeClr val="tx1"/>
-          </a:fontRef>
-        </p:style>
-      </p:cxnSp>
-      <p:cxnSp>
-        <p:nvCxnSpPr>
-          <p:cNvPr id="31" name="line_029">
-            <a:extLst>
-              <a:ext uri="{FF2B5EF4-FFF2-40B4-BE49-F238E27FC236}">
-                <a16:creationId xmlns:a16="http://schemas.microsoft.com/office/drawing/2014/main" id="{AD60CB62-E32E-75CE-D190-E20843869D68}"/>
-              </a:ext>
-            </a:extLst>
-          </p:cNvPr>
-          <p:cNvCxnSpPr/>
-          <p:nvPr/>
-        </p:nvCxnSpPr>
-        <p:spPr>
-          <a:xfrm>
-            <a:off x="4419600" y="4368800"/>
-            <a:ext cx="0" cy="127000"/>
-          </a:xfrm>
-          <a:prstGeom prst="line">
-            <a:avLst/>
-          </a:prstGeom>
-          <a:ln w="9525">
-            <a:solidFill>
-              <a:srgbClr val="266A71"/>
-            </a:solidFill>
-          </a:ln>
-        </p:spPr>
-        <p:style>
-          <a:lnRef idx="2">
-            <a:schemeClr val="accent1"/>
-          </a:lnRef>
-          <a:fillRef idx="0">
-            <a:schemeClr val="accent1"/>
-          </a:fillRef>
-          <a:effectRef idx="1">
-            <a:schemeClr val="accent1"/>
-          </a:effectRef>
-          <a:fontRef idx="minor">
-            <a:schemeClr val="tx1"/>
-          </a:fontRef>
-        </p:style>
-      </p:cxnSp>
-      <p:cxnSp>
-        <p:nvCxnSpPr>
-          <p:cNvPr id="32" name="line_030">
-            <a:extLst>
-              <a:ext uri="{FF2B5EF4-FFF2-40B4-BE49-F238E27FC236}">
-                <a16:creationId xmlns:a16="http://schemas.microsoft.com/office/drawing/2014/main" id="{DA4FFF3F-BF54-0120-B0ED-9E00D6974C4D}"/>
-              </a:ext>
-            </a:extLst>
-          </p:cNvPr>
-          <p:cNvCxnSpPr/>
-          <p:nvPr/>
-        </p:nvCxnSpPr>
-        <p:spPr>
-          <a:xfrm>
-            <a:off x="4419600" y="4495800"/>
-            <a:ext cx="1460500" cy="0"/>
-          </a:xfrm>
-          <a:prstGeom prst="line">
-            <a:avLst/>
-          </a:prstGeom>
-          <a:ln w="9525">
-            <a:solidFill>
-              <a:srgbClr val="266A71"/>
-            </a:solidFill>
-          </a:ln>
-        </p:spPr>
-        <p:style>
-          <a:lnRef idx="2">
-            <a:schemeClr val="accent1"/>
-          </a:lnRef>
-          <a:fillRef idx="0">
-            <a:schemeClr val="accent1"/>
-          </a:fillRef>
-          <a:effectRef idx="1">
-            <a:schemeClr val="accent1"/>
-          </a:effectRef>
-          <a:fontRef idx="minor">
-            <a:schemeClr val="tx1"/>
-          </a:fontRef>
-        </p:style>
-      </p:cxnSp>
-      <p:cxnSp>
-        <p:nvCxnSpPr>
-          <p:cNvPr id="33" name="line_031">
-            <a:extLst>
-              <a:ext uri="{FF2B5EF4-FFF2-40B4-BE49-F238E27FC236}">
-                <a16:creationId xmlns:a16="http://schemas.microsoft.com/office/drawing/2014/main" id="{6AB60988-48DE-337E-8AAE-0BC1163F4B22}"/>
-              </a:ext>
-            </a:extLst>
-          </p:cNvPr>
-          <p:cNvCxnSpPr/>
-          <p:nvPr/>
-        </p:nvCxnSpPr>
-        <p:spPr>
-          <a:xfrm>
-            <a:off x="5880100" y="4495800"/>
-            <a:ext cx="0" cy="3048000"/>
-          </a:xfrm>
-          <a:prstGeom prst="line">
-            <a:avLst/>
-          </a:prstGeom>
-          <a:ln w="9525">
-            <a:solidFill>
-              <a:srgbClr val="266A71"/>
-            </a:solidFill>
-          </a:ln>
-        </p:spPr>
-        <p:style>
-          <a:lnRef idx="2">
-            <a:schemeClr val="accent1"/>
-          </a:lnRef>
-          <a:fillRef idx="0">
-            <a:schemeClr val="accent1"/>
-          </a:fillRef>
-          <a:effectRef idx="1">
-            <a:schemeClr val="accent1"/>
-          </a:effectRef>
-          <a:fontRef idx="minor">
-            <a:schemeClr val="tx1"/>
-          </a:fontRef>
-        </p:style>
-      </p:cxnSp>
-      <p:cxnSp>
-        <p:nvCxnSpPr>
-          <p:cNvPr id="34" name="line_032">
-            <a:extLst>
-              <a:ext uri="{FF2B5EF4-FFF2-40B4-BE49-F238E27FC236}">
-                <a16:creationId xmlns:a16="http://schemas.microsoft.com/office/drawing/2014/main" id="{6C673C79-809A-32F9-30C6-E2635EC81F51}"/>
-              </a:ext>
-            </a:extLst>
-          </p:cNvPr>
-          <p:cNvCxnSpPr/>
-          <p:nvPr/>
-        </p:nvCxnSpPr>
-        <p:spPr>
-          <a:xfrm flipH="1">
-            <a:off x="5029200" y="7543800"/>
-            <a:ext cx="850900" cy="0"/>
-          </a:xfrm>
-          <a:prstGeom prst="line">
-            <a:avLst/>
-          </a:prstGeom>
-          <a:ln w="9525">
-            <a:solidFill>
-              <a:srgbClr val="266A71"/>
-            </a:solidFill>
-          </a:ln>
-        </p:spPr>
-        <p:style>
-          <a:lnRef idx="2">
-            <a:schemeClr val="accent1"/>
-          </a:lnRef>
-          <a:fillRef idx="0">
-            <a:schemeClr val="accent1"/>
-          </a:fillRef>
-          <a:effectRef idx="1">
-            <a:schemeClr val="accent1"/>
-          </a:effectRef>
-          <a:fontRef idx="minor">
-            <a:schemeClr val="tx1"/>
-          </a:fontRef>
-        </p:style>
-      </p:cxnSp>
-      <p:cxnSp>
-        <p:nvCxnSpPr>
-          <p:cNvPr id="35" name="line_033">
-            <a:extLst>
-              <a:ext uri="{FF2B5EF4-FFF2-40B4-BE49-F238E27FC236}">
-                <a16:creationId xmlns:a16="http://schemas.microsoft.com/office/drawing/2014/main" id="{708AF63D-08B2-41D3-A7A8-40D902357DE6}"/>
-              </a:ext>
-            </a:extLst>
-          </p:cNvPr>
-          <p:cNvCxnSpPr/>
-          <p:nvPr/>
-        </p:nvCxnSpPr>
-        <p:spPr>
-          <a:xfrm>
-            <a:off x="5029200" y="7543800"/>
-            <a:ext cx="0" cy="152400"/>
-          </a:xfrm>
-          <a:prstGeom prst="line">
-            <a:avLst/>
-          </a:prstGeom>
-          <a:ln w="9525">
-            <a:solidFill>
-              <a:srgbClr val="266A71"/>
-            </a:solidFill>
-            <a:tailEnd type="triangle" w="sm" len="sm"/>
-          </a:ln>
-        </p:spPr>
-        <p:style>
-          <a:lnRef idx="2">
-            <a:schemeClr val="accent1"/>
-          </a:lnRef>
-          <a:fillRef idx="0">
-            <a:schemeClr val="accent1"/>
-          </a:fillRef>
-          <a:effectRef idx="1">
-            <a:schemeClr val="accent1"/>
-          </a:effectRef>
-          <a:fontRef idx="minor">
-            <a:schemeClr val="tx1"/>
-          </a:fontRef>
-        </p:style>
-      </p:cxnSp>
-      <p:sp>
-        <p:nvSpPr>
-          <p:cNvPr id="36" name="rect_034">
-            <a:extLst>
-              <a:ext uri="{FF2B5EF4-FFF2-40B4-BE49-F238E27FC236}">
-                <a16:creationId xmlns:a16="http://schemas.microsoft.com/office/drawing/2014/main" id="{1DDE7CA7-166A-02BD-9A62-DD196162A792}"/>
-              </a:ext>
-            </a:extLst>
-          </p:cNvPr>
-          <p:cNvSpPr/>
-          <p:nvPr/>
-        </p:nvSpPr>
-        <p:spPr>
-          <a:xfrm>
-            <a:off x="838200" y="4800600"/>
-            <a:ext cx="4584700" cy="2349500"/>
-          </a:xfrm>
-          <a:prstGeom prst="rect">
-            <a:avLst/>
-          </a:prstGeom>
-          <a:solidFill>
-            <a:srgbClr val="F7F9F9"/>
-          </a:solidFill>
-          <a:ln w="6350">
-            <a:solidFill>
-              <a:srgbClr val="B7BCC0"/>
-            </a:solidFill>
-          </a:ln>
-        </p:spPr>
-        <p:style>
-          <a:lnRef idx="2">
-            <a:schemeClr val="accent1">
-              <a:shade val="15000"/>
-            </a:schemeClr>
-          </a:lnRef>
-          <a:fillRef idx="1">
-            <a:schemeClr val="accent1"/>
-          </a:fillRef>
-          <a:effectRef idx="0">
-            <a:schemeClr val="accent1"/>
-          </a:effectRef>
-          <a:fontRef idx="minor">
-            <a:schemeClr val="lt1"/>
-          </a:fontRef>
-        </p:style>
-        <p:txBody>
-          <a:bodyPr rtlCol="0" anchor="ctr"/>
-          <a:lstStyle/>
-          <a:p>
-            <a:pPr algn="ctr"/>
-            <a:endParaRPr lang="zh-CN" altLang="en-US"/>
-          </a:p>
-        </p:txBody>
-      </p:sp>
-      <p:sp>
-        <p:nvSpPr>
-          <p:cNvPr id="37" name="text_035">
-            <a:extLst>
-              <a:ext uri="{FF2B5EF4-FFF2-40B4-BE49-F238E27FC236}">
-                <a16:creationId xmlns:a16="http://schemas.microsoft.com/office/drawing/2014/main" id="{E8093CCA-5527-1B34-6988-41FD2075D9DF}"/>
-              </a:ext>
-            </a:extLst>
-          </p:cNvPr>
-          <p:cNvSpPr txBox="1"/>
-          <p:nvPr/>
-        </p:nvSpPr>
-        <p:spPr>
-          <a:xfrm>
-            <a:off x="1028700" y="4876799"/>
-            <a:ext cx="4203700" cy="292100"/>
-          </a:xfrm>
-          <a:prstGeom prst="rect">
-            <a:avLst/>
-          </a:prstGeom>
-          <a:noFill/>
-        </p:spPr>
-        <p:txBody>
-          <a:bodyPr vert="horz" wrap="square" lIns="0" tIns="0" rIns="0" bIns="0" rtlCol="0" anchor="ctr">
-            <a:noAutofit/>
-          </a:bodyPr>
-          <a:lstStyle/>
-          <a:p>
-            <a:r>
-              <a:rPr lang="en-US" altLang="zh-CN" sz="1400" b="1">
-                <a:solidFill>
-                  <a:srgbClr val="266A71"/>
-                </a:solidFill>
-                <a:latin typeface="Arial" panose="020B0604020202020204" pitchFamily="34" charset="0"/>
-              </a:rPr>
-              <a:t>Qwen-Image-Edit-2509</a:t>
-            </a:r>
-            <a:endParaRPr lang="zh-CN" altLang="en-US" sz="1400" b="1">
-              <a:solidFill>
-                <a:srgbClr val="266A71"/>
-              </a:solidFill>
-              <a:latin typeface="Arial" panose="020B0604020202020204" pitchFamily="34" charset="0"/>
-            </a:endParaRPr>
-          </a:p>
-        </p:txBody>
-      </p:sp>
-      <p:sp>
-        <p:nvSpPr>
-          <p:cNvPr id="38" name="text_036">
-            <a:extLst>
-              <a:ext uri="{FF2B5EF4-FFF2-40B4-BE49-F238E27FC236}">
-                <a16:creationId xmlns:a16="http://schemas.microsoft.com/office/drawing/2014/main" id="{4600B8EC-86C9-7637-7A26-14ABAA098A46}"/>
-              </a:ext>
-            </a:extLst>
-          </p:cNvPr>
-          <p:cNvSpPr txBox="1"/>
-          <p:nvPr/>
-        </p:nvSpPr>
-        <p:spPr>
-          <a:xfrm>
-            <a:off x="1028700" y="5232399"/>
-            <a:ext cx="4203700" cy="304800"/>
-          </a:xfrm>
-          <a:prstGeom prst="rect">
-            <a:avLst/>
-          </a:prstGeom>
-          <a:noFill/>
-        </p:spPr>
-        <p:txBody>
-          <a:bodyPr vert="horz" wrap="square" lIns="0" tIns="0" rIns="0" bIns="0" rtlCol="0" anchor="ctr">
-            <a:noAutofit/>
-          </a:bodyPr>
-          <a:lstStyle/>
-          <a:p>
-            <a:r>
-              <a:rPr lang="en-US" altLang="zh-CN" sz="1400">
-                <a:solidFill>
-                  <a:srgbClr val="181818"/>
-                </a:solidFill>
-                <a:latin typeface="Times New Roman" panose="02020603050405020304" pitchFamily="18" charset="0"/>
-              </a:rPr>
-              <a:t>FP8 diffusion model</a:t>
-            </a:r>
-            <a:endParaRPr lang="zh-CN" altLang="en-US" sz="1400">
-              <a:solidFill>
-                <a:srgbClr val="181818"/>
-              </a:solidFill>
-              <a:latin typeface="Times New Roman" panose="02020603050405020304" pitchFamily="18" charset="0"/>
-            </a:endParaRPr>
-          </a:p>
-        </p:txBody>
-      </p:sp>
-      <p:cxnSp>
-        <p:nvCxnSpPr>
-          <p:cNvPr id="39" name="line_037">
-            <a:extLst>
-              <a:ext uri="{FF2B5EF4-FFF2-40B4-BE49-F238E27FC236}">
-                <a16:creationId xmlns:a16="http://schemas.microsoft.com/office/drawing/2014/main" id="{BBC4E1DF-7722-B222-6198-AF11AAA0E684}"/>
-              </a:ext>
-            </a:extLst>
-          </p:cNvPr>
-          <p:cNvCxnSpPr/>
-          <p:nvPr/>
-        </p:nvCxnSpPr>
-        <p:spPr>
-          <a:xfrm>
-            <a:off x="1028700" y="5638800"/>
-            <a:ext cx="4203700" cy="0"/>
-          </a:xfrm>
-          <a:prstGeom prst="line">
-            <a:avLst/>
-          </a:prstGeom>
-          <a:ln w="5715">
-            <a:solidFill>
-              <a:srgbClr val="B7BCC0"/>
-            </a:solidFill>
-          </a:ln>
-        </p:spPr>
-        <p:style>
-          <a:lnRef idx="2">
-            <a:schemeClr val="accent1"/>
-          </a:lnRef>
-          <a:fillRef idx="0">
-            <a:schemeClr val="accent1"/>
-          </a:fillRef>
-          <a:effectRef idx="1">
-            <a:schemeClr val="accent1"/>
-          </a:effectRef>
-          <a:fontRef idx="minor">
-            <a:schemeClr val="tx1"/>
-          </a:fontRef>
-        </p:style>
-      </p:cxnSp>
-      <p:sp>
-        <p:nvSpPr>
-          <p:cNvPr id="40" name="text_038">
-            <a:extLst>
-              <a:ext uri="{FF2B5EF4-FFF2-40B4-BE49-F238E27FC236}">
-                <a16:creationId xmlns:a16="http://schemas.microsoft.com/office/drawing/2014/main" id="{71D83A96-6A49-D65A-02B8-E6EBA6CC9E10}"/>
-              </a:ext>
-            </a:extLst>
-          </p:cNvPr>
-          <p:cNvSpPr txBox="1"/>
-          <p:nvPr/>
-        </p:nvSpPr>
-        <p:spPr>
-          <a:xfrm>
-            <a:off x="1041400" y="5765799"/>
-            <a:ext cx="1765300" cy="317500"/>
-          </a:xfrm>
-          <a:prstGeom prst="rect">
-            <a:avLst/>
-          </a:prstGeom>
-          <a:noFill/>
-        </p:spPr>
-        <p:txBody>
-          <a:bodyPr vert="horz" wrap="square" lIns="0" tIns="0" rIns="0" bIns="0" rtlCol="0" anchor="ctr">
-            <a:noAutofit/>
-          </a:bodyPr>
-          <a:lstStyle/>
-          <a:p>
-            <a:r>
-              <a:rPr lang="en-US" altLang="zh-CN" sz="1400" b="1">
-                <a:solidFill>
-                  <a:srgbClr val="181818"/>
-                </a:solidFill>
-                <a:latin typeface="Times New Roman" panose="02020603050405020304" pitchFamily="18" charset="0"/>
-              </a:rPr>
-              <a:t>Standard path</a:t>
-            </a:r>
-            <a:endParaRPr lang="zh-CN" altLang="en-US" sz="1400" b="1">
-              <a:solidFill>
-                <a:srgbClr val="181818"/>
-              </a:solidFill>
-              <a:latin typeface="Times New Roman" panose="02020603050405020304" pitchFamily="18" charset="0"/>
-            </a:endParaRPr>
-          </a:p>
-        </p:txBody>
-      </p:sp>
-      <p:sp>
-        <p:nvSpPr>
-          <p:cNvPr id="41" name="text_039">
-            <a:extLst>
-              <a:ext uri="{FF2B5EF4-FFF2-40B4-BE49-F238E27FC236}">
-                <a16:creationId xmlns:a16="http://schemas.microsoft.com/office/drawing/2014/main" id="{498AFABE-2EA2-7941-7A82-3E728164A199}"/>
-              </a:ext>
-            </a:extLst>
-          </p:cNvPr>
-          <p:cNvSpPr txBox="1"/>
-          <p:nvPr/>
-        </p:nvSpPr>
-        <p:spPr>
-          <a:xfrm>
-            <a:off x="3124200" y="5765799"/>
-            <a:ext cx="2082800" cy="317500"/>
-          </a:xfrm>
-          <a:prstGeom prst="rect">
-            <a:avLst/>
-          </a:prstGeom>
-          <a:noFill/>
-        </p:spPr>
-        <p:txBody>
-          <a:bodyPr vert="horz" wrap="square" lIns="0" tIns="0" rIns="0" bIns="0" rtlCol="0" anchor="ctr">
-            <a:noAutofit/>
-          </a:bodyPr>
-          <a:lstStyle/>
-          <a:p>
-            <a:r>
-              <a:rPr lang="en-US" altLang="zh-CN" sz="1400" b="1">
-                <a:solidFill>
-                  <a:srgbClr val="181818"/>
-                </a:solidFill>
-                <a:latin typeface="Times New Roman" panose="02020603050405020304" pitchFamily="18" charset="0"/>
-              </a:rPr>
-              <a:t>Lightning LoRA</a:t>
-            </a:r>
-            <a:endParaRPr lang="zh-CN" altLang="en-US" sz="1400" b="1">
-              <a:solidFill>
-                <a:srgbClr val="181818"/>
-              </a:solidFill>
-              <a:latin typeface="Times New Roman" panose="02020603050405020304" pitchFamily="18" charset="0"/>
-            </a:endParaRPr>
-          </a:p>
-        </p:txBody>
-      </p:sp>
-      <p:sp>
-        <p:nvSpPr>
-          <p:cNvPr id="42" name="text_040">
-            <a:extLst>
-              <a:ext uri="{FF2B5EF4-FFF2-40B4-BE49-F238E27FC236}">
-                <a16:creationId xmlns:a16="http://schemas.microsoft.com/office/drawing/2014/main" id="{7D99ECAF-EEB2-164B-D98C-F383D874DD75}"/>
-              </a:ext>
-            </a:extLst>
-          </p:cNvPr>
-          <p:cNvSpPr txBox="1"/>
-          <p:nvPr/>
-        </p:nvSpPr>
-        <p:spPr>
-          <a:xfrm>
-            <a:off x="3124200" y="6095999"/>
-            <a:ext cx="2082800" cy="292100"/>
-          </a:xfrm>
-          <a:prstGeom prst="rect">
-            <a:avLst/>
-          </a:prstGeom>
-          <a:noFill/>
-        </p:spPr>
-        <p:txBody>
-          <a:bodyPr vert="horz" wrap="square" lIns="0" tIns="0" rIns="0" bIns="0" rtlCol="0" anchor="ctr">
-            <a:noAutofit/>
-          </a:bodyPr>
-          <a:lstStyle/>
-          <a:p>
-            <a:r>
-              <a:rPr lang="en-US" altLang="zh-CN" sz="1200" i="1">
-                <a:solidFill>
-                  <a:srgbClr val="181818"/>
-                </a:solidFill>
-                <a:latin typeface="Times New Roman" panose="02020603050405020304" pitchFamily="18" charset="0"/>
-              </a:rPr>
-              <a:t>Optional four-step path</a:t>
-            </a:r>
-            <a:endParaRPr lang="zh-CN" altLang="en-US" sz="1200" i="1">
-              <a:solidFill>
-                <a:srgbClr val="181818"/>
-              </a:solidFill>
-              <a:latin typeface="Times New Roman" panose="02020603050405020304" pitchFamily="18" charset="0"/>
-            </a:endParaRPr>
-          </a:p>
-        </p:txBody>
-      </p:sp>
-      <p:cxnSp>
-        <p:nvCxnSpPr>
-          <p:cNvPr id="43" name="line_041">
-            <a:extLst>
-              <a:ext uri="{FF2B5EF4-FFF2-40B4-BE49-F238E27FC236}">
-                <a16:creationId xmlns:a16="http://schemas.microsoft.com/office/drawing/2014/main" id="{5B859A28-8DB9-2517-7AFC-204AAB12A332}"/>
-              </a:ext>
-            </a:extLst>
-          </p:cNvPr>
-          <p:cNvCxnSpPr/>
-          <p:nvPr/>
-        </p:nvCxnSpPr>
-        <p:spPr>
-          <a:xfrm>
-            <a:off x="2933700" y="5753100"/>
-            <a:ext cx="0" cy="685800"/>
-          </a:xfrm>
-          <a:prstGeom prst="line">
-            <a:avLst/>
-          </a:prstGeom>
-          <a:ln w="5715">
-            <a:solidFill>
-              <a:srgbClr val="B7BCC0"/>
-            </a:solidFill>
-          </a:ln>
-        </p:spPr>
-        <p:style>
-          <a:lnRef idx="2">
-            <a:schemeClr val="accent1"/>
-          </a:lnRef>
-          <a:fillRef idx="0">
-            <a:schemeClr val="accent1"/>
-          </a:fillRef>
-          <a:effectRef idx="1">
-            <a:schemeClr val="accent1"/>
-          </a:effectRef>
-          <a:fontRef idx="minor">
-            <a:schemeClr val="tx1"/>
-          </a:fontRef>
-        </p:style>
-      </p:cxnSp>
-      <p:cxnSp>
-        <p:nvCxnSpPr>
-          <p:cNvPr id="44" name="line_042">
-            <a:extLst>
-              <a:ext uri="{FF2B5EF4-FFF2-40B4-BE49-F238E27FC236}">
-                <a16:creationId xmlns:a16="http://schemas.microsoft.com/office/drawing/2014/main" id="{EDD007AB-51AE-A66A-C2F1-22B1A02D2DF3}"/>
-              </a:ext>
-            </a:extLst>
-          </p:cNvPr>
-          <p:cNvCxnSpPr/>
-          <p:nvPr/>
-        </p:nvCxnSpPr>
-        <p:spPr>
-          <a:xfrm>
-            <a:off x="1917700" y="6426200"/>
-            <a:ext cx="0" cy="215900"/>
-          </a:xfrm>
-          <a:prstGeom prst="line">
-            <a:avLst/>
-          </a:prstGeom>
-          <a:ln w="9525">
-            <a:solidFill>
-              <a:srgbClr val="181818"/>
-            </a:solidFill>
-            <a:tailEnd type="triangle" w="sm" len="sm"/>
-          </a:ln>
-        </p:spPr>
-        <p:style>
-          <a:lnRef idx="2">
-            <a:schemeClr val="accent1"/>
-          </a:lnRef>
-          <a:fillRef idx="0">
-            <a:schemeClr val="accent1"/>
-          </a:fillRef>
-          <a:effectRef idx="1">
-            <a:schemeClr val="accent1"/>
-          </a:effectRef>
-          <a:fontRef idx="minor">
-            <a:schemeClr val="tx1"/>
-          </a:fontRef>
-        </p:style>
-      </p:cxnSp>
-      <p:cxnSp>
-        <p:nvCxnSpPr>
-          <p:cNvPr id="45" name="line_043">
-            <a:extLst>
-              <a:ext uri="{FF2B5EF4-FFF2-40B4-BE49-F238E27FC236}">
-                <a16:creationId xmlns:a16="http://schemas.microsoft.com/office/drawing/2014/main" id="{A98EB31C-8FB5-405C-2EEA-EA548121669A}"/>
-              </a:ext>
-            </a:extLst>
-          </p:cNvPr>
-          <p:cNvCxnSpPr/>
-          <p:nvPr/>
-        </p:nvCxnSpPr>
-        <p:spPr>
-          <a:xfrm>
-            <a:off x="4165600" y="6426200"/>
-            <a:ext cx="0" cy="215900"/>
-          </a:xfrm>
-          <a:prstGeom prst="line">
-            <a:avLst/>
-          </a:prstGeom>
-          <a:ln w="9525">
-            <a:solidFill>
-              <a:srgbClr val="181818"/>
-            </a:solidFill>
-            <a:tailEnd type="triangle" w="sm" len="sm"/>
-          </a:ln>
-        </p:spPr>
-        <p:style>
-          <a:lnRef idx="2">
-            <a:schemeClr val="accent1"/>
-          </a:lnRef>
-          <a:fillRef idx="0">
-            <a:schemeClr val="accent1"/>
-          </a:fillRef>
-          <a:effectRef idx="1">
-            <a:schemeClr val="accent1"/>
-          </a:effectRef>
-          <a:fontRef idx="minor">
-            <a:schemeClr val="tx1"/>
-          </a:fontRef>
-        </p:style>
-      </p:cxnSp>
-      <p:sp>
-        <p:nvSpPr>
-          <p:cNvPr id="46" name="rect_044">
-            <a:extLst>
-              <a:ext uri="{FF2B5EF4-FFF2-40B4-BE49-F238E27FC236}">
-                <a16:creationId xmlns:a16="http://schemas.microsoft.com/office/drawing/2014/main" id="{CEE8766F-20B0-CBEA-275E-1AC7385BB8E9}"/>
-              </a:ext>
-            </a:extLst>
-          </p:cNvPr>
-          <p:cNvSpPr/>
-          <p:nvPr/>
-        </p:nvSpPr>
-        <p:spPr>
-          <a:xfrm>
-            <a:off x="1041400" y="6654800"/>
-            <a:ext cx="4191000" cy="355600"/>
-          </a:xfrm>
-          <a:prstGeom prst="rect">
-            <a:avLst/>
-          </a:prstGeom>
-          <a:solidFill>
-            <a:srgbClr val="E3EEEE"/>
+            <a:srgbClr val="E2EDF6"/>
           </a:solidFill>
           <a:ln w="19050" cap="flat" cmpd="sng" algn="ctr">
             <a:noFill/>
@@ -5766,59 +3854,12 @@
           </a:p>
         </p:txBody>
       </p:sp>
-      <p:sp>
-        <p:nvSpPr>
-          <p:cNvPr id="47" name="text_045">
-            <a:extLst>
-              <a:ext uri="{FF2B5EF4-FFF2-40B4-BE49-F238E27FC236}">
-                <a16:creationId xmlns:a16="http://schemas.microsoft.com/office/drawing/2014/main" id="{2EA3AC63-5CA9-EB95-4DAD-0EAE59FE520E}"/>
-              </a:ext>
-            </a:extLst>
-          </p:cNvPr>
-          <p:cNvSpPr txBox="1"/>
-          <p:nvPr/>
-        </p:nvSpPr>
-        <p:spPr>
-          <a:xfrm>
-            <a:off x="1117600" y="6680199"/>
-            <a:ext cx="4038600" cy="292100"/>
-          </a:xfrm>
-          <a:prstGeom prst="rect">
-            <a:avLst/>
-          </a:prstGeom>
-          <a:noFill/>
-        </p:spPr>
-        <p:txBody>
-          <a:bodyPr vert="horz" wrap="square" lIns="0" tIns="0" rIns="0" bIns="0" rtlCol="0" anchor="ctr">
-            <a:noAutofit/>
-          </a:bodyPr>
-          <a:lstStyle/>
-          <a:p>
-            <a:pPr algn="ctr"/>
-            <a:r>
-              <a:rPr lang="en-US" altLang="zh-CN" sz="1150">
-                <a:solidFill>
-                  <a:srgbClr val="181818"/>
-                </a:solidFill>
-                <a:latin typeface="Arial" panose="020B0604020202020204" pitchFamily="34" charset="0"/>
-              </a:rPr>
-              <a:t>Model preparation: AuraFlow / CFGNorm</a:t>
-            </a:r>
-            <a:endParaRPr lang="zh-CN" altLang="en-US" sz="1150">
-              <a:solidFill>
-                <a:srgbClr val="181818"/>
-              </a:solidFill>
-              <a:latin typeface="Arial" panose="020B0604020202020204" pitchFamily="34" charset="0"/>
-            </a:endParaRPr>
-          </a:p>
-        </p:txBody>
-      </p:sp>
       <p:cxnSp>
         <p:nvCxnSpPr>
-          <p:cNvPr id="48" name="line_046">
-            <a:extLst>
-              <a:ext uri="{FF2B5EF4-FFF2-40B4-BE49-F238E27FC236}">
-                <a16:creationId xmlns:a16="http://schemas.microsoft.com/office/drawing/2014/main" id="{F5899418-36F9-BB08-CB8C-E6710A83D36B}"/>
+          <p:cNvPr id="3" name="line_002">
+            <a:extLst>
+              <a:ext uri="{FF2B5EF4-FFF2-40B4-BE49-F238E27FC236}">
+                <a16:creationId xmlns:a16="http://schemas.microsoft.com/office/drawing/2014/main" id="{F686F81A-6D48-8B12-80AD-19F6D2237808}"/>
               </a:ext>
             </a:extLst>
           </p:cNvPr>
@@ -5827,17 +3868,17 @@
         </p:nvCxnSpPr>
         <p:spPr>
           <a:xfrm>
-            <a:off x="3136900" y="7150100"/>
-            <a:ext cx="0" cy="546100"/>
+            <a:off x="4800600" y="457200"/>
+            <a:ext cx="0" cy="7302500"/>
           </a:xfrm>
           <a:prstGeom prst="line">
             <a:avLst/>
           </a:prstGeom>
-          <a:ln w="9525">
+          <a:ln w="15875">
             <a:solidFill>
-              <a:srgbClr val="266A71"/>
+              <a:srgbClr val="748595"/>
             </a:solidFill>
-            <a:tailEnd type="triangle" w="sm" len="sm"/>
+            <a:prstDash val="dash"/>
           </a:ln>
         </p:spPr>
         <p:style>
@@ -5857,10 +3898,140 @@
       </p:cxnSp>
       <p:sp>
         <p:nvSpPr>
-          <p:cNvPr id="49" name="rect_047">
-            <a:extLst>
-              <a:ext uri="{FF2B5EF4-FFF2-40B4-BE49-F238E27FC236}">
-                <a16:creationId xmlns:a16="http://schemas.microsoft.com/office/drawing/2014/main" id="{4B65F8AE-2023-4E18-9BF9-9ED82471A793}"/>
+          <p:cNvPr id="4" name="text_003">
+            <a:extLst>
+              <a:ext uri="{FF2B5EF4-FFF2-40B4-BE49-F238E27FC236}">
+                <a16:creationId xmlns:a16="http://schemas.microsoft.com/office/drawing/2014/main" id="{DD608EB1-1BA9-2831-4C42-36C716FA5200}"/>
+              </a:ext>
+            </a:extLst>
+          </p:cNvPr>
+          <p:cNvSpPr txBox="1"/>
+          <p:nvPr/>
+        </p:nvSpPr>
+        <p:spPr>
+          <a:xfrm>
+            <a:off x="457200" y="393699"/>
+            <a:ext cx="4013200" cy="457200"/>
+          </a:xfrm>
+          <a:prstGeom prst="rect">
+            <a:avLst/>
+          </a:prstGeom>
+          <a:noFill/>
+        </p:spPr>
+        <p:txBody>
+          <a:bodyPr vert="horz" wrap="square" lIns="0" tIns="0" rIns="0" bIns="0" rtlCol="0" anchor="ctr">
+            <a:noAutofit/>
+          </a:bodyPr>
+          <a:lstStyle/>
+          <a:p>
+            <a:pPr algn="ctr"/>
+            <a:r>
+              <a:rPr lang="en-US" altLang="zh-CN" sz="2200" b="1">
+                <a:solidFill>
+                  <a:srgbClr val="181818"/>
+                </a:solidFill>
+                <a:latin typeface="Times New Roman" panose="02020603050405020304" pitchFamily="18" charset="0"/>
+              </a:rPr>
+              <a:t>(a) Reference composition</a:t>
+            </a:r>
+            <a:endParaRPr lang="zh-CN" altLang="en-US" sz="2200" b="1">
+              <a:solidFill>
+                <a:srgbClr val="181818"/>
+              </a:solidFill>
+              <a:latin typeface="Times New Roman" panose="02020603050405020304" pitchFamily="18" charset="0"/>
+            </a:endParaRPr>
+          </a:p>
+        </p:txBody>
+      </p:sp>
+      <p:sp>
+        <p:nvSpPr>
+          <p:cNvPr id="5" name="text_004">
+            <a:extLst>
+              <a:ext uri="{FF2B5EF4-FFF2-40B4-BE49-F238E27FC236}">
+                <a16:creationId xmlns:a16="http://schemas.microsoft.com/office/drawing/2014/main" id="{BC3369CA-44A0-D67B-AFFD-62135261192B}"/>
+              </a:ext>
+            </a:extLst>
+          </p:cNvPr>
+          <p:cNvSpPr txBox="1"/>
+          <p:nvPr/>
+        </p:nvSpPr>
+        <p:spPr>
+          <a:xfrm>
+            <a:off x="5257800" y="393699"/>
+            <a:ext cx="11658600" cy="457200"/>
+          </a:xfrm>
+          <a:prstGeom prst="rect">
+            <a:avLst/>
+          </a:prstGeom>
+          <a:noFill/>
+        </p:spPr>
+        <p:txBody>
+          <a:bodyPr vert="horz" wrap="square" lIns="0" tIns="0" rIns="0" bIns="0" rtlCol="0" anchor="ctr">
+            <a:noAutofit/>
+          </a:bodyPr>
+          <a:lstStyle/>
+          <a:p>
+            <a:pPr algn="ctr"/>
+            <a:r>
+              <a:rPr lang="en-US" altLang="zh-CN" sz="2200" b="1">
+                <a:solidFill>
+                  <a:srgbClr val="181818"/>
+                </a:solidFill>
+                <a:latin typeface="Times New Roman" panose="02020603050405020304" pitchFamily="18" charset="0"/>
+              </a:rPr>
+              <a:t>(b) Conditioned image editing and dataset assembly</a:t>
+            </a:r>
+            <a:endParaRPr lang="zh-CN" altLang="en-US" sz="2200" b="1">
+              <a:solidFill>
+                <a:srgbClr val="181818"/>
+              </a:solidFill>
+              <a:latin typeface="Times New Roman" panose="02020603050405020304" pitchFamily="18" charset="0"/>
+            </a:endParaRPr>
+          </a:p>
+        </p:txBody>
+      </p:sp>
+      <p:pic>
+        <p:nvPicPr>
+          <p:cNvPr id="7" name="picture_005">
+            <a:extLst>
+              <a:ext uri="{FF2B5EF4-FFF2-40B4-BE49-F238E27FC236}">
+                <a16:creationId xmlns:a16="http://schemas.microsoft.com/office/drawing/2014/main" id="{BAC14321-4D85-C3F2-2CB0-DDFA7FEB91C9}"/>
+              </a:ext>
+            </a:extLst>
+          </p:cNvPr>
+          <p:cNvPicPr>
+            <a:picLocks/>
+          </p:cNvPicPr>
+          <p:nvPr/>
+        </p:nvPicPr>
+        <p:blipFill>
+          <a:blip r:embed="rId4">
+            <a:extLst>
+              <a:ext uri="{28A0092B-C50C-407E-A947-70E740481C1C}">
+                <a14:useLocalDpi xmlns:a14="http://schemas.microsoft.com/office/drawing/2010/main" val="0"/>
+              </a:ext>
+            </a:extLst>
+          </a:blip>
+          <a:stretch>
+            <a:fillRect/>
+          </a:stretch>
+        </p:blipFill>
+        <p:spPr>
+          <a:xfrm>
+            <a:off x="508000" y="1603699"/>
+            <a:ext cx="2209800" cy="1656702"/>
+          </a:xfrm>
+          <a:prstGeom prst="rect">
+            <a:avLst/>
+          </a:prstGeom>
+        </p:spPr>
+      </p:pic>
+      <p:sp>
+        <p:nvSpPr>
+          <p:cNvPr id="8" name="rect_006">
+            <a:extLst>
+              <a:ext uri="{FF2B5EF4-FFF2-40B4-BE49-F238E27FC236}">
+                <a16:creationId xmlns:a16="http://schemas.microsoft.com/office/drawing/2014/main" id="{1FFE4474-F89F-3EE5-E716-F4EAC5EF4DEB}"/>
               </a:ext>
             </a:extLst>
           </p:cNvPr>
@@ -5869,20 +4040,30 @@
         </p:nvSpPr>
         <p:spPr>
           <a:xfrm>
-            <a:off x="711200" y="7696200"/>
-            <a:ext cx="4711700" cy="596900"/>
+            <a:off x="508000" y="1603699"/>
+            <a:ext cx="2209800" cy="1656702"/>
           </a:xfrm>
           <a:prstGeom prst="rect">
             <a:avLst/>
           </a:prstGeom>
-          <a:solidFill>
-            <a:srgbClr val="FFFFFF"/>
-          </a:solidFill>
-          <a:ln w="11430">
+          <a:noFill/>
+          <a:ln w="8255" cap="flat" cmpd="sng" algn="ctr">
             <a:solidFill>
-              <a:srgbClr val="266A71"/>
+              <a:srgbClr val="696969"/>
             </a:solidFill>
+            <a:prstDash val="solid"/>
+            <a:miter lim="800000"/>
           </a:ln>
+          <a:effectLst/>
+          <a:extLst>
+            <a:ext uri="{909E8E84-426E-40DD-AFC4-6F175D3DCCD1}">
+              <a14:hiddenFill xmlns:a14="http://schemas.microsoft.com/office/drawing/2010/main">
+                <a:solidFill>
+                  <a:schemeClr val="accent1"/>
+                </a:solidFill>
+              </a14:hiddenFill>
+            </a:ext>
+          </a:extLst>
         </p:spPr>
         <p:style>
           <a:lnRef idx="2">
@@ -5909,12 +4090,112 @@
           </a:p>
         </p:txBody>
       </p:sp>
-      <p:sp>
-        <p:nvSpPr>
-          <p:cNvPr id="50" name="text_048">
-            <a:extLst>
-              <a:ext uri="{FF2B5EF4-FFF2-40B4-BE49-F238E27FC236}">
-                <a16:creationId xmlns:a16="http://schemas.microsoft.com/office/drawing/2014/main" id="{69328B9F-2CEA-F7D8-F216-9D39190E0D01}"/>
+      <p:pic>
+        <p:nvPicPr>
+          <p:cNvPr id="10" name="picture_007">
+            <a:extLst>
+              <a:ext uri="{FF2B5EF4-FFF2-40B4-BE49-F238E27FC236}">
+                <a16:creationId xmlns:a16="http://schemas.microsoft.com/office/drawing/2014/main" id="{98DCD094-FA14-4AAB-16ED-4F14002E535D}"/>
+              </a:ext>
+            </a:extLst>
+          </p:cNvPr>
+          <p:cNvPicPr>
+            <a:picLocks/>
+          </p:cNvPicPr>
+          <p:nvPr/>
+        </p:nvPicPr>
+        <p:blipFill>
+          <a:blip r:embed="rId5">
+            <a:extLst>
+              <a:ext uri="{28A0092B-C50C-407E-A947-70E740481C1C}">
+                <a14:useLocalDpi xmlns:a14="http://schemas.microsoft.com/office/drawing/2010/main" val="0"/>
+              </a:ext>
+            </a:extLst>
+          </a:blip>
+          <a:stretch>
+            <a:fillRect/>
+          </a:stretch>
+        </p:blipFill>
+        <p:spPr>
+          <a:xfrm>
+            <a:off x="3225800" y="1505031"/>
+            <a:ext cx="1346200" cy="1815938"/>
+          </a:xfrm>
+          <a:prstGeom prst="rect">
+            <a:avLst/>
+          </a:prstGeom>
+        </p:spPr>
+      </p:pic>
+      <p:sp>
+        <p:nvSpPr>
+          <p:cNvPr id="11" name="rect_008">
+            <a:extLst>
+              <a:ext uri="{FF2B5EF4-FFF2-40B4-BE49-F238E27FC236}">
+                <a16:creationId xmlns:a16="http://schemas.microsoft.com/office/drawing/2014/main" id="{BDBABA9B-28F5-0E82-7B55-A40F5F8B6AD1}"/>
+              </a:ext>
+            </a:extLst>
+          </p:cNvPr>
+          <p:cNvSpPr/>
+          <p:nvPr/>
+        </p:nvSpPr>
+        <p:spPr>
+          <a:xfrm>
+            <a:off x="3225800" y="1505031"/>
+            <a:ext cx="1346200" cy="1815938"/>
+          </a:xfrm>
+          <a:prstGeom prst="rect">
+            <a:avLst/>
+          </a:prstGeom>
+          <a:noFill/>
+          <a:ln w="8255" cap="flat" cmpd="sng" algn="ctr">
+            <a:solidFill>
+              <a:srgbClr val="696969"/>
+            </a:solidFill>
+            <a:prstDash val="solid"/>
+            <a:miter lim="800000"/>
+          </a:ln>
+          <a:effectLst/>
+          <a:extLst>
+            <a:ext uri="{909E8E84-426E-40DD-AFC4-6F175D3DCCD1}">
+              <a14:hiddenFill xmlns:a14="http://schemas.microsoft.com/office/drawing/2010/main">
+                <a:solidFill>
+                  <a:schemeClr val="accent1"/>
+                </a:solidFill>
+              </a14:hiddenFill>
+            </a:ext>
+          </a:extLst>
+        </p:spPr>
+        <p:style>
+          <a:lnRef idx="2">
+            <a:schemeClr val="accent1">
+              <a:shade val="15000"/>
+            </a:schemeClr>
+          </a:lnRef>
+          <a:fillRef idx="1">
+            <a:schemeClr val="accent1"/>
+          </a:fillRef>
+          <a:effectRef idx="0">
+            <a:schemeClr val="accent1"/>
+          </a:effectRef>
+          <a:fontRef idx="minor">
+            <a:schemeClr val="lt1"/>
+          </a:fontRef>
+        </p:style>
+        <p:txBody>
+          <a:bodyPr rtlCol="0" anchor="ctr"/>
+          <a:lstStyle/>
+          <a:p>
+            <a:pPr algn="ctr"/>
+            <a:endParaRPr lang="zh-CN" altLang="en-US"/>
+          </a:p>
+        </p:txBody>
+      </p:sp>
+      <p:sp>
+        <p:nvSpPr>
+          <p:cNvPr id="12" name="text_009">
+            <a:extLst>
+              <a:ext uri="{FF2B5EF4-FFF2-40B4-BE49-F238E27FC236}">
+                <a16:creationId xmlns:a16="http://schemas.microsoft.com/office/drawing/2014/main" id="{27FD6B43-88AA-155A-A2A7-7BA86933FF3A}"/>
               </a:ext>
             </a:extLst>
           </p:cNvPr>
@@ -5923,8 +4204,8 @@
         </p:nvSpPr>
         <p:spPr>
           <a:xfrm>
-            <a:off x="863600" y="7785099"/>
-            <a:ext cx="4406900" cy="381000"/>
+            <a:off x="2743200" y="2031999"/>
+            <a:ext cx="431800" cy="609600"/>
           </a:xfrm>
           <a:prstGeom prst="rect">
             <a:avLst/>
@@ -5937,30 +4218,125 @@
           </a:bodyPr>
           <a:lstStyle/>
           <a:p>
-            <a:r>
-              <a:rPr lang="en-US" altLang="zh-CN" sz="1300" b="1">
+            <a:pPr algn="ctr"/>
+            <a:r>
+              <a:rPr lang="en-US" altLang="zh-CN" sz="3000" b="1">
                 <a:solidFill>
-                  <a:srgbClr val="266A71"/>
+                  <a:srgbClr val="181818"/>
+                </a:solidFill>
+                <a:latin typeface="Times New Roman" panose="02020603050405020304" pitchFamily="18" charset="0"/>
+              </a:rPr>
+              <a:t>+</a:t>
+            </a:r>
+            <a:endParaRPr lang="zh-CN" altLang="en-US" sz="3000" b="1">
+              <a:solidFill>
+                <a:srgbClr val="181818"/>
+              </a:solidFill>
+              <a:latin typeface="Times New Roman" panose="02020603050405020304" pitchFamily="18" charset="0"/>
+            </a:endParaRPr>
+          </a:p>
+        </p:txBody>
+      </p:sp>
+      <p:sp>
+        <p:nvSpPr>
+          <p:cNvPr id="13" name="text_010">
+            <a:extLst>
+              <a:ext uri="{FF2B5EF4-FFF2-40B4-BE49-F238E27FC236}">
+                <a16:creationId xmlns:a16="http://schemas.microsoft.com/office/drawing/2014/main" id="{8802BAD8-0789-9701-ED03-C41AFCD4D614}"/>
+              </a:ext>
+            </a:extLst>
+          </p:cNvPr>
+          <p:cNvSpPr txBox="1"/>
+          <p:nvPr/>
+        </p:nvSpPr>
+        <p:spPr>
+          <a:xfrm>
+            <a:off x="558800" y="3632199"/>
+            <a:ext cx="2133600" cy="304800"/>
+          </a:xfrm>
+          <a:prstGeom prst="rect">
+            <a:avLst/>
+          </a:prstGeom>
+          <a:noFill/>
+        </p:spPr>
+        <p:txBody>
+          <a:bodyPr vert="horz" wrap="square" lIns="0" tIns="0" rIns="0" bIns="0" rtlCol="0" anchor="ctr">
+            <a:noAutofit/>
+          </a:bodyPr>
+          <a:lstStyle/>
+          <a:p>
+            <a:pPr algn="ctr"/>
+            <a:r>
+              <a:rPr lang="en-US" altLang="zh-CN" sz="1200">
+                <a:solidFill>
+                  <a:srgbClr val="181818"/>
                 </a:solidFill>
                 <a:latin typeface="Arial" panose="020B0604020202020204" pitchFamily="34" charset="0"/>
               </a:rPr>
-              <a:t>Latent + conditioning + model</a:t>
-            </a:r>
-            <a:endParaRPr lang="zh-CN" altLang="en-US" sz="1300" b="1">
+              <a:t>Reference 12</a:t>
+            </a:r>
+            <a:endParaRPr lang="zh-CN" altLang="en-US" sz="1200">
               <a:solidFill>
-                <a:srgbClr val="266A71"/>
+                <a:srgbClr val="181818"/>
               </a:solidFill>
               <a:latin typeface="Arial" panose="020B0604020202020204" pitchFamily="34" charset="0"/>
             </a:endParaRPr>
           </a:p>
         </p:txBody>
       </p:sp>
+      <p:sp>
+        <p:nvSpPr>
+          <p:cNvPr id="14" name="text_011">
+            <a:extLst>
+              <a:ext uri="{FF2B5EF4-FFF2-40B4-BE49-F238E27FC236}">
+                <a16:creationId xmlns:a16="http://schemas.microsoft.com/office/drawing/2014/main" id="{59BCBF8A-329A-339B-A324-300D9D81031A}"/>
+              </a:ext>
+            </a:extLst>
+          </p:cNvPr>
+          <p:cNvSpPr txBox="1"/>
+          <p:nvPr/>
+        </p:nvSpPr>
+        <p:spPr>
+          <a:xfrm>
+            <a:off x="3086100" y="3632199"/>
+            <a:ext cx="1587500" cy="304800"/>
+          </a:xfrm>
+          <a:prstGeom prst="rect">
+            <a:avLst/>
+          </a:prstGeom>
+          <a:noFill/>
+        </p:spPr>
+        <p:txBody>
+          <a:bodyPr vert="horz" wrap="square" lIns="0" tIns="0" rIns="0" bIns="0" rtlCol="0" anchor="ctr">
+            <a:noAutofit/>
+          </a:bodyPr>
+          <a:lstStyle/>
+          <a:p>
+            <a:pPr algn="ctr"/>
+            <a:r>
+              <a:rPr lang="en-US" altLang="zh-CN" sz="1200">
+                <a:solidFill>
+                  <a:srgbClr val="181818"/>
+                </a:solidFill>
+                <a:latin typeface="Arial" panose="020B0604020202020204" pitchFamily="34" charset="0"/>
+              </a:rPr>
+              <a:t>Reference 36</a:t>
+            </a:r>
+            <a:endParaRPr lang="zh-CN" altLang="en-US" sz="1200">
+              <a:solidFill>
+                <a:srgbClr val="181818"/>
+              </a:solidFill>
+              <a:latin typeface="Arial" panose="020B0604020202020204" pitchFamily="34" charset="0"/>
+            </a:endParaRPr>
+          </a:p>
+        </p:txBody>
+      </p:sp>
       <p:cxnSp>
         <p:nvCxnSpPr>
-          <p:cNvPr id="51" name="line_049">
-            <a:extLst>
-              <a:ext uri="{FF2B5EF4-FFF2-40B4-BE49-F238E27FC236}">
-                <a16:creationId xmlns:a16="http://schemas.microsoft.com/office/drawing/2014/main" id="{8DAE1C81-B238-12F2-6820-006A636B9ADC}"/>
+          <p:cNvPr id="15" name="line_012">
+            <a:extLst>
+              <a:ext uri="{FF2B5EF4-FFF2-40B4-BE49-F238E27FC236}">
+                <a16:creationId xmlns:a16="http://schemas.microsoft.com/office/drawing/2014/main" id="{6C44199B-8696-46ED-685F-EEA664DA2C33}"/>
               </a:ext>
             </a:extLst>
           </p:cNvPr>
@@ -5969,15 +4345,15 @@
         </p:nvCxnSpPr>
         <p:spPr>
           <a:xfrm>
-            <a:off x="5422900" y="8001000"/>
-            <a:ext cx="850900" cy="0"/>
+            <a:off x="1574800" y="4013200"/>
+            <a:ext cx="0" cy="228600"/>
           </a:xfrm>
           <a:prstGeom prst="line">
             <a:avLst/>
           </a:prstGeom>
           <a:ln w="12700">
             <a:solidFill>
-              <a:srgbClr val="266A71"/>
+              <a:srgbClr val="202020"/>
             </a:solidFill>
           </a:ln>
         </p:spPr>
@@ -5998,10 +4374,10 @@
       </p:cxnSp>
       <p:cxnSp>
         <p:nvCxnSpPr>
-          <p:cNvPr id="52" name="line_050">
-            <a:extLst>
-              <a:ext uri="{FF2B5EF4-FFF2-40B4-BE49-F238E27FC236}">
-                <a16:creationId xmlns:a16="http://schemas.microsoft.com/office/drawing/2014/main" id="{986A5D02-CE1F-64B1-E294-F6185C2B5304}"/>
+          <p:cNvPr id="16" name="line_013">
+            <a:extLst>
+              <a:ext uri="{FF2B5EF4-FFF2-40B4-BE49-F238E27FC236}">
+                <a16:creationId xmlns:a16="http://schemas.microsoft.com/office/drawing/2014/main" id="{AA59D272-7D28-2A33-6E78-09BB5A32A89E}"/>
               </a:ext>
             </a:extLst>
           </p:cNvPr>
@@ -6009,16 +4385,16 @@
           <p:nvPr/>
         </p:nvCxnSpPr>
         <p:spPr>
-          <a:xfrm flipV="1">
-            <a:off x="6273800" y="3429000"/>
-            <a:ext cx="0" cy="4572000"/>
+          <a:xfrm>
+            <a:off x="1574800" y="4241800"/>
+            <a:ext cx="2298700" cy="0"/>
           </a:xfrm>
           <a:prstGeom prst="line">
             <a:avLst/>
           </a:prstGeom>
           <a:ln w="12700">
             <a:solidFill>
-              <a:srgbClr val="266A71"/>
+              <a:srgbClr val="202020"/>
             </a:solidFill>
           </a:ln>
         </p:spPr>
@@ -6039,10 +4415,10 @@
       </p:cxnSp>
       <p:cxnSp>
         <p:nvCxnSpPr>
-          <p:cNvPr id="53" name="line_051">
-            <a:extLst>
-              <a:ext uri="{FF2B5EF4-FFF2-40B4-BE49-F238E27FC236}">
-                <a16:creationId xmlns:a16="http://schemas.microsoft.com/office/drawing/2014/main" id="{7155ACC8-6126-DF30-CA2F-D88A853F3C07}"/>
+          <p:cNvPr id="17" name="line_014">
+            <a:extLst>
+              <a:ext uri="{FF2B5EF4-FFF2-40B4-BE49-F238E27FC236}">
+                <a16:creationId xmlns:a16="http://schemas.microsoft.com/office/drawing/2014/main" id="{913944E8-3ADB-2EEC-3A57-2B49D0EE6A23}"/>
               </a:ext>
             </a:extLst>
           </p:cNvPr>
@@ -6050,18 +4426,17 @@
           <p:nvPr/>
         </p:nvCxnSpPr>
         <p:spPr>
-          <a:xfrm>
-            <a:off x="6273800" y="3429000"/>
-            <a:ext cx="444500" cy="0"/>
+          <a:xfrm flipV="1">
+            <a:off x="3873500" y="4013200"/>
+            <a:ext cx="0" cy="228600"/>
           </a:xfrm>
           <a:prstGeom prst="line">
             <a:avLst/>
           </a:prstGeom>
           <a:ln w="12700">
             <a:solidFill>
-              <a:srgbClr val="266A71"/>
+              <a:srgbClr val="202020"/>
             </a:solidFill>
-            <a:tailEnd type="triangle" w="sm" len="sm"/>
           </a:ln>
         </p:spPr>
         <p:style>
@@ -6079,12 +4454,54 @@
           </a:fontRef>
         </p:style>
       </p:cxnSp>
-      <p:sp>
-        <p:nvSpPr>
-          <p:cNvPr id="54" name="text_052">
-            <a:extLst>
-              <a:ext uri="{FF2B5EF4-FFF2-40B4-BE49-F238E27FC236}">
-                <a16:creationId xmlns:a16="http://schemas.microsoft.com/office/drawing/2014/main" id="{37978F95-7C4E-F17E-42DA-BC1D434FCB8C}"/>
+      <p:cxnSp>
+        <p:nvCxnSpPr>
+          <p:cNvPr id="18" name="line_015">
+            <a:extLst>
+              <a:ext uri="{FF2B5EF4-FFF2-40B4-BE49-F238E27FC236}">
+                <a16:creationId xmlns:a16="http://schemas.microsoft.com/office/drawing/2014/main" id="{27C46BF6-9EC5-F2A9-2692-3BF7E00DDB21}"/>
+              </a:ext>
+            </a:extLst>
+          </p:cNvPr>
+          <p:cNvCxnSpPr/>
+          <p:nvPr/>
+        </p:nvCxnSpPr>
+        <p:spPr>
+          <a:xfrm>
+            <a:off x="2717800" y="4241800"/>
+            <a:ext cx="0" cy="254000"/>
+          </a:xfrm>
+          <a:prstGeom prst="line">
+            <a:avLst/>
+          </a:prstGeom>
+          <a:ln w="9525">
+            <a:solidFill>
+              <a:srgbClr val="202020"/>
+            </a:solidFill>
+            <a:tailEnd type="triangle" w="sm" len="sm"/>
+          </a:ln>
+        </p:spPr>
+        <p:style>
+          <a:lnRef idx="2">
+            <a:schemeClr val="accent1"/>
+          </a:lnRef>
+          <a:fillRef idx="0">
+            <a:schemeClr val="accent1"/>
+          </a:fillRef>
+          <a:effectRef idx="1">
+            <a:schemeClr val="accent1"/>
+          </a:effectRef>
+          <a:fontRef idx="minor">
+            <a:schemeClr val="tx1"/>
+          </a:fontRef>
+        </p:style>
+      </p:cxnSp>
+      <p:sp>
+        <p:nvSpPr>
+          <p:cNvPr id="19" name="text_016">
+            <a:extLst>
+              <a:ext uri="{FF2B5EF4-FFF2-40B4-BE49-F238E27FC236}">
+                <a16:creationId xmlns:a16="http://schemas.microsoft.com/office/drawing/2014/main" id="{13505D0F-6BBC-8469-E45D-73B08584ED75}"/>
               </a:ext>
             </a:extLst>
           </p:cNvPr>
@@ -6093,8 +4510,8 @@
         </p:nvSpPr>
         <p:spPr>
           <a:xfrm>
-            <a:off x="787400" y="8559799"/>
-            <a:ext cx="4559300" cy="508000"/>
+            <a:off x="546100" y="4495799"/>
+            <a:ext cx="3848100" cy="355600"/>
           </a:xfrm>
           <a:prstGeom prst="rect">
             <a:avLst/>
@@ -6107,16 +4524,17 @@
           </a:bodyPr>
           <a:lstStyle/>
           <a:p>
-            <a:r>
-              <a:rPr lang="en-US" altLang="zh-CN" sz="1400" i="1">
+            <a:pPr algn="ctr"/>
+            <a:r>
+              <a:rPr lang="en-US" altLang="zh-CN" b="1">
                 <a:solidFill>
                   <a:srgbClr val="181818"/>
                 </a:solidFill>
                 <a:latin typeface="Times New Roman" panose="02020603050405020304" pitchFamily="18" charset="0"/>
               </a:rPr>
-              <a:t>Prepared inputs enter the denoising process.</a:t>
-            </a:r>
-            <a:endParaRPr lang="zh-CN" altLang="en-US" sz="1400" i="1">
+              <a:t>Joint visual conditioning</a:t>
+            </a:r>
+            <a:endParaRPr lang="zh-CN" altLang="en-US" b="1">
               <a:solidFill>
                 <a:srgbClr val="181818"/>
               </a:solidFill>
@@ -6127,10 +4545,10 @@
       </p:sp>
       <p:sp>
         <p:nvSpPr>
-          <p:cNvPr id="55" name="rect_053">
-            <a:extLst>
-              <a:ext uri="{FF2B5EF4-FFF2-40B4-BE49-F238E27FC236}">
-                <a16:creationId xmlns:a16="http://schemas.microsoft.com/office/drawing/2014/main" id="{D45F5B7E-9F95-4941-287A-CA430068298E}"/>
+          <p:cNvPr id="20" name="rect_017">
+            <a:extLst>
+              <a:ext uri="{FF2B5EF4-FFF2-40B4-BE49-F238E27FC236}">
+                <a16:creationId xmlns:a16="http://schemas.microsoft.com/office/drawing/2014/main" id="{CBB41A33-369F-8893-E594-4922DD74950B}"/>
               </a:ext>
             </a:extLst>
           </p:cNvPr>
@@ -6139,14 +4557,14 @@
         </p:nvSpPr>
         <p:spPr>
           <a:xfrm>
-            <a:off x="7162800" y="1092200"/>
-            <a:ext cx="139700" cy="139700"/>
+            <a:off x="520700" y="5257800"/>
+            <a:ext cx="3975100" cy="1460500"/>
           </a:xfrm>
           <a:prstGeom prst="rect">
             <a:avLst/>
           </a:prstGeom>
           <a:solidFill>
-            <a:srgbClr val="DCE8E9"/>
+            <a:srgbClr val="FFF4D5"/>
           </a:solidFill>
           <a:ln w="19050" cap="flat" cmpd="sng" algn="ctr">
             <a:noFill/>
@@ -6195,1030 +4613,10 @@
       </p:sp>
       <p:sp>
         <p:nvSpPr>
-          <p:cNvPr id="56" name="rect_054">
-            <a:extLst>
-              <a:ext uri="{FF2B5EF4-FFF2-40B4-BE49-F238E27FC236}">
-                <a16:creationId xmlns:a16="http://schemas.microsoft.com/office/drawing/2014/main" id="{3E59AD0B-5A73-B453-A8DD-19583CEC519B}"/>
-              </a:ext>
-            </a:extLst>
-          </p:cNvPr>
-          <p:cNvSpPr/>
-          <p:nvPr/>
-        </p:nvSpPr>
-        <p:spPr>
-          <a:xfrm>
-            <a:off x="7315200" y="1092200"/>
-            <a:ext cx="139700" cy="139700"/>
-          </a:xfrm>
-          <a:prstGeom prst="rect">
-            <a:avLst/>
-          </a:prstGeom>
-          <a:solidFill>
-            <a:srgbClr val="95B8BB"/>
-          </a:solidFill>
-          <a:ln w="19050" cap="flat" cmpd="sng" algn="ctr">
-            <a:noFill/>
-            <a:prstDash val="solid"/>
-            <a:miter lim="800000"/>
-          </a:ln>
-          <a:effectLst/>
-          <a:extLst>
-            <a:ext uri="{91240B29-F687-4F45-9708-019B960494DF}">
-              <a14:hiddenLine xmlns:a14="http://schemas.microsoft.com/office/drawing/2010/main" w="19050" cap="flat" cmpd="sng" algn="ctr">
-                <a:solidFill>
-                  <a:schemeClr val="accent1">
-                    <a:shade val="15000"/>
-                  </a:schemeClr>
-                </a:solidFill>
-                <a:prstDash val="solid"/>
-                <a:miter lim="800000"/>
-              </a14:hiddenLine>
-            </a:ext>
-          </a:extLst>
-        </p:spPr>
-        <p:style>
-          <a:lnRef idx="2">
-            <a:schemeClr val="accent1">
-              <a:shade val="15000"/>
-            </a:schemeClr>
-          </a:lnRef>
-          <a:fillRef idx="1">
-            <a:schemeClr val="accent1"/>
-          </a:fillRef>
-          <a:effectRef idx="0">
-            <a:schemeClr val="accent1"/>
-          </a:effectRef>
-          <a:fontRef idx="minor">
-            <a:schemeClr val="lt1"/>
-          </a:fontRef>
-        </p:style>
-        <p:txBody>
-          <a:bodyPr rtlCol="0" anchor="ctr"/>
-          <a:lstStyle/>
-          <a:p>
-            <a:pPr algn="ctr"/>
-            <a:endParaRPr lang="zh-CN" altLang="en-US"/>
-          </a:p>
-        </p:txBody>
-      </p:sp>
-      <p:sp>
-        <p:nvSpPr>
-          <p:cNvPr id="57" name="rect_055">
-            <a:extLst>
-              <a:ext uri="{FF2B5EF4-FFF2-40B4-BE49-F238E27FC236}">
-                <a16:creationId xmlns:a16="http://schemas.microsoft.com/office/drawing/2014/main" id="{80B30630-39D8-A8C1-7746-F2D82D506267}"/>
-              </a:ext>
-            </a:extLst>
-          </p:cNvPr>
-          <p:cNvSpPr/>
-          <p:nvPr/>
-        </p:nvSpPr>
-        <p:spPr>
-          <a:xfrm>
-            <a:off x="7467600" y="1092200"/>
-            <a:ext cx="139700" cy="139700"/>
-          </a:xfrm>
-          <a:prstGeom prst="rect">
-            <a:avLst/>
-          </a:prstGeom>
-          <a:solidFill>
-            <a:srgbClr val="BFD4D6"/>
-          </a:solidFill>
-          <a:ln w="19050" cap="flat" cmpd="sng" algn="ctr">
-            <a:noFill/>
-            <a:prstDash val="solid"/>
-            <a:miter lim="800000"/>
-          </a:ln>
-          <a:effectLst/>
-          <a:extLst>
-            <a:ext uri="{91240B29-F687-4F45-9708-019B960494DF}">
-              <a14:hiddenLine xmlns:a14="http://schemas.microsoft.com/office/drawing/2010/main" w="19050" cap="flat" cmpd="sng" algn="ctr">
-                <a:solidFill>
-                  <a:schemeClr val="accent1">
-                    <a:shade val="15000"/>
-                  </a:schemeClr>
-                </a:solidFill>
-                <a:prstDash val="solid"/>
-                <a:miter lim="800000"/>
-              </a14:hiddenLine>
-            </a:ext>
-          </a:extLst>
-        </p:spPr>
-        <p:style>
-          <a:lnRef idx="2">
-            <a:schemeClr val="accent1">
-              <a:shade val="15000"/>
-            </a:schemeClr>
-          </a:lnRef>
-          <a:fillRef idx="1">
-            <a:schemeClr val="accent1"/>
-          </a:fillRef>
-          <a:effectRef idx="0">
-            <a:schemeClr val="accent1"/>
-          </a:effectRef>
-          <a:fontRef idx="minor">
-            <a:schemeClr val="lt1"/>
-          </a:fontRef>
-        </p:style>
-        <p:txBody>
-          <a:bodyPr rtlCol="0" anchor="ctr"/>
-          <a:lstStyle/>
-          <a:p>
-            <a:pPr algn="ctr"/>
-            <a:endParaRPr lang="zh-CN" altLang="en-US"/>
-          </a:p>
-        </p:txBody>
-      </p:sp>
-      <p:sp>
-        <p:nvSpPr>
-          <p:cNvPr id="58" name="rect_056">
-            <a:extLst>
-              <a:ext uri="{FF2B5EF4-FFF2-40B4-BE49-F238E27FC236}">
-                <a16:creationId xmlns:a16="http://schemas.microsoft.com/office/drawing/2014/main" id="{27EA3EDC-DAC0-5ED2-FE02-8CCFA82D6D11}"/>
-              </a:ext>
-            </a:extLst>
-          </p:cNvPr>
-          <p:cNvSpPr/>
-          <p:nvPr/>
-        </p:nvSpPr>
-        <p:spPr>
-          <a:xfrm>
-            <a:off x="7620000" y="1092200"/>
-            <a:ext cx="139700" cy="139700"/>
-          </a:xfrm>
-          <a:prstGeom prst="rect">
-            <a:avLst/>
-          </a:prstGeom>
-          <a:solidFill>
-            <a:srgbClr val="EDF3F3"/>
-          </a:solidFill>
-          <a:ln w="19050" cap="flat" cmpd="sng" algn="ctr">
-            <a:noFill/>
-            <a:prstDash val="solid"/>
-            <a:miter lim="800000"/>
-          </a:ln>
-          <a:effectLst/>
-          <a:extLst>
-            <a:ext uri="{91240B29-F687-4F45-9708-019B960494DF}">
-              <a14:hiddenLine xmlns:a14="http://schemas.microsoft.com/office/drawing/2010/main" w="19050" cap="flat" cmpd="sng" algn="ctr">
-                <a:solidFill>
-                  <a:schemeClr val="accent1">
-                    <a:shade val="15000"/>
-                  </a:schemeClr>
-                </a:solidFill>
-                <a:prstDash val="solid"/>
-                <a:miter lim="800000"/>
-              </a14:hiddenLine>
-            </a:ext>
-          </a:extLst>
-        </p:spPr>
-        <p:style>
-          <a:lnRef idx="2">
-            <a:schemeClr val="accent1">
-              <a:shade val="15000"/>
-            </a:schemeClr>
-          </a:lnRef>
-          <a:fillRef idx="1">
-            <a:schemeClr val="accent1"/>
-          </a:fillRef>
-          <a:effectRef idx="0">
-            <a:schemeClr val="accent1"/>
-          </a:effectRef>
-          <a:fontRef idx="minor">
-            <a:schemeClr val="lt1"/>
-          </a:fontRef>
-        </p:style>
-        <p:txBody>
-          <a:bodyPr rtlCol="0" anchor="ctr"/>
-          <a:lstStyle/>
-          <a:p>
-            <a:pPr algn="ctr"/>
-            <a:endParaRPr lang="zh-CN" altLang="en-US"/>
-          </a:p>
-        </p:txBody>
-      </p:sp>
-      <p:sp>
-        <p:nvSpPr>
-          <p:cNvPr id="59" name="rect_057">
-            <a:extLst>
-              <a:ext uri="{FF2B5EF4-FFF2-40B4-BE49-F238E27FC236}">
-                <a16:creationId xmlns:a16="http://schemas.microsoft.com/office/drawing/2014/main" id="{1360C719-7432-9006-1C59-217A898BFC82}"/>
-              </a:ext>
-            </a:extLst>
-          </p:cNvPr>
-          <p:cNvSpPr/>
-          <p:nvPr/>
-        </p:nvSpPr>
-        <p:spPr>
-          <a:xfrm>
-            <a:off x="7162800" y="1244600"/>
-            <a:ext cx="139700" cy="139700"/>
-          </a:xfrm>
-          <a:prstGeom prst="rect">
-            <a:avLst/>
-          </a:prstGeom>
-          <a:solidFill>
-            <a:srgbClr val="EDF3F3"/>
-          </a:solidFill>
-          <a:ln w="19050" cap="flat" cmpd="sng" algn="ctr">
-            <a:noFill/>
-            <a:prstDash val="solid"/>
-            <a:miter lim="800000"/>
-          </a:ln>
-          <a:effectLst/>
-          <a:extLst>
-            <a:ext uri="{91240B29-F687-4F45-9708-019B960494DF}">
-              <a14:hiddenLine xmlns:a14="http://schemas.microsoft.com/office/drawing/2010/main" w="19050" cap="flat" cmpd="sng" algn="ctr">
-                <a:solidFill>
-                  <a:schemeClr val="accent1">
-                    <a:shade val="15000"/>
-                  </a:schemeClr>
-                </a:solidFill>
-                <a:prstDash val="solid"/>
-                <a:miter lim="800000"/>
-              </a14:hiddenLine>
-            </a:ext>
-          </a:extLst>
-        </p:spPr>
-        <p:style>
-          <a:lnRef idx="2">
-            <a:schemeClr val="accent1">
-              <a:shade val="15000"/>
-            </a:schemeClr>
-          </a:lnRef>
-          <a:fillRef idx="1">
-            <a:schemeClr val="accent1"/>
-          </a:fillRef>
-          <a:effectRef idx="0">
-            <a:schemeClr val="accent1"/>
-          </a:effectRef>
-          <a:fontRef idx="minor">
-            <a:schemeClr val="lt1"/>
-          </a:fontRef>
-        </p:style>
-        <p:txBody>
-          <a:bodyPr rtlCol="0" anchor="ctr"/>
-          <a:lstStyle/>
-          <a:p>
-            <a:pPr algn="ctr"/>
-            <a:endParaRPr lang="zh-CN" altLang="en-US"/>
-          </a:p>
-        </p:txBody>
-      </p:sp>
-      <p:sp>
-        <p:nvSpPr>
-          <p:cNvPr id="60" name="rect_058">
-            <a:extLst>
-              <a:ext uri="{FF2B5EF4-FFF2-40B4-BE49-F238E27FC236}">
-                <a16:creationId xmlns:a16="http://schemas.microsoft.com/office/drawing/2014/main" id="{99489FF0-57A7-B1EF-8C98-A8EBC838AF05}"/>
-              </a:ext>
-            </a:extLst>
-          </p:cNvPr>
-          <p:cNvSpPr/>
-          <p:nvPr/>
-        </p:nvSpPr>
-        <p:spPr>
-          <a:xfrm>
-            <a:off x="7315200" y="1244600"/>
-            <a:ext cx="139700" cy="139700"/>
-          </a:xfrm>
-          <a:prstGeom prst="rect">
-            <a:avLst/>
-          </a:prstGeom>
-          <a:solidFill>
-            <a:srgbClr val="DCE8E9"/>
-          </a:solidFill>
-          <a:ln w="19050" cap="flat" cmpd="sng" algn="ctr">
-            <a:noFill/>
-            <a:prstDash val="solid"/>
-            <a:miter lim="800000"/>
-          </a:ln>
-          <a:effectLst/>
-          <a:extLst>
-            <a:ext uri="{91240B29-F687-4F45-9708-019B960494DF}">
-              <a14:hiddenLine xmlns:a14="http://schemas.microsoft.com/office/drawing/2010/main" w="19050" cap="flat" cmpd="sng" algn="ctr">
-                <a:solidFill>
-                  <a:schemeClr val="accent1">
-                    <a:shade val="15000"/>
-                  </a:schemeClr>
-                </a:solidFill>
-                <a:prstDash val="solid"/>
-                <a:miter lim="800000"/>
-              </a14:hiddenLine>
-            </a:ext>
-          </a:extLst>
-        </p:spPr>
-        <p:style>
-          <a:lnRef idx="2">
-            <a:schemeClr val="accent1">
-              <a:shade val="15000"/>
-            </a:schemeClr>
-          </a:lnRef>
-          <a:fillRef idx="1">
-            <a:schemeClr val="accent1"/>
-          </a:fillRef>
-          <a:effectRef idx="0">
-            <a:schemeClr val="accent1"/>
-          </a:effectRef>
-          <a:fontRef idx="minor">
-            <a:schemeClr val="lt1"/>
-          </a:fontRef>
-        </p:style>
-        <p:txBody>
-          <a:bodyPr rtlCol="0" anchor="ctr"/>
-          <a:lstStyle/>
-          <a:p>
-            <a:pPr algn="ctr"/>
-            <a:endParaRPr lang="zh-CN" altLang="en-US"/>
-          </a:p>
-        </p:txBody>
-      </p:sp>
-      <p:sp>
-        <p:nvSpPr>
-          <p:cNvPr id="61" name="rect_059">
-            <a:extLst>
-              <a:ext uri="{FF2B5EF4-FFF2-40B4-BE49-F238E27FC236}">
-                <a16:creationId xmlns:a16="http://schemas.microsoft.com/office/drawing/2014/main" id="{AE5E7D40-72F4-115E-9ECB-AEC03B6B7BA9}"/>
-              </a:ext>
-            </a:extLst>
-          </p:cNvPr>
-          <p:cNvSpPr/>
-          <p:nvPr/>
-        </p:nvSpPr>
-        <p:spPr>
-          <a:xfrm>
-            <a:off x="7467600" y="1244600"/>
-            <a:ext cx="139700" cy="139700"/>
-          </a:xfrm>
-          <a:prstGeom prst="rect">
-            <a:avLst/>
-          </a:prstGeom>
-          <a:solidFill>
-            <a:srgbClr val="95B8BB"/>
-          </a:solidFill>
-          <a:ln w="19050" cap="flat" cmpd="sng" algn="ctr">
-            <a:noFill/>
-            <a:prstDash val="solid"/>
-            <a:miter lim="800000"/>
-          </a:ln>
-          <a:effectLst/>
-          <a:extLst>
-            <a:ext uri="{91240B29-F687-4F45-9708-019B960494DF}">
-              <a14:hiddenLine xmlns:a14="http://schemas.microsoft.com/office/drawing/2010/main" w="19050" cap="flat" cmpd="sng" algn="ctr">
-                <a:solidFill>
-                  <a:schemeClr val="accent1">
-                    <a:shade val="15000"/>
-                  </a:schemeClr>
-                </a:solidFill>
-                <a:prstDash val="solid"/>
-                <a:miter lim="800000"/>
-              </a14:hiddenLine>
-            </a:ext>
-          </a:extLst>
-        </p:spPr>
-        <p:style>
-          <a:lnRef idx="2">
-            <a:schemeClr val="accent1">
-              <a:shade val="15000"/>
-            </a:schemeClr>
-          </a:lnRef>
-          <a:fillRef idx="1">
-            <a:schemeClr val="accent1"/>
-          </a:fillRef>
-          <a:effectRef idx="0">
-            <a:schemeClr val="accent1"/>
-          </a:effectRef>
-          <a:fontRef idx="minor">
-            <a:schemeClr val="lt1"/>
-          </a:fontRef>
-        </p:style>
-        <p:txBody>
-          <a:bodyPr rtlCol="0" anchor="ctr"/>
-          <a:lstStyle/>
-          <a:p>
-            <a:pPr algn="ctr"/>
-            <a:endParaRPr lang="zh-CN" altLang="en-US"/>
-          </a:p>
-        </p:txBody>
-      </p:sp>
-      <p:sp>
-        <p:nvSpPr>
-          <p:cNvPr id="62" name="rect_060">
-            <a:extLst>
-              <a:ext uri="{FF2B5EF4-FFF2-40B4-BE49-F238E27FC236}">
-                <a16:creationId xmlns:a16="http://schemas.microsoft.com/office/drawing/2014/main" id="{6EB7F8DA-6D1E-7786-AA86-39BFD52FC210}"/>
-              </a:ext>
-            </a:extLst>
-          </p:cNvPr>
-          <p:cNvSpPr/>
-          <p:nvPr/>
-        </p:nvSpPr>
-        <p:spPr>
-          <a:xfrm>
-            <a:off x="7620000" y="1244600"/>
-            <a:ext cx="139700" cy="139700"/>
-          </a:xfrm>
-          <a:prstGeom prst="rect">
-            <a:avLst/>
-          </a:prstGeom>
-          <a:solidFill>
-            <a:srgbClr val="BFD4D6"/>
-          </a:solidFill>
-          <a:ln w="19050" cap="flat" cmpd="sng" algn="ctr">
-            <a:noFill/>
-            <a:prstDash val="solid"/>
-            <a:miter lim="800000"/>
-          </a:ln>
-          <a:effectLst/>
-          <a:extLst>
-            <a:ext uri="{91240B29-F687-4F45-9708-019B960494DF}">
-              <a14:hiddenLine xmlns:a14="http://schemas.microsoft.com/office/drawing/2010/main" w="19050" cap="flat" cmpd="sng" algn="ctr">
-                <a:solidFill>
-                  <a:schemeClr val="accent1">
-                    <a:shade val="15000"/>
-                  </a:schemeClr>
-                </a:solidFill>
-                <a:prstDash val="solid"/>
-                <a:miter lim="800000"/>
-              </a14:hiddenLine>
-            </a:ext>
-          </a:extLst>
-        </p:spPr>
-        <p:style>
-          <a:lnRef idx="2">
-            <a:schemeClr val="accent1">
-              <a:shade val="15000"/>
-            </a:schemeClr>
-          </a:lnRef>
-          <a:fillRef idx="1">
-            <a:schemeClr val="accent1"/>
-          </a:fillRef>
-          <a:effectRef idx="0">
-            <a:schemeClr val="accent1"/>
-          </a:effectRef>
-          <a:fontRef idx="minor">
-            <a:schemeClr val="lt1"/>
-          </a:fontRef>
-        </p:style>
-        <p:txBody>
-          <a:bodyPr rtlCol="0" anchor="ctr"/>
-          <a:lstStyle/>
-          <a:p>
-            <a:pPr algn="ctr"/>
-            <a:endParaRPr lang="zh-CN" altLang="en-US"/>
-          </a:p>
-        </p:txBody>
-      </p:sp>
-      <p:sp>
-        <p:nvSpPr>
-          <p:cNvPr id="63" name="rect_061">
-            <a:extLst>
-              <a:ext uri="{FF2B5EF4-FFF2-40B4-BE49-F238E27FC236}">
-                <a16:creationId xmlns:a16="http://schemas.microsoft.com/office/drawing/2014/main" id="{3C4E02B9-5448-C8F6-9982-DDDF764F562F}"/>
-              </a:ext>
-            </a:extLst>
-          </p:cNvPr>
-          <p:cNvSpPr/>
-          <p:nvPr/>
-        </p:nvSpPr>
-        <p:spPr>
-          <a:xfrm>
-            <a:off x="7162800" y="1397000"/>
-            <a:ext cx="139700" cy="139700"/>
-          </a:xfrm>
-          <a:prstGeom prst="rect">
-            <a:avLst/>
-          </a:prstGeom>
-          <a:solidFill>
-            <a:srgbClr val="BFD4D6"/>
-          </a:solidFill>
-          <a:ln w="19050" cap="flat" cmpd="sng" algn="ctr">
-            <a:noFill/>
-            <a:prstDash val="solid"/>
-            <a:miter lim="800000"/>
-          </a:ln>
-          <a:effectLst/>
-          <a:extLst>
-            <a:ext uri="{91240B29-F687-4F45-9708-019B960494DF}">
-              <a14:hiddenLine xmlns:a14="http://schemas.microsoft.com/office/drawing/2010/main" w="19050" cap="flat" cmpd="sng" algn="ctr">
-                <a:solidFill>
-                  <a:schemeClr val="accent1">
-                    <a:shade val="15000"/>
-                  </a:schemeClr>
-                </a:solidFill>
-                <a:prstDash val="solid"/>
-                <a:miter lim="800000"/>
-              </a14:hiddenLine>
-            </a:ext>
-          </a:extLst>
-        </p:spPr>
-        <p:style>
-          <a:lnRef idx="2">
-            <a:schemeClr val="accent1">
-              <a:shade val="15000"/>
-            </a:schemeClr>
-          </a:lnRef>
-          <a:fillRef idx="1">
-            <a:schemeClr val="accent1"/>
-          </a:fillRef>
-          <a:effectRef idx="0">
-            <a:schemeClr val="accent1"/>
-          </a:effectRef>
-          <a:fontRef idx="minor">
-            <a:schemeClr val="lt1"/>
-          </a:fontRef>
-        </p:style>
-        <p:txBody>
-          <a:bodyPr rtlCol="0" anchor="ctr"/>
-          <a:lstStyle/>
-          <a:p>
-            <a:pPr algn="ctr"/>
-            <a:endParaRPr lang="zh-CN" altLang="en-US"/>
-          </a:p>
-        </p:txBody>
-      </p:sp>
-      <p:sp>
-        <p:nvSpPr>
-          <p:cNvPr id="64" name="rect_062">
-            <a:extLst>
-              <a:ext uri="{FF2B5EF4-FFF2-40B4-BE49-F238E27FC236}">
-                <a16:creationId xmlns:a16="http://schemas.microsoft.com/office/drawing/2014/main" id="{38E0CB37-AD0B-5966-6732-E7D781FC2A22}"/>
-              </a:ext>
-            </a:extLst>
-          </p:cNvPr>
-          <p:cNvSpPr/>
-          <p:nvPr/>
-        </p:nvSpPr>
-        <p:spPr>
-          <a:xfrm>
-            <a:off x="7315200" y="1397000"/>
-            <a:ext cx="139700" cy="139700"/>
-          </a:xfrm>
-          <a:prstGeom prst="rect">
-            <a:avLst/>
-          </a:prstGeom>
-          <a:solidFill>
-            <a:srgbClr val="EDF3F3"/>
-          </a:solidFill>
-          <a:ln w="19050" cap="flat" cmpd="sng" algn="ctr">
-            <a:noFill/>
-            <a:prstDash val="solid"/>
-            <a:miter lim="800000"/>
-          </a:ln>
-          <a:effectLst/>
-          <a:extLst>
-            <a:ext uri="{91240B29-F687-4F45-9708-019B960494DF}">
-              <a14:hiddenLine xmlns:a14="http://schemas.microsoft.com/office/drawing/2010/main" w="19050" cap="flat" cmpd="sng" algn="ctr">
-                <a:solidFill>
-                  <a:schemeClr val="accent1">
-                    <a:shade val="15000"/>
-                  </a:schemeClr>
-                </a:solidFill>
-                <a:prstDash val="solid"/>
-                <a:miter lim="800000"/>
-              </a14:hiddenLine>
-            </a:ext>
-          </a:extLst>
-        </p:spPr>
-        <p:style>
-          <a:lnRef idx="2">
-            <a:schemeClr val="accent1">
-              <a:shade val="15000"/>
-            </a:schemeClr>
-          </a:lnRef>
-          <a:fillRef idx="1">
-            <a:schemeClr val="accent1"/>
-          </a:fillRef>
-          <a:effectRef idx="0">
-            <a:schemeClr val="accent1"/>
-          </a:effectRef>
-          <a:fontRef idx="minor">
-            <a:schemeClr val="lt1"/>
-          </a:fontRef>
-        </p:style>
-        <p:txBody>
-          <a:bodyPr rtlCol="0" anchor="ctr"/>
-          <a:lstStyle/>
-          <a:p>
-            <a:pPr algn="ctr"/>
-            <a:endParaRPr lang="zh-CN" altLang="en-US"/>
-          </a:p>
-        </p:txBody>
-      </p:sp>
-      <p:sp>
-        <p:nvSpPr>
-          <p:cNvPr id="65" name="rect_063">
-            <a:extLst>
-              <a:ext uri="{FF2B5EF4-FFF2-40B4-BE49-F238E27FC236}">
-                <a16:creationId xmlns:a16="http://schemas.microsoft.com/office/drawing/2014/main" id="{AB9840F0-A379-FB49-9EEF-53D0693F65E4}"/>
-              </a:ext>
-            </a:extLst>
-          </p:cNvPr>
-          <p:cNvSpPr/>
-          <p:nvPr/>
-        </p:nvSpPr>
-        <p:spPr>
-          <a:xfrm>
-            <a:off x="7467600" y="1397000"/>
-            <a:ext cx="139700" cy="139700"/>
-          </a:xfrm>
-          <a:prstGeom prst="rect">
-            <a:avLst/>
-          </a:prstGeom>
-          <a:solidFill>
-            <a:srgbClr val="DCE8E9"/>
-          </a:solidFill>
-          <a:ln w="19050" cap="flat" cmpd="sng" algn="ctr">
-            <a:noFill/>
-            <a:prstDash val="solid"/>
-            <a:miter lim="800000"/>
-          </a:ln>
-          <a:effectLst/>
-          <a:extLst>
-            <a:ext uri="{91240B29-F687-4F45-9708-019B960494DF}">
-              <a14:hiddenLine xmlns:a14="http://schemas.microsoft.com/office/drawing/2010/main" w="19050" cap="flat" cmpd="sng" algn="ctr">
-                <a:solidFill>
-                  <a:schemeClr val="accent1">
-                    <a:shade val="15000"/>
-                  </a:schemeClr>
-                </a:solidFill>
-                <a:prstDash val="solid"/>
-                <a:miter lim="800000"/>
-              </a14:hiddenLine>
-            </a:ext>
-          </a:extLst>
-        </p:spPr>
-        <p:style>
-          <a:lnRef idx="2">
-            <a:schemeClr val="accent1">
-              <a:shade val="15000"/>
-            </a:schemeClr>
-          </a:lnRef>
-          <a:fillRef idx="1">
-            <a:schemeClr val="accent1"/>
-          </a:fillRef>
-          <a:effectRef idx="0">
-            <a:schemeClr val="accent1"/>
-          </a:effectRef>
-          <a:fontRef idx="minor">
-            <a:schemeClr val="lt1"/>
-          </a:fontRef>
-        </p:style>
-        <p:txBody>
-          <a:bodyPr rtlCol="0" anchor="ctr"/>
-          <a:lstStyle/>
-          <a:p>
-            <a:pPr algn="ctr"/>
-            <a:endParaRPr lang="zh-CN" altLang="en-US"/>
-          </a:p>
-        </p:txBody>
-      </p:sp>
-      <p:sp>
-        <p:nvSpPr>
-          <p:cNvPr id="66" name="rect_064">
-            <a:extLst>
-              <a:ext uri="{FF2B5EF4-FFF2-40B4-BE49-F238E27FC236}">
-                <a16:creationId xmlns:a16="http://schemas.microsoft.com/office/drawing/2014/main" id="{8A7B0769-71D0-1898-A9CD-A146573A9266}"/>
-              </a:ext>
-            </a:extLst>
-          </p:cNvPr>
-          <p:cNvSpPr/>
-          <p:nvPr/>
-        </p:nvSpPr>
-        <p:spPr>
-          <a:xfrm>
-            <a:off x="7620000" y="1397000"/>
-            <a:ext cx="139700" cy="139700"/>
-          </a:xfrm>
-          <a:prstGeom prst="rect">
-            <a:avLst/>
-          </a:prstGeom>
-          <a:solidFill>
-            <a:srgbClr val="95B8BB"/>
-          </a:solidFill>
-          <a:ln w="19050" cap="flat" cmpd="sng" algn="ctr">
-            <a:noFill/>
-            <a:prstDash val="solid"/>
-            <a:miter lim="800000"/>
-          </a:ln>
-          <a:effectLst/>
-          <a:extLst>
-            <a:ext uri="{91240B29-F687-4F45-9708-019B960494DF}">
-              <a14:hiddenLine xmlns:a14="http://schemas.microsoft.com/office/drawing/2010/main" w="19050" cap="flat" cmpd="sng" algn="ctr">
-                <a:solidFill>
-                  <a:schemeClr val="accent1">
-                    <a:shade val="15000"/>
-                  </a:schemeClr>
-                </a:solidFill>
-                <a:prstDash val="solid"/>
-                <a:miter lim="800000"/>
-              </a14:hiddenLine>
-            </a:ext>
-          </a:extLst>
-        </p:spPr>
-        <p:style>
-          <a:lnRef idx="2">
-            <a:schemeClr val="accent1">
-              <a:shade val="15000"/>
-            </a:schemeClr>
-          </a:lnRef>
-          <a:fillRef idx="1">
-            <a:schemeClr val="accent1"/>
-          </a:fillRef>
-          <a:effectRef idx="0">
-            <a:schemeClr val="accent1"/>
-          </a:effectRef>
-          <a:fontRef idx="minor">
-            <a:schemeClr val="lt1"/>
-          </a:fontRef>
-        </p:style>
-        <p:txBody>
-          <a:bodyPr rtlCol="0" anchor="ctr"/>
-          <a:lstStyle/>
-          <a:p>
-            <a:pPr algn="ctr"/>
-            <a:endParaRPr lang="zh-CN" altLang="en-US"/>
-          </a:p>
-        </p:txBody>
-      </p:sp>
-      <p:sp>
-        <p:nvSpPr>
-          <p:cNvPr id="67" name="rect_065">
-            <a:extLst>
-              <a:ext uri="{FF2B5EF4-FFF2-40B4-BE49-F238E27FC236}">
-                <a16:creationId xmlns:a16="http://schemas.microsoft.com/office/drawing/2014/main" id="{9E0D4F4F-0040-FFF3-65C0-5C575DDE435E}"/>
-              </a:ext>
-            </a:extLst>
-          </p:cNvPr>
-          <p:cNvSpPr/>
-          <p:nvPr/>
-        </p:nvSpPr>
-        <p:spPr>
-          <a:xfrm>
-            <a:off x="7162800" y="1549400"/>
-            <a:ext cx="139700" cy="139700"/>
-          </a:xfrm>
-          <a:prstGeom prst="rect">
-            <a:avLst/>
-          </a:prstGeom>
-          <a:solidFill>
-            <a:srgbClr val="95B8BB"/>
-          </a:solidFill>
-          <a:ln w="19050" cap="flat" cmpd="sng" algn="ctr">
-            <a:noFill/>
-            <a:prstDash val="solid"/>
-            <a:miter lim="800000"/>
-          </a:ln>
-          <a:effectLst/>
-          <a:extLst>
-            <a:ext uri="{91240B29-F687-4F45-9708-019B960494DF}">
-              <a14:hiddenLine xmlns:a14="http://schemas.microsoft.com/office/drawing/2010/main" w="19050" cap="flat" cmpd="sng" algn="ctr">
-                <a:solidFill>
-                  <a:schemeClr val="accent1">
-                    <a:shade val="15000"/>
-                  </a:schemeClr>
-                </a:solidFill>
-                <a:prstDash val="solid"/>
-                <a:miter lim="800000"/>
-              </a14:hiddenLine>
-            </a:ext>
-          </a:extLst>
-        </p:spPr>
-        <p:style>
-          <a:lnRef idx="2">
-            <a:schemeClr val="accent1">
-              <a:shade val="15000"/>
-            </a:schemeClr>
-          </a:lnRef>
-          <a:fillRef idx="1">
-            <a:schemeClr val="accent1"/>
-          </a:fillRef>
-          <a:effectRef idx="0">
-            <a:schemeClr val="accent1"/>
-          </a:effectRef>
-          <a:fontRef idx="minor">
-            <a:schemeClr val="lt1"/>
-          </a:fontRef>
-        </p:style>
-        <p:txBody>
-          <a:bodyPr rtlCol="0" anchor="ctr"/>
-          <a:lstStyle/>
-          <a:p>
-            <a:pPr algn="ctr"/>
-            <a:endParaRPr lang="zh-CN" altLang="en-US"/>
-          </a:p>
-        </p:txBody>
-      </p:sp>
-      <p:sp>
-        <p:nvSpPr>
-          <p:cNvPr id="68" name="rect_066">
-            <a:extLst>
-              <a:ext uri="{FF2B5EF4-FFF2-40B4-BE49-F238E27FC236}">
-                <a16:creationId xmlns:a16="http://schemas.microsoft.com/office/drawing/2014/main" id="{E1D64D63-89A7-8A04-0346-D9AF87423B5A}"/>
-              </a:ext>
-            </a:extLst>
-          </p:cNvPr>
-          <p:cNvSpPr/>
-          <p:nvPr/>
-        </p:nvSpPr>
-        <p:spPr>
-          <a:xfrm>
-            <a:off x="7315200" y="1549400"/>
-            <a:ext cx="139700" cy="139700"/>
-          </a:xfrm>
-          <a:prstGeom prst="rect">
-            <a:avLst/>
-          </a:prstGeom>
-          <a:solidFill>
-            <a:srgbClr val="BFD4D6"/>
-          </a:solidFill>
-          <a:ln w="19050" cap="flat" cmpd="sng" algn="ctr">
-            <a:noFill/>
-            <a:prstDash val="solid"/>
-            <a:miter lim="800000"/>
-          </a:ln>
-          <a:effectLst/>
-          <a:extLst>
-            <a:ext uri="{91240B29-F687-4F45-9708-019B960494DF}">
-              <a14:hiddenLine xmlns:a14="http://schemas.microsoft.com/office/drawing/2010/main" w="19050" cap="flat" cmpd="sng" algn="ctr">
-                <a:solidFill>
-                  <a:schemeClr val="accent1">
-                    <a:shade val="15000"/>
-                  </a:schemeClr>
-                </a:solidFill>
-                <a:prstDash val="solid"/>
-                <a:miter lim="800000"/>
-              </a14:hiddenLine>
-            </a:ext>
-          </a:extLst>
-        </p:spPr>
-        <p:style>
-          <a:lnRef idx="2">
-            <a:schemeClr val="accent1">
-              <a:shade val="15000"/>
-            </a:schemeClr>
-          </a:lnRef>
-          <a:fillRef idx="1">
-            <a:schemeClr val="accent1"/>
-          </a:fillRef>
-          <a:effectRef idx="0">
-            <a:schemeClr val="accent1"/>
-          </a:effectRef>
-          <a:fontRef idx="minor">
-            <a:schemeClr val="lt1"/>
-          </a:fontRef>
-        </p:style>
-        <p:txBody>
-          <a:bodyPr rtlCol="0" anchor="ctr"/>
-          <a:lstStyle/>
-          <a:p>
-            <a:pPr algn="ctr"/>
-            <a:endParaRPr lang="zh-CN" altLang="en-US"/>
-          </a:p>
-        </p:txBody>
-      </p:sp>
-      <p:sp>
-        <p:nvSpPr>
-          <p:cNvPr id="69" name="rect_067">
-            <a:extLst>
-              <a:ext uri="{FF2B5EF4-FFF2-40B4-BE49-F238E27FC236}">
-                <a16:creationId xmlns:a16="http://schemas.microsoft.com/office/drawing/2014/main" id="{3E7C0E41-7D53-F2FC-1E4E-8FB0D241DD43}"/>
-              </a:ext>
-            </a:extLst>
-          </p:cNvPr>
-          <p:cNvSpPr/>
-          <p:nvPr/>
-        </p:nvSpPr>
-        <p:spPr>
-          <a:xfrm>
-            <a:off x="7467600" y="1549400"/>
-            <a:ext cx="139700" cy="139700"/>
-          </a:xfrm>
-          <a:prstGeom prst="rect">
-            <a:avLst/>
-          </a:prstGeom>
-          <a:solidFill>
-            <a:srgbClr val="EDF3F3"/>
-          </a:solidFill>
-          <a:ln w="19050" cap="flat" cmpd="sng" algn="ctr">
-            <a:noFill/>
-            <a:prstDash val="solid"/>
-            <a:miter lim="800000"/>
-          </a:ln>
-          <a:effectLst/>
-          <a:extLst>
-            <a:ext uri="{91240B29-F687-4F45-9708-019B960494DF}">
-              <a14:hiddenLine xmlns:a14="http://schemas.microsoft.com/office/drawing/2010/main" w="19050" cap="flat" cmpd="sng" algn="ctr">
-                <a:solidFill>
-                  <a:schemeClr val="accent1">
-                    <a:shade val="15000"/>
-                  </a:schemeClr>
-                </a:solidFill>
-                <a:prstDash val="solid"/>
-                <a:miter lim="800000"/>
-              </a14:hiddenLine>
-            </a:ext>
-          </a:extLst>
-        </p:spPr>
-        <p:style>
-          <a:lnRef idx="2">
-            <a:schemeClr val="accent1">
-              <a:shade val="15000"/>
-            </a:schemeClr>
-          </a:lnRef>
-          <a:fillRef idx="1">
-            <a:schemeClr val="accent1"/>
-          </a:fillRef>
-          <a:effectRef idx="0">
-            <a:schemeClr val="accent1"/>
-          </a:effectRef>
-          <a:fontRef idx="minor">
-            <a:schemeClr val="lt1"/>
-          </a:fontRef>
-        </p:style>
-        <p:txBody>
-          <a:bodyPr rtlCol="0" anchor="ctr"/>
-          <a:lstStyle/>
-          <a:p>
-            <a:pPr algn="ctr"/>
-            <a:endParaRPr lang="zh-CN" altLang="en-US"/>
-          </a:p>
-        </p:txBody>
-      </p:sp>
-      <p:sp>
-        <p:nvSpPr>
-          <p:cNvPr id="70" name="rect_068">
-            <a:extLst>
-              <a:ext uri="{FF2B5EF4-FFF2-40B4-BE49-F238E27FC236}">
-                <a16:creationId xmlns:a16="http://schemas.microsoft.com/office/drawing/2014/main" id="{1FDA78BA-DAD5-1F5F-E58B-BE1C4670C152}"/>
-              </a:ext>
-            </a:extLst>
-          </p:cNvPr>
-          <p:cNvSpPr/>
-          <p:nvPr/>
-        </p:nvSpPr>
-        <p:spPr>
-          <a:xfrm>
-            <a:off x="7620000" y="1549400"/>
-            <a:ext cx="139700" cy="139700"/>
-          </a:xfrm>
-          <a:prstGeom prst="rect">
-            <a:avLst/>
-          </a:prstGeom>
-          <a:solidFill>
-            <a:srgbClr val="DCE8E9"/>
-          </a:solidFill>
-          <a:ln w="19050" cap="flat" cmpd="sng" algn="ctr">
-            <a:noFill/>
-            <a:prstDash val="solid"/>
-            <a:miter lim="800000"/>
-          </a:ln>
-          <a:effectLst/>
-          <a:extLst>
-            <a:ext uri="{91240B29-F687-4F45-9708-019B960494DF}">
-              <a14:hiddenLine xmlns:a14="http://schemas.microsoft.com/office/drawing/2010/main" w="19050" cap="flat" cmpd="sng" algn="ctr">
-                <a:solidFill>
-                  <a:schemeClr val="accent1">
-                    <a:shade val="15000"/>
-                  </a:schemeClr>
-                </a:solidFill>
-                <a:prstDash val="solid"/>
-                <a:miter lim="800000"/>
-              </a14:hiddenLine>
-            </a:ext>
-          </a:extLst>
-        </p:spPr>
-        <p:style>
-          <a:lnRef idx="2">
-            <a:schemeClr val="accent1">
-              <a:shade val="15000"/>
-            </a:schemeClr>
-          </a:lnRef>
-          <a:fillRef idx="1">
-            <a:schemeClr val="accent1"/>
-          </a:fillRef>
-          <a:effectRef idx="0">
-            <a:schemeClr val="accent1"/>
-          </a:effectRef>
-          <a:fontRef idx="minor">
-            <a:schemeClr val="lt1"/>
-          </a:fontRef>
-        </p:style>
-        <p:txBody>
-          <a:bodyPr rtlCol="0" anchor="ctr"/>
-          <a:lstStyle/>
-          <a:p>
-            <a:pPr algn="ctr"/>
-            <a:endParaRPr lang="zh-CN" altLang="en-US"/>
-          </a:p>
-        </p:txBody>
-      </p:sp>
-      <p:sp>
-        <p:nvSpPr>
-          <p:cNvPr id="71" name="text_069">
-            <a:extLst>
-              <a:ext uri="{FF2B5EF4-FFF2-40B4-BE49-F238E27FC236}">
-                <a16:creationId xmlns:a16="http://schemas.microsoft.com/office/drawing/2014/main" id="{24C34AE9-0575-E8E5-1399-2471BD8D4AED}"/>
+          <p:cNvPr id="21" name="text_018">
+            <a:extLst>
+              <a:ext uri="{FF2B5EF4-FFF2-40B4-BE49-F238E27FC236}">
+                <a16:creationId xmlns:a16="http://schemas.microsoft.com/office/drawing/2014/main" id="{30F19E1B-9B74-EA78-BF47-C7236D356EE5}"/>
               </a:ext>
             </a:extLst>
           </p:cNvPr>
@@ -7227,8 +4625,8 @@
         </p:nvSpPr>
         <p:spPr>
           <a:xfrm>
-            <a:off x="8140700" y="1041399"/>
-            <a:ext cx="3073400" cy="368300"/>
+            <a:off x="660400" y="5384799"/>
+            <a:ext cx="3695700" cy="381000"/>
           </a:xfrm>
           <a:prstGeom prst="rect">
             <a:avLst/>
@@ -7241,16 +4639,17 @@
           </a:bodyPr>
           <a:lstStyle/>
           <a:p>
-            <a:r>
-              <a:rPr lang="en-US" altLang="zh-CN" b="1">
+            <a:pPr algn="ctr"/>
+            <a:r>
+              <a:rPr lang="en-US" altLang="zh-CN" sz="2000" b="1">
                 <a:solidFill>
                   <a:srgbClr val="181818"/>
                 </a:solidFill>
                 <a:latin typeface="Times New Roman" panose="02020603050405020304" pitchFamily="18" charset="0"/>
               </a:rPr>
-              <a:t>Noise latent</a:t>
-            </a:r>
-            <a:endParaRPr lang="zh-CN" altLang="en-US" b="1">
+              <a:t>Edit instruction</a:t>
+            </a:r>
+            <a:endParaRPr lang="zh-CN" altLang="en-US" sz="2000" b="1">
               <a:solidFill>
                 <a:srgbClr val="181818"/>
               </a:solidFill>
@@ -7261,10 +4660,10 @@
       </p:sp>
       <p:sp>
         <p:nvSpPr>
-          <p:cNvPr id="72" name="text_070">
-            <a:extLst>
-              <a:ext uri="{FF2B5EF4-FFF2-40B4-BE49-F238E27FC236}">
-                <a16:creationId xmlns:a16="http://schemas.microsoft.com/office/drawing/2014/main" id="{63B86AF7-0C3F-5274-607E-C09E1C495F6A}"/>
+          <p:cNvPr id="22" name="text_019">
+            <a:extLst>
+              <a:ext uri="{FF2B5EF4-FFF2-40B4-BE49-F238E27FC236}">
+                <a16:creationId xmlns:a16="http://schemas.microsoft.com/office/drawing/2014/main" id="{59424F19-E19E-60A1-30A8-7E7EC22EDEF7}"/>
               </a:ext>
             </a:extLst>
           </p:cNvPr>
@@ -7273,8 +4672,8 @@
         </p:nvSpPr>
         <p:spPr>
           <a:xfrm>
-            <a:off x="8140700" y="1473199"/>
-            <a:ext cx="3073400" cy="304800"/>
+            <a:off x="749300" y="5867399"/>
+            <a:ext cx="3517900" cy="685800"/>
           </a:xfrm>
           <a:prstGeom prst="rect">
             <a:avLst/>
@@ -7287,16 +4686,18 @@
           </a:bodyPr>
           <a:lstStyle/>
           <a:p>
-            <a:r>
-              <a:rPr lang="en-US" altLang="zh-CN" sz="1400">
+            <a:pPr algn="ctr"/>
+            <a:r>
+              <a:rPr lang="en-US" altLang="zh-CN" sz="1700">
                 <a:solidFill>
                   <a:srgbClr val="181818"/>
                 </a:solidFill>
                 <a:latin typeface="Times New Roman" panose="02020603050405020304" pitchFamily="18" charset="0"/>
               </a:rPr>
-              <a:t>Target size and random seed</a:t>
-            </a:r>
-            <a:endParaRPr lang="zh-CN" altLang="en-US" sz="1400">
+              <a:t>Combine the cage and cylinders
+with the reference scene</a:t>
+            </a:r>
+            <a:endParaRPr lang="zh-CN" altLang="en-US" sz="1700">
               <a:solidFill>
                 <a:srgbClr val="181818"/>
               </a:solidFill>
@@ -7305,108 +4706,12 @@
           </a:p>
         </p:txBody>
       </p:sp>
-      <p:cxnSp>
-        <p:nvCxnSpPr>
-          <p:cNvPr id="73" name="line_071">
-            <a:extLst>
-              <a:ext uri="{FF2B5EF4-FFF2-40B4-BE49-F238E27FC236}">
-                <a16:creationId xmlns:a16="http://schemas.microsoft.com/office/drawing/2014/main" id="{9673C059-9EF8-CB26-6E91-08F5E03346FF}"/>
-              </a:ext>
-            </a:extLst>
-          </p:cNvPr>
-          <p:cNvCxnSpPr/>
-          <p:nvPr/>
-        </p:nvCxnSpPr>
-        <p:spPr>
-          <a:xfrm>
-            <a:off x="9067800" y="1917700"/>
-            <a:ext cx="0" cy="584200"/>
-          </a:xfrm>
-          <a:prstGeom prst="line">
-            <a:avLst/>
-          </a:prstGeom>
-          <a:ln w="9525">
-            <a:solidFill>
-              <a:srgbClr val="266A71"/>
-            </a:solidFill>
-            <a:tailEnd type="triangle" w="sm" len="sm"/>
-          </a:ln>
-        </p:spPr>
-        <p:style>
-          <a:lnRef idx="2">
-            <a:schemeClr val="accent1"/>
-          </a:lnRef>
-          <a:fillRef idx="0">
-            <a:schemeClr val="accent1"/>
-          </a:fillRef>
-          <a:effectRef idx="1">
-            <a:schemeClr val="accent1"/>
-          </a:effectRef>
-          <a:fontRef idx="minor">
-            <a:schemeClr val="tx1"/>
-          </a:fontRef>
-        </p:style>
-      </p:cxnSp>
-      <p:sp>
-        <p:nvSpPr>
-          <p:cNvPr id="74" name="rect_072">
-            <a:extLst>
-              <a:ext uri="{FF2B5EF4-FFF2-40B4-BE49-F238E27FC236}">
-                <a16:creationId xmlns:a16="http://schemas.microsoft.com/office/drawing/2014/main" id="{EC7E4550-7411-499F-4306-AF16B0090170}"/>
-              </a:ext>
-            </a:extLst>
-          </p:cNvPr>
-          <p:cNvSpPr/>
-          <p:nvPr/>
-        </p:nvSpPr>
-        <p:spPr>
-          <a:xfrm>
-            <a:off x="6718300" y="2501900"/>
-            <a:ext cx="4660900" cy="1955800"/>
-          </a:xfrm>
-          <a:prstGeom prst="rect">
-            <a:avLst/>
-          </a:prstGeom>
-          <a:solidFill>
-            <a:srgbClr val="EAF3F3"/>
-          </a:solidFill>
-          <a:ln w="12700">
-            <a:solidFill>
-              <a:srgbClr val="266A71"/>
-            </a:solidFill>
-          </a:ln>
-        </p:spPr>
-        <p:style>
-          <a:lnRef idx="2">
-            <a:schemeClr val="accent1">
-              <a:shade val="15000"/>
-            </a:schemeClr>
-          </a:lnRef>
-          <a:fillRef idx="1">
-            <a:schemeClr val="accent1"/>
-          </a:fillRef>
-          <a:effectRef idx="0">
-            <a:schemeClr val="accent1"/>
-          </a:effectRef>
-          <a:fontRef idx="minor">
-            <a:schemeClr val="lt1"/>
-          </a:fontRef>
-        </p:style>
-        <p:txBody>
-          <a:bodyPr rtlCol="0" anchor="ctr"/>
-          <a:lstStyle/>
-          <a:p>
-            <a:pPr algn="ctr"/>
-            <a:endParaRPr lang="zh-CN" altLang="en-US"/>
-          </a:p>
-        </p:txBody>
-      </p:sp>
-      <p:sp>
-        <p:nvSpPr>
-          <p:cNvPr id="75" name="text_073">
-            <a:extLst>
-              <a:ext uri="{FF2B5EF4-FFF2-40B4-BE49-F238E27FC236}">
-                <a16:creationId xmlns:a16="http://schemas.microsoft.com/office/drawing/2014/main" id="{16BB44F6-164B-CC99-AF7B-F2B991CCFE50}"/>
+      <p:sp>
+        <p:nvSpPr>
+          <p:cNvPr id="23" name="text_020">
+            <a:extLst>
+              <a:ext uri="{FF2B5EF4-FFF2-40B4-BE49-F238E27FC236}">
+                <a16:creationId xmlns:a16="http://schemas.microsoft.com/office/drawing/2014/main" id="{D4810D6F-66BE-FC99-63E7-96115CA9E0DA}"/>
               </a:ext>
             </a:extLst>
           </p:cNvPr>
@@ -7415,8 +4720,8 @@
         </p:nvSpPr>
         <p:spPr>
           <a:xfrm>
-            <a:off x="6934200" y="2628899"/>
-            <a:ext cx="4229100" cy="355600"/>
+            <a:off x="533400" y="7048499"/>
+            <a:ext cx="3949700" cy="558800"/>
           </a:xfrm>
           <a:prstGeom prst="rect">
             <a:avLst/>
@@ -7429,62 +4734,18 @@
           </a:bodyPr>
           <a:lstStyle/>
           <a:p>
-            <a:r>
-              <a:rPr lang="en-US" altLang="zh-CN" sz="1500" b="1">
-                <a:solidFill>
-                  <a:srgbClr val="266A71"/>
-                </a:solidFill>
-                <a:latin typeface="Arial" panose="020B0604020202020204" pitchFamily="34" charset="0"/>
-              </a:rPr>
-              <a:t>Denoising / KSampler</a:t>
-            </a:r>
-            <a:endParaRPr lang="zh-CN" altLang="en-US" sz="1500" b="1">
-              <a:solidFill>
-                <a:srgbClr val="266A71"/>
-              </a:solidFill>
-              <a:latin typeface="Arial" panose="020B0604020202020204" pitchFamily="34" charset="0"/>
-            </a:endParaRPr>
-          </a:p>
-        </p:txBody>
-      </p:sp>
-      <p:sp>
-        <p:nvSpPr>
-          <p:cNvPr id="76" name="text_074">
-            <a:extLst>
-              <a:ext uri="{FF2B5EF4-FFF2-40B4-BE49-F238E27FC236}">
-                <a16:creationId xmlns:a16="http://schemas.microsoft.com/office/drawing/2014/main" id="{65D82E1E-F794-D5F1-52DF-5DBD11AABD92}"/>
-              </a:ext>
-            </a:extLst>
-          </p:cNvPr>
-          <p:cNvSpPr txBox="1"/>
-          <p:nvPr/>
-        </p:nvSpPr>
-        <p:spPr>
-          <a:xfrm>
-            <a:off x="6934200" y="3086099"/>
-            <a:ext cx="4229100" cy="342900"/>
-          </a:xfrm>
-          <a:prstGeom prst="rect">
-            <a:avLst/>
-          </a:prstGeom>
-          <a:noFill/>
-        </p:spPr>
-        <p:txBody>
-          <a:bodyPr vert="horz" wrap="square" lIns="0" tIns="0" rIns="0" bIns="0" rtlCol="0" anchor="ctr">
-            <a:noAutofit/>
-          </a:bodyPr>
-          <a:lstStyle/>
-          <a:p>
-            <a:r>
-              <a:rPr lang="en-US" altLang="zh-CN" sz="1500">
+            <a:pPr algn="ctr"/>
+            <a:r>
+              <a:rPr lang="en-US" altLang="zh-CN" sz="1600" i="1">
                 <a:solidFill>
                   <a:srgbClr val="181818"/>
                 </a:solidFill>
                 <a:latin typeface="Times New Roman" panose="02020603050405020304" pitchFamily="18" charset="0"/>
               </a:rPr>
-              <a:t>Conditioned iterative sampling</a:t>
-            </a:r>
-            <a:endParaRPr lang="zh-CN" altLang="en-US" sz="1500">
+              <a:t>Two reference photographs
+contribute to image 301</a:t>
+            </a:r>
+            <a:endParaRPr lang="zh-CN" altLang="en-US" sz="1600" i="1">
               <a:solidFill>
                 <a:srgbClr val="181818"/>
               </a:solidFill>
@@ -7493,450 +4754,12 @@
           </a:p>
         </p:txBody>
       </p:sp>
-      <p:sp>
-        <p:nvSpPr>
-          <p:cNvPr id="77" name="rect_075">
-            <a:extLst>
-              <a:ext uri="{FF2B5EF4-FFF2-40B4-BE49-F238E27FC236}">
-                <a16:creationId xmlns:a16="http://schemas.microsoft.com/office/drawing/2014/main" id="{C1027936-693F-42E8-B80B-43C98C11EF5B}"/>
-              </a:ext>
-            </a:extLst>
-          </p:cNvPr>
-          <p:cNvSpPr/>
-          <p:nvPr/>
-        </p:nvSpPr>
-        <p:spPr>
-          <a:xfrm>
-            <a:off x="7086600" y="3632200"/>
-            <a:ext cx="635000" cy="495300"/>
-          </a:xfrm>
-          <a:prstGeom prst="rect">
-            <a:avLst/>
-          </a:prstGeom>
-          <a:solidFill>
-            <a:srgbClr val="FFFFFF"/>
-          </a:solidFill>
-          <a:ln w="7620">
-            <a:solidFill>
-              <a:srgbClr val="266A71"/>
-            </a:solidFill>
-          </a:ln>
-        </p:spPr>
-        <p:style>
-          <a:lnRef idx="2">
-            <a:schemeClr val="accent1">
-              <a:shade val="15000"/>
-            </a:schemeClr>
-          </a:lnRef>
-          <a:fillRef idx="1">
-            <a:schemeClr val="accent1"/>
-          </a:fillRef>
-          <a:effectRef idx="0">
-            <a:schemeClr val="accent1"/>
-          </a:effectRef>
-          <a:fontRef idx="minor">
-            <a:schemeClr val="lt1"/>
-          </a:fontRef>
-        </p:style>
-        <p:txBody>
-          <a:bodyPr rtlCol="0" anchor="ctr"/>
-          <a:lstStyle/>
-          <a:p>
-            <a:pPr algn="ctr"/>
-            <a:endParaRPr lang="zh-CN" altLang="en-US"/>
-          </a:p>
-        </p:txBody>
-      </p:sp>
-      <p:sp>
-        <p:nvSpPr>
-          <p:cNvPr id="78" name="text_076">
-            <a:extLst>
-              <a:ext uri="{FF2B5EF4-FFF2-40B4-BE49-F238E27FC236}">
-                <a16:creationId xmlns:a16="http://schemas.microsoft.com/office/drawing/2014/main" id="{78437D82-B1B9-AAD3-D4AC-050A1D861875}"/>
-              </a:ext>
-            </a:extLst>
-          </p:cNvPr>
-          <p:cNvSpPr txBox="1"/>
-          <p:nvPr/>
-        </p:nvSpPr>
-        <p:spPr>
-          <a:xfrm>
-            <a:off x="7239000" y="3670299"/>
-            <a:ext cx="279400" cy="381000"/>
-          </a:xfrm>
-          <a:prstGeom prst="rect">
-            <a:avLst/>
-          </a:prstGeom>
-          <a:noFill/>
-        </p:spPr>
-        <p:txBody>
-          <a:bodyPr vert="horz" wrap="square" lIns="0" tIns="0" rIns="0" bIns="0" rtlCol="0" anchor="ctr">
-            <a:noAutofit/>
-          </a:bodyPr>
-          <a:lstStyle/>
-          <a:p>
-            <a:r>
-              <a:rPr lang="en-US" altLang="zh-CN" sz="2300" i="1">
-                <a:solidFill>
-                  <a:srgbClr val="181818"/>
-                </a:solidFill>
-                <a:latin typeface="Times New Roman" panose="02020603050405020304" pitchFamily="18" charset="0"/>
-              </a:rPr>
-              <a:t>z</a:t>
-            </a:r>
-            <a:endParaRPr lang="zh-CN" altLang="en-US" sz="2300" i="1">
-              <a:solidFill>
-                <a:srgbClr val="181818"/>
-              </a:solidFill>
-              <a:latin typeface="Times New Roman" panose="02020603050405020304" pitchFamily="18" charset="0"/>
-            </a:endParaRPr>
-          </a:p>
-        </p:txBody>
-      </p:sp>
-      <p:sp>
-        <p:nvSpPr>
-          <p:cNvPr id="79" name="text_077">
-            <a:extLst>
-              <a:ext uri="{FF2B5EF4-FFF2-40B4-BE49-F238E27FC236}">
-                <a16:creationId xmlns:a16="http://schemas.microsoft.com/office/drawing/2014/main" id="{413BDC42-C649-23AA-2E02-933DCE04BCF9}"/>
-              </a:ext>
-            </a:extLst>
-          </p:cNvPr>
-          <p:cNvSpPr txBox="1"/>
-          <p:nvPr/>
-        </p:nvSpPr>
-        <p:spPr>
-          <a:xfrm>
-            <a:off x="7442200" y="3848100"/>
-            <a:ext cx="228600" cy="228600"/>
-          </a:xfrm>
-          <a:prstGeom prst="rect">
-            <a:avLst/>
-          </a:prstGeom>
-          <a:noFill/>
-        </p:spPr>
-        <p:txBody>
-          <a:bodyPr vert="horz" wrap="square" lIns="0" tIns="0" rIns="0" bIns="0" rtlCol="0" anchor="ctr">
-            <a:noAutofit/>
-          </a:bodyPr>
-          <a:lstStyle/>
-          <a:p>
-            <a:r>
-              <a:rPr lang="en-US" altLang="zh-CN" sz="1200" i="1">
-                <a:solidFill>
-                  <a:srgbClr val="181818"/>
-                </a:solidFill>
-                <a:latin typeface="Times New Roman" panose="02020603050405020304" pitchFamily="18" charset="0"/>
-              </a:rPr>
-              <a:t>T</a:t>
-            </a:r>
-            <a:endParaRPr lang="zh-CN" altLang="en-US" sz="1200" i="1">
-              <a:solidFill>
-                <a:srgbClr val="181818"/>
-              </a:solidFill>
-              <a:latin typeface="Times New Roman" panose="02020603050405020304" pitchFamily="18" charset="0"/>
-            </a:endParaRPr>
-          </a:p>
-        </p:txBody>
-      </p:sp>
-      <p:sp>
-        <p:nvSpPr>
-          <p:cNvPr id="80" name="rect_078">
-            <a:extLst>
-              <a:ext uri="{FF2B5EF4-FFF2-40B4-BE49-F238E27FC236}">
-                <a16:creationId xmlns:a16="http://schemas.microsoft.com/office/drawing/2014/main" id="{D3434FDA-57AC-0FBE-1389-6A29B8A70D15}"/>
-              </a:ext>
-            </a:extLst>
-          </p:cNvPr>
-          <p:cNvSpPr/>
-          <p:nvPr/>
-        </p:nvSpPr>
-        <p:spPr>
-          <a:xfrm>
-            <a:off x="8699500" y="3632200"/>
-            <a:ext cx="635000" cy="495300"/>
-          </a:xfrm>
-          <a:prstGeom prst="rect">
-            <a:avLst/>
-          </a:prstGeom>
-          <a:solidFill>
-            <a:srgbClr val="FFFFFF"/>
-          </a:solidFill>
-          <a:ln w="7620">
-            <a:solidFill>
-              <a:srgbClr val="266A71"/>
-            </a:solidFill>
-          </a:ln>
-        </p:spPr>
-        <p:style>
-          <a:lnRef idx="2">
-            <a:schemeClr val="accent1">
-              <a:shade val="15000"/>
-            </a:schemeClr>
-          </a:lnRef>
-          <a:fillRef idx="1">
-            <a:schemeClr val="accent1"/>
-          </a:fillRef>
-          <a:effectRef idx="0">
-            <a:schemeClr val="accent1"/>
-          </a:effectRef>
-          <a:fontRef idx="minor">
-            <a:schemeClr val="lt1"/>
-          </a:fontRef>
-        </p:style>
-        <p:txBody>
-          <a:bodyPr rtlCol="0" anchor="ctr"/>
-          <a:lstStyle/>
-          <a:p>
-            <a:pPr algn="ctr"/>
-            <a:endParaRPr lang="zh-CN" altLang="en-US"/>
-          </a:p>
-        </p:txBody>
-      </p:sp>
-      <p:sp>
-        <p:nvSpPr>
-          <p:cNvPr id="81" name="text_079">
-            <a:extLst>
-              <a:ext uri="{FF2B5EF4-FFF2-40B4-BE49-F238E27FC236}">
-                <a16:creationId xmlns:a16="http://schemas.microsoft.com/office/drawing/2014/main" id="{BC13156C-55C9-5B58-F2F6-F8BAF9D270DB}"/>
-              </a:ext>
-            </a:extLst>
-          </p:cNvPr>
-          <p:cNvSpPr txBox="1"/>
-          <p:nvPr/>
-        </p:nvSpPr>
-        <p:spPr>
-          <a:xfrm>
-            <a:off x="8851900" y="3670299"/>
-            <a:ext cx="279400" cy="381000"/>
-          </a:xfrm>
-          <a:prstGeom prst="rect">
-            <a:avLst/>
-          </a:prstGeom>
-          <a:noFill/>
-        </p:spPr>
-        <p:txBody>
-          <a:bodyPr vert="horz" wrap="square" lIns="0" tIns="0" rIns="0" bIns="0" rtlCol="0" anchor="ctr">
-            <a:noAutofit/>
-          </a:bodyPr>
-          <a:lstStyle/>
-          <a:p>
-            <a:r>
-              <a:rPr lang="en-US" altLang="zh-CN" sz="2300" i="1">
-                <a:solidFill>
-                  <a:srgbClr val="181818"/>
-                </a:solidFill>
-                <a:latin typeface="Times New Roman" panose="02020603050405020304" pitchFamily="18" charset="0"/>
-              </a:rPr>
-              <a:t>z</a:t>
-            </a:r>
-            <a:endParaRPr lang="zh-CN" altLang="en-US" sz="2300" i="1">
-              <a:solidFill>
-                <a:srgbClr val="181818"/>
-              </a:solidFill>
-              <a:latin typeface="Times New Roman" panose="02020603050405020304" pitchFamily="18" charset="0"/>
-            </a:endParaRPr>
-          </a:p>
-        </p:txBody>
-      </p:sp>
-      <p:sp>
-        <p:nvSpPr>
-          <p:cNvPr id="82" name="text_080">
-            <a:extLst>
-              <a:ext uri="{FF2B5EF4-FFF2-40B4-BE49-F238E27FC236}">
-                <a16:creationId xmlns:a16="http://schemas.microsoft.com/office/drawing/2014/main" id="{70EA5D4A-C7D4-CC5A-9FAC-5CF35D784D3C}"/>
-              </a:ext>
-            </a:extLst>
-          </p:cNvPr>
-          <p:cNvSpPr txBox="1"/>
-          <p:nvPr/>
-        </p:nvSpPr>
-        <p:spPr>
-          <a:xfrm>
-            <a:off x="9055100" y="3848100"/>
-            <a:ext cx="228600" cy="228600"/>
-          </a:xfrm>
-          <a:prstGeom prst="rect">
-            <a:avLst/>
-          </a:prstGeom>
-          <a:noFill/>
-        </p:spPr>
-        <p:txBody>
-          <a:bodyPr vert="horz" wrap="square" lIns="0" tIns="0" rIns="0" bIns="0" rtlCol="0" anchor="ctr">
-            <a:noAutofit/>
-          </a:bodyPr>
-          <a:lstStyle/>
-          <a:p>
-            <a:r>
-              <a:rPr lang="en-US" altLang="zh-CN" sz="1200" i="1">
-                <a:solidFill>
-                  <a:srgbClr val="181818"/>
-                </a:solidFill>
-                <a:latin typeface="Times New Roman" panose="02020603050405020304" pitchFamily="18" charset="0"/>
-              </a:rPr>
-              <a:t>t</a:t>
-            </a:r>
-            <a:endParaRPr lang="zh-CN" altLang="en-US" sz="1200" i="1">
-              <a:solidFill>
-                <a:srgbClr val="181818"/>
-              </a:solidFill>
-              <a:latin typeface="Times New Roman" panose="02020603050405020304" pitchFamily="18" charset="0"/>
-            </a:endParaRPr>
-          </a:p>
-        </p:txBody>
-      </p:sp>
-      <p:sp>
-        <p:nvSpPr>
-          <p:cNvPr id="83" name="rect_081">
-            <a:extLst>
-              <a:ext uri="{FF2B5EF4-FFF2-40B4-BE49-F238E27FC236}">
-                <a16:creationId xmlns:a16="http://schemas.microsoft.com/office/drawing/2014/main" id="{624A4537-7246-205C-EA58-F4E7CB9F8E7C}"/>
-              </a:ext>
-            </a:extLst>
-          </p:cNvPr>
-          <p:cNvSpPr/>
-          <p:nvPr/>
-        </p:nvSpPr>
-        <p:spPr>
-          <a:xfrm>
-            <a:off x="10401300" y="3632200"/>
-            <a:ext cx="635000" cy="495300"/>
-          </a:xfrm>
-          <a:prstGeom prst="rect">
-            <a:avLst/>
-          </a:prstGeom>
-          <a:solidFill>
-            <a:srgbClr val="FFFFFF"/>
-          </a:solidFill>
-          <a:ln w="7620">
-            <a:solidFill>
-              <a:srgbClr val="266A71"/>
-            </a:solidFill>
-          </a:ln>
-        </p:spPr>
-        <p:style>
-          <a:lnRef idx="2">
-            <a:schemeClr val="accent1">
-              <a:shade val="15000"/>
-            </a:schemeClr>
-          </a:lnRef>
-          <a:fillRef idx="1">
-            <a:schemeClr val="accent1"/>
-          </a:fillRef>
-          <a:effectRef idx="0">
-            <a:schemeClr val="accent1"/>
-          </a:effectRef>
-          <a:fontRef idx="minor">
-            <a:schemeClr val="lt1"/>
-          </a:fontRef>
-        </p:style>
-        <p:txBody>
-          <a:bodyPr rtlCol="0" anchor="ctr"/>
-          <a:lstStyle/>
-          <a:p>
-            <a:pPr algn="ctr"/>
-            <a:endParaRPr lang="zh-CN" altLang="en-US"/>
-          </a:p>
-        </p:txBody>
-      </p:sp>
-      <p:sp>
-        <p:nvSpPr>
-          <p:cNvPr id="84" name="text_082">
-            <a:extLst>
-              <a:ext uri="{FF2B5EF4-FFF2-40B4-BE49-F238E27FC236}">
-                <a16:creationId xmlns:a16="http://schemas.microsoft.com/office/drawing/2014/main" id="{D82083CE-2230-CA4C-DE4D-81E485085B3F}"/>
-              </a:ext>
-            </a:extLst>
-          </p:cNvPr>
-          <p:cNvSpPr txBox="1"/>
-          <p:nvPr/>
-        </p:nvSpPr>
-        <p:spPr>
-          <a:xfrm>
-            <a:off x="10553700" y="3670299"/>
-            <a:ext cx="279400" cy="381000"/>
-          </a:xfrm>
-          <a:prstGeom prst="rect">
-            <a:avLst/>
-          </a:prstGeom>
-          <a:noFill/>
-        </p:spPr>
-        <p:txBody>
-          <a:bodyPr vert="horz" wrap="square" lIns="0" tIns="0" rIns="0" bIns="0" rtlCol="0" anchor="ctr">
-            <a:noAutofit/>
-          </a:bodyPr>
-          <a:lstStyle/>
-          <a:p>
-            <a:r>
-              <a:rPr lang="en-US" altLang="zh-CN" sz="2300" i="1">
-                <a:solidFill>
-                  <a:srgbClr val="181818"/>
-                </a:solidFill>
-                <a:latin typeface="Times New Roman" panose="02020603050405020304" pitchFamily="18" charset="0"/>
-              </a:rPr>
-              <a:t>z</a:t>
-            </a:r>
-            <a:endParaRPr lang="zh-CN" altLang="en-US" sz="2300" i="1">
-              <a:solidFill>
-                <a:srgbClr val="181818"/>
-              </a:solidFill>
-              <a:latin typeface="Times New Roman" panose="02020603050405020304" pitchFamily="18" charset="0"/>
-            </a:endParaRPr>
-          </a:p>
-        </p:txBody>
-      </p:sp>
-      <p:sp>
-        <p:nvSpPr>
-          <p:cNvPr id="85" name="text_083">
-            <a:extLst>
-              <a:ext uri="{FF2B5EF4-FFF2-40B4-BE49-F238E27FC236}">
-                <a16:creationId xmlns:a16="http://schemas.microsoft.com/office/drawing/2014/main" id="{FBA9B1CE-49AB-E551-C78A-4F8C6BC80077}"/>
-              </a:ext>
-            </a:extLst>
-          </p:cNvPr>
-          <p:cNvSpPr txBox="1"/>
-          <p:nvPr/>
-        </p:nvSpPr>
-        <p:spPr>
-          <a:xfrm>
-            <a:off x="10756900" y="3848100"/>
-            <a:ext cx="228600" cy="228600"/>
-          </a:xfrm>
-          <a:prstGeom prst="rect">
-            <a:avLst/>
-          </a:prstGeom>
-          <a:noFill/>
-        </p:spPr>
-        <p:txBody>
-          <a:bodyPr vert="horz" wrap="square" lIns="0" tIns="0" rIns="0" bIns="0" rtlCol="0" anchor="ctr">
-            <a:noAutofit/>
-          </a:bodyPr>
-          <a:lstStyle/>
-          <a:p>
-            <a:r>
-              <a:rPr lang="en-US" altLang="zh-CN" sz="1200" i="1">
-                <a:solidFill>
-                  <a:srgbClr val="181818"/>
-                </a:solidFill>
-                <a:latin typeface="Times New Roman" panose="02020603050405020304" pitchFamily="18" charset="0"/>
-              </a:rPr>
-              <a:t>0</a:t>
-            </a:r>
-            <a:endParaRPr lang="zh-CN" altLang="en-US" sz="1200" i="1">
-              <a:solidFill>
-                <a:srgbClr val="181818"/>
-              </a:solidFill>
-              <a:latin typeface="Times New Roman" panose="02020603050405020304" pitchFamily="18" charset="0"/>
-            </a:endParaRPr>
-          </a:p>
-        </p:txBody>
-      </p:sp>
       <p:cxnSp>
         <p:nvCxnSpPr>
-          <p:cNvPr id="86" name="line_084">
-            <a:extLst>
-              <a:ext uri="{FF2B5EF4-FFF2-40B4-BE49-F238E27FC236}">
-                <a16:creationId xmlns:a16="http://schemas.microsoft.com/office/drawing/2014/main" id="{C14EA416-56E9-0AEB-4A5F-C35909EC6211}"/>
+          <p:cNvPr id="24" name="line_021">
+            <a:extLst>
+              <a:ext uri="{FF2B5EF4-FFF2-40B4-BE49-F238E27FC236}">
+                <a16:creationId xmlns:a16="http://schemas.microsoft.com/office/drawing/2014/main" id="{107519E7-0EEE-B2C0-C93D-0DA08068166A}"/>
               </a:ext>
             </a:extLst>
           </p:cNvPr>
@@ -7945,17 +4768,16 @@
         </p:nvCxnSpPr>
         <p:spPr>
           <a:xfrm>
-            <a:off x="7721600" y="3886200"/>
-            <a:ext cx="977900" cy="0"/>
+            <a:off x="4495800" y="5981700"/>
+            <a:ext cx="812800" cy="0"/>
           </a:xfrm>
           <a:prstGeom prst="line">
             <a:avLst/>
           </a:prstGeom>
-          <a:ln w="9525">
+          <a:ln w="13970">
             <a:solidFill>
-              <a:srgbClr val="266A71"/>
+              <a:srgbClr val="202020"/>
             </a:solidFill>
-            <a:tailEnd type="triangle" w="sm" len="sm"/>
           </a:ln>
         </p:spPr>
         <p:style>
@@ -7975,10 +4797,10 @@
       </p:cxnSp>
       <p:cxnSp>
         <p:nvCxnSpPr>
-          <p:cNvPr id="87" name="line_085">
-            <a:extLst>
-              <a:ext uri="{FF2B5EF4-FFF2-40B4-BE49-F238E27FC236}">
-                <a16:creationId xmlns:a16="http://schemas.microsoft.com/office/drawing/2014/main" id="{BB071954-2350-814C-9585-B88BE6AFA11E}"/>
+          <p:cNvPr id="25" name="line_022">
+            <a:extLst>
+              <a:ext uri="{FF2B5EF4-FFF2-40B4-BE49-F238E27FC236}">
+                <a16:creationId xmlns:a16="http://schemas.microsoft.com/office/drawing/2014/main" id="{399E1CA7-9982-A7E1-1B5D-4BB9CDF4162C}"/>
               </a:ext>
             </a:extLst>
           </p:cNvPr>
@@ -7986,18 +4808,17 @@
           <p:nvPr/>
         </p:nvCxnSpPr>
         <p:spPr>
-          <a:xfrm>
-            <a:off x="9334500" y="3886200"/>
-            <a:ext cx="1066800" cy="0"/>
+          <a:xfrm flipV="1">
+            <a:off x="5308600" y="2184400"/>
+            <a:ext cx="0" cy="3797300"/>
           </a:xfrm>
           <a:prstGeom prst="line">
             <a:avLst/>
           </a:prstGeom>
-          <a:ln w="9525">
+          <a:ln w="13970">
             <a:solidFill>
-              <a:srgbClr val="266A71"/>
+              <a:srgbClr val="202020"/>
             </a:solidFill>
-            <a:tailEnd type="triangle" w="sm" len="sm"/>
           </a:ln>
         </p:spPr>
         <p:style>
@@ -8017,10 +4838,10 @@
       </p:cxnSp>
       <p:cxnSp>
         <p:nvCxnSpPr>
-          <p:cNvPr id="88" name="line_086">
-            <a:extLst>
-              <a:ext uri="{FF2B5EF4-FFF2-40B4-BE49-F238E27FC236}">
-                <a16:creationId xmlns:a16="http://schemas.microsoft.com/office/drawing/2014/main" id="{4597612A-1800-8AEE-A5BA-784AF1B1635B}"/>
+          <p:cNvPr id="26" name="line_023">
+            <a:extLst>
+              <a:ext uri="{FF2B5EF4-FFF2-40B4-BE49-F238E27FC236}">
+                <a16:creationId xmlns:a16="http://schemas.microsoft.com/office/drawing/2014/main" id="{E605F72C-B3BA-7EB2-1AE6-F87A3F267513}"/>
               </a:ext>
             </a:extLst>
           </p:cNvPr>
@@ -8029,15 +4850,15 @@
         </p:nvCxnSpPr>
         <p:spPr>
           <a:xfrm>
-            <a:off x="9067800" y="4457700"/>
-            <a:ext cx="0" cy="406400"/>
+            <a:off x="5308600" y="2184400"/>
+            <a:ext cx="203200" cy="0"/>
           </a:xfrm>
           <a:prstGeom prst="line">
             <a:avLst/>
           </a:prstGeom>
-          <a:ln w="9525">
+          <a:ln w="13970">
             <a:solidFill>
-              <a:srgbClr val="266A71"/>
+              <a:srgbClr val="202020"/>
             </a:solidFill>
             <a:tailEnd type="triangle" w="sm" len="sm"/>
           </a:ln>
@@ -8057,12 +4878,136 @@
           </a:fontRef>
         </p:style>
       </p:cxnSp>
-      <p:sp>
-        <p:nvSpPr>
-          <p:cNvPr id="89" name="rect_087">
-            <a:extLst>
-              <a:ext uri="{FF2B5EF4-FFF2-40B4-BE49-F238E27FC236}">
-                <a16:creationId xmlns:a16="http://schemas.microsoft.com/office/drawing/2014/main" id="{2F6B8FCF-D169-45ED-89A5-AC250BA91C70}"/>
+      <p:cxnSp>
+        <p:nvCxnSpPr>
+          <p:cNvPr id="27" name="line_024">
+            <a:extLst>
+              <a:ext uri="{FF2B5EF4-FFF2-40B4-BE49-F238E27FC236}">
+                <a16:creationId xmlns:a16="http://schemas.microsoft.com/office/drawing/2014/main" id="{E0A80D8E-4437-4FA1-03BF-FB488EAF81B8}"/>
+              </a:ext>
+            </a:extLst>
+          </p:cNvPr>
+          <p:cNvCxnSpPr/>
+          <p:nvPr/>
+        </p:nvCxnSpPr>
+        <p:spPr>
+          <a:xfrm>
+            <a:off x="4495800" y="4660900"/>
+            <a:ext cx="609600" cy="0"/>
+          </a:xfrm>
+          <a:prstGeom prst="line">
+            <a:avLst/>
+          </a:prstGeom>
+          <a:ln w="13970">
+            <a:solidFill>
+              <a:srgbClr val="202020"/>
+            </a:solidFill>
+          </a:ln>
+        </p:spPr>
+        <p:style>
+          <a:lnRef idx="2">
+            <a:schemeClr val="accent1"/>
+          </a:lnRef>
+          <a:fillRef idx="0">
+            <a:schemeClr val="accent1"/>
+          </a:fillRef>
+          <a:effectRef idx="1">
+            <a:schemeClr val="accent1"/>
+          </a:effectRef>
+          <a:fontRef idx="minor">
+            <a:schemeClr val="tx1"/>
+          </a:fontRef>
+        </p:style>
+      </p:cxnSp>
+      <p:cxnSp>
+        <p:nvCxnSpPr>
+          <p:cNvPr id="28" name="line_025">
+            <a:extLst>
+              <a:ext uri="{FF2B5EF4-FFF2-40B4-BE49-F238E27FC236}">
+                <a16:creationId xmlns:a16="http://schemas.microsoft.com/office/drawing/2014/main" id="{A973CB92-0B56-F499-9302-8E73A74B63F6}"/>
+              </a:ext>
+            </a:extLst>
+          </p:cNvPr>
+          <p:cNvCxnSpPr/>
+          <p:nvPr/>
+        </p:nvCxnSpPr>
+        <p:spPr>
+          <a:xfrm flipV="1">
+            <a:off x="5105400" y="1816100"/>
+            <a:ext cx="0" cy="2844800"/>
+          </a:xfrm>
+          <a:prstGeom prst="line">
+            <a:avLst/>
+          </a:prstGeom>
+          <a:ln w="13970">
+            <a:solidFill>
+              <a:srgbClr val="202020"/>
+            </a:solidFill>
+          </a:ln>
+        </p:spPr>
+        <p:style>
+          <a:lnRef idx="2">
+            <a:schemeClr val="accent1"/>
+          </a:lnRef>
+          <a:fillRef idx="0">
+            <a:schemeClr val="accent1"/>
+          </a:fillRef>
+          <a:effectRef idx="1">
+            <a:schemeClr val="accent1"/>
+          </a:effectRef>
+          <a:fontRef idx="minor">
+            <a:schemeClr val="tx1"/>
+          </a:fontRef>
+        </p:style>
+      </p:cxnSp>
+      <p:cxnSp>
+        <p:nvCxnSpPr>
+          <p:cNvPr id="29" name="line_026">
+            <a:extLst>
+              <a:ext uri="{FF2B5EF4-FFF2-40B4-BE49-F238E27FC236}">
+                <a16:creationId xmlns:a16="http://schemas.microsoft.com/office/drawing/2014/main" id="{3FFBB8E0-FB7E-2BBC-1DD8-98CA864F4934}"/>
+              </a:ext>
+            </a:extLst>
+          </p:cNvPr>
+          <p:cNvCxnSpPr/>
+          <p:nvPr/>
+        </p:nvCxnSpPr>
+        <p:spPr>
+          <a:xfrm>
+            <a:off x="5105400" y="1816100"/>
+            <a:ext cx="406400" cy="0"/>
+          </a:xfrm>
+          <a:prstGeom prst="line">
+            <a:avLst/>
+          </a:prstGeom>
+          <a:ln w="13970">
+            <a:solidFill>
+              <a:srgbClr val="202020"/>
+            </a:solidFill>
+            <a:tailEnd type="triangle" w="sm" len="sm"/>
+          </a:ln>
+        </p:spPr>
+        <p:style>
+          <a:lnRef idx="2">
+            <a:schemeClr val="accent1"/>
+          </a:lnRef>
+          <a:fillRef idx="0">
+            <a:schemeClr val="accent1"/>
+          </a:fillRef>
+          <a:effectRef idx="1">
+            <a:schemeClr val="accent1"/>
+          </a:effectRef>
+          <a:fontRef idx="minor">
+            <a:schemeClr val="tx1"/>
+          </a:fontRef>
+        </p:style>
+      </p:cxnSp>
+      <p:sp>
+        <p:nvSpPr>
+          <p:cNvPr id="30" name="roundrect_027">
+            <a:extLst>
+              <a:ext uri="{FF2B5EF4-FFF2-40B4-BE49-F238E27FC236}">
+                <a16:creationId xmlns:a16="http://schemas.microsoft.com/office/drawing/2014/main" id="{010E2996-4337-06D2-3D93-6953AD89D0BB}"/>
               </a:ext>
             </a:extLst>
           </p:cNvPr>
@@ -8071,18 +5016,20 @@
         </p:nvSpPr>
         <p:spPr>
           <a:xfrm>
-            <a:off x="7086600" y="4864100"/>
-            <a:ext cx="3937000" cy="838200"/>
-          </a:xfrm>
-          <a:prstGeom prst="rect">
-            <a:avLst/>
+            <a:off x="5511800" y="1333500"/>
+            <a:ext cx="4292600" cy="1016000"/>
+          </a:xfrm>
+          <a:prstGeom prst="roundRect">
+            <a:avLst>
+              <a:gd name="adj" fmla="val 8000"/>
+            </a:avLst>
           </a:prstGeom>
           <a:solidFill>
-            <a:srgbClr val="FFFFFF"/>
+            <a:srgbClr val="F5E6D5"/>
           </a:solidFill>
-          <a:ln w="8255">
+          <a:ln w="12700">
             <a:solidFill>
-              <a:srgbClr val="266A71"/>
+              <a:srgbClr val="181818"/>
             </a:solidFill>
           </a:ln>
         </p:spPr>
@@ -8113,10 +5060,10 @@
       </p:sp>
       <p:sp>
         <p:nvSpPr>
-          <p:cNvPr id="90" name="text_088">
-            <a:extLst>
-              <a:ext uri="{FF2B5EF4-FFF2-40B4-BE49-F238E27FC236}">
-                <a16:creationId xmlns:a16="http://schemas.microsoft.com/office/drawing/2014/main" id="{D6FB3651-3E9C-CE91-ED5D-6E43C0DC89C1}"/>
+          <p:cNvPr id="31" name="text_028">
+            <a:extLst>
+              <a:ext uri="{FF2B5EF4-FFF2-40B4-BE49-F238E27FC236}">
+                <a16:creationId xmlns:a16="http://schemas.microsoft.com/office/drawing/2014/main" id="{6273B2F3-16E5-7855-5469-1581DA5A80A4}"/>
               </a:ext>
             </a:extLst>
           </p:cNvPr>
@@ -8125,8 +5072,8 @@
         </p:nvSpPr>
         <p:spPr>
           <a:xfrm>
-            <a:off x="7239000" y="4952999"/>
-            <a:ext cx="3632200" cy="317500"/>
+            <a:off x="5638800" y="1422399"/>
+            <a:ext cx="4038600" cy="368300"/>
           </a:xfrm>
           <a:prstGeom prst="rect">
             <a:avLst/>
@@ -8139,18 +5086,775 @@
           </a:bodyPr>
           <a:lstStyle/>
           <a:p>
-            <a:r>
-              <a:rPr lang="en-US" altLang="zh-CN" sz="1200" b="1">
+            <a:pPr algn="ctr"/>
+            <a:r>
+              <a:rPr lang="en-US" altLang="zh-CN" b="1">
                 <a:solidFill>
-                  <a:srgbClr val="266A71"/>
+                  <a:srgbClr val="181818"/>
+                </a:solidFill>
+                <a:latin typeface="Times New Roman" panose="02020603050405020304" pitchFamily="18" charset="0"/>
+              </a:rPr>
+              <a:t>Multimodal encoder</a:t>
+            </a:r>
+            <a:endParaRPr lang="zh-CN" altLang="en-US" b="1">
+              <a:solidFill>
+                <a:srgbClr val="181818"/>
+              </a:solidFill>
+              <a:latin typeface="Times New Roman" panose="02020603050405020304" pitchFamily="18" charset="0"/>
+            </a:endParaRPr>
+          </a:p>
+        </p:txBody>
+      </p:sp>
+      <p:sp>
+        <p:nvSpPr>
+          <p:cNvPr id="32" name="text_029">
+            <a:extLst>
+              <a:ext uri="{FF2B5EF4-FFF2-40B4-BE49-F238E27FC236}">
+                <a16:creationId xmlns:a16="http://schemas.microsoft.com/office/drawing/2014/main" id="{7BA763F7-ECD4-A31B-BB43-3C5CFB5B5CB0}"/>
+              </a:ext>
+            </a:extLst>
+          </p:cNvPr>
+          <p:cNvSpPr txBox="1"/>
+          <p:nvPr/>
+        </p:nvSpPr>
+        <p:spPr>
+          <a:xfrm>
+            <a:off x="5638800" y="1816099"/>
+            <a:ext cx="4038600" cy="457200"/>
+          </a:xfrm>
+          <a:prstGeom prst="rect">
+            <a:avLst/>
+          </a:prstGeom>
+          <a:noFill/>
+        </p:spPr>
+        <p:txBody>
+          <a:bodyPr vert="horz" wrap="square" lIns="0" tIns="0" rIns="0" bIns="0" rtlCol="0" anchor="ctr">
+            <a:noAutofit/>
+          </a:bodyPr>
+          <a:lstStyle/>
+          <a:p>
+            <a:pPr algn="ctr"/>
+            <a:r>
+              <a:rPr lang="en-US" altLang="zh-CN" sz="1400">
+                <a:solidFill>
+                  <a:srgbClr val="181818"/>
+                </a:solidFill>
+                <a:latin typeface="Times New Roman" panose="02020603050405020304" pitchFamily="18" charset="0"/>
+              </a:rPr>
+              <a:t>Qwen2.5-VL 7B · FP8</a:t>
+            </a:r>
+            <a:endParaRPr lang="zh-CN" altLang="en-US" sz="1400">
+              <a:solidFill>
+                <a:srgbClr val="181818"/>
+              </a:solidFill>
+              <a:latin typeface="Times New Roman" panose="02020603050405020304" pitchFamily="18" charset="0"/>
+            </a:endParaRPr>
+          </a:p>
+        </p:txBody>
+      </p:sp>
+      <p:sp>
+        <p:nvSpPr>
+          <p:cNvPr id="33" name="text_030">
+            <a:extLst>
+              <a:ext uri="{FF2B5EF4-FFF2-40B4-BE49-F238E27FC236}">
+                <a16:creationId xmlns:a16="http://schemas.microsoft.com/office/drawing/2014/main" id="{BCB6933A-769C-8F87-A0C4-36B37ABD7130}"/>
+              </a:ext>
+            </a:extLst>
+          </p:cNvPr>
+          <p:cNvSpPr txBox="1"/>
+          <p:nvPr/>
+        </p:nvSpPr>
+        <p:spPr>
+          <a:xfrm>
+            <a:off x="6032500" y="2400299"/>
+            <a:ext cx="3251200" cy="330200"/>
+          </a:xfrm>
+          <a:prstGeom prst="rect">
+            <a:avLst/>
+          </a:prstGeom>
+          <a:noFill/>
+        </p:spPr>
+        <p:txBody>
+          <a:bodyPr vert="horz" wrap="square" lIns="0" tIns="0" rIns="0" bIns="0" rtlCol="0" anchor="ctr">
+            <a:noAutofit/>
+          </a:bodyPr>
+          <a:lstStyle/>
+          <a:p>
+            <a:pPr algn="ctr"/>
+            <a:r>
+              <a:rPr lang="en-US" altLang="zh-CN" sz="1500" i="1">
+                <a:solidFill>
+                  <a:srgbClr val="181818"/>
+                </a:solidFill>
+                <a:latin typeface="Times New Roman" panose="02020603050405020304" pitchFamily="18" charset="0"/>
+              </a:rPr>
+              <a:t>Visual + text conditioning</a:t>
+            </a:r>
+            <a:endParaRPr lang="zh-CN" altLang="en-US" sz="1500" i="1">
+              <a:solidFill>
+                <a:srgbClr val="181818"/>
+              </a:solidFill>
+              <a:latin typeface="Times New Roman" panose="02020603050405020304" pitchFamily="18" charset="0"/>
+            </a:endParaRPr>
+          </a:p>
+        </p:txBody>
+      </p:sp>
+      <p:cxnSp>
+        <p:nvCxnSpPr>
+          <p:cNvPr id="34" name="line_031">
+            <a:extLst>
+              <a:ext uri="{FF2B5EF4-FFF2-40B4-BE49-F238E27FC236}">
+                <a16:creationId xmlns:a16="http://schemas.microsoft.com/office/drawing/2014/main" id="{8A5E6FC9-199F-F2EE-096F-F327F4B79A36}"/>
+              </a:ext>
+            </a:extLst>
+          </p:cNvPr>
+          <p:cNvCxnSpPr/>
+          <p:nvPr/>
+        </p:nvCxnSpPr>
+        <p:spPr>
+          <a:xfrm>
+            <a:off x="9804400" y="1841500"/>
+            <a:ext cx="1079500" cy="0"/>
+          </a:xfrm>
+          <a:prstGeom prst="line">
+            <a:avLst/>
+          </a:prstGeom>
+          <a:ln w="15240">
+            <a:solidFill>
+              <a:srgbClr val="202020"/>
+            </a:solidFill>
+          </a:ln>
+        </p:spPr>
+        <p:style>
+          <a:lnRef idx="2">
+            <a:schemeClr val="accent1"/>
+          </a:lnRef>
+          <a:fillRef idx="0">
+            <a:schemeClr val="accent1"/>
+          </a:fillRef>
+          <a:effectRef idx="1">
+            <a:schemeClr val="accent1"/>
+          </a:effectRef>
+          <a:fontRef idx="minor">
+            <a:schemeClr val="tx1"/>
+          </a:fontRef>
+        </p:style>
+      </p:cxnSp>
+      <p:cxnSp>
+        <p:nvCxnSpPr>
+          <p:cNvPr id="35" name="line_032">
+            <a:extLst>
+              <a:ext uri="{FF2B5EF4-FFF2-40B4-BE49-F238E27FC236}">
+                <a16:creationId xmlns:a16="http://schemas.microsoft.com/office/drawing/2014/main" id="{0A77C0D0-28D6-D7DA-8F37-B93E32329131}"/>
+              </a:ext>
+            </a:extLst>
+          </p:cNvPr>
+          <p:cNvCxnSpPr/>
+          <p:nvPr/>
+        </p:nvCxnSpPr>
+        <p:spPr>
+          <a:xfrm>
+            <a:off x="10883900" y="1841500"/>
+            <a:ext cx="0" cy="1244600"/>
+          </a:xfrm>
+          <a:prstGeom prst="line">
+            <a:avLst/>
+          </a:prstGeom>
+          <a:ln w="15240">
+            <a:solidFill>
+              <a:srgbClr val="202020"/>
+            </a:solidFill>
+            <a:tailEnd type="triangle" w="sm" len="sm"/>
+          </a:ln>
+        </p:spPr>
+        <p:style>
+          <a:lnRef idx="2">
+            <a:schemeClr val="accent1"/>
+          </a:lnRef>
+          <a:fillRef idx="0">
+            <a:schemeClr val="accent1"/>
+          </a:fillRef>
+          <a:effectRef idx="1">
+            <a:schemeClr val="accent1"/>
+          </a:effectRef>
+          <a:fontRef idx="minor">
+            <a:schemeClr val="tx1"/>
+          </a:fontRef>
+        </p:style>
+      </p:cxnSp>
+      <p:sp>
+        <p:nvSpPr>
+          <p:cNvPr id="36" name="roundrect_033">
+            <a:extLst>
+              <a:ext uri="{FF2B5EF4-FFF2-40B4-BE49-F238E27FC236}">
+                <a16:creationId xmlns:a16="http://schemas.microsoft.com/office/drawing/2014/main" id="{B131D652-B034-9FAF-4E88-9F641B2A4FD7}"/>
+              </a:ext>
+            </a:extLst>
+          </p:cNvPr>
+          <p:cNvSpPr/>
+          <p:nvPr/>
+        </p:nvSpPr>
+        <p:spPr>
+          <a:xfrm>
+            <a:off x="5524500" y="3619500"/>
+            <a:ext cx="2374900" cy="990600"/>
+          </a:xfrm>
+          <a:prstGeom prst="roundRect">
+            <a:avLst>
+              <a:gd name="adj" fmla="val 8000"/>
+            </a:avLst>
+          </a:prstGeom>
+          <a:solidFill>
+            <a:srgbClr val="E0EEEE"/>
+          </a:solidFill>
+          <a:ln w="12700">
+            <a:solidFill>
+              <a:srgbClr val="181818"/>
+            </a:solidFill>
+          </a:ln>
+        </p:spPr>
+        <p:style>
+          <a:lnRef idx="2">
+            <a:schemeClr val="accent1">
+              <a:shade val="15000"/>
+            </a:schemeClr>
+          </a:lnRef>
+          <a:fillRef idx="1">
+            <a:schemeClr val="accent1"/>
+          </a:fillRef>
+          <a:effectRef idx="0">
+            <a:schemeClr val="accent1"/>
+          </a:effectRef>
+          <a:fontRef idx="minor">
+            <a:schemeClr val="lt1"/>
+          </a:fontRef>
+        </p:style>
+        <p:txBody>
+          <a:bodyPr rtlCol="0" anchor="ctr"/>
+          <a:lstStyle/>
+          <a:p>
+            <a:pPr algn="ctr"/>
+            <a:endParaRPr lang="zh-CN" altLang="en-US"/>
+          </a:p>
+        </p:txBody>
+      </p:sp>
+      <p:sp>
+        <p:nvSpPr>
+          <p:cNvPr id="37" name="text_034">
+            <a:extLst>
+              <a:ext uri="{FF2B5EF4-FFF2-40B4-BE49-F238E27FC236}">
+                <a16:creationId xmlns:a16="http://schemas.microsoft.com/office/drawing/2014/main" id="{4AD99B4E-C718-3E41-DF15-E0CBE4A7EEB8}"/>
+              </a:ext>
+            </a:extLst>
+          </p:cNvPr>
+          <p:cNvSpPr txBox="1"/>
+          <p:nvPr/>
+        </p:nvSpPr>
+        <p:spPr>
+          <a:xfrm>
+            <a:off x="5651500" y="3708399"/>
+            <a:ext cx="2120900" cy="368300"/>
+          </a:xfrm>
+          <a:prstGeom prst="rect">
+            <a:avLst/>
+          </a:prstGeom>
+          <a:noFill/>
+        </p:spPr>
+        <p:txBody>
+          <a:bodyPr vert="horz" wrap="square" lIns="0" tIns="0" rIns="0" bIns="0" rtlCol="0" anchor="ctr">
+            <a:noAutofit/>
+          </a:bodyPr>
+          <a:lstStyle/>
+          <a:p>
+            <a:pPr algn="ctr"/>
+            <a:r>
+              <a:rPr lang="en-US" altLang="zh-CN" b="1">
+                <a:solidFill>
+                  <a:srgbClr val="181818"/>
+                </a:solidFill>
+                <a:latin typeface="Times New Roman" panose="02020603050405020304" pitchFamily="18" charset="0"/>
+              </a:rPr>
+              <a:t>Image encoding</a:t>
+            </a:r>
+            <a:endParaRPr lang="zh-CN" altLang="en-US" b="1">
+              <a:solidFill>
+                <a:srgbClr val="181818"/>
+              </a:solidFill>
+              <a:latin typeface="Times New Roman" panose="02020603050405020304" pitchFamily="18" charset="0"/>
+            </a:endParaRPr>
+          </a:p>
+        </p:txBody>
+      </p:sp>
+      <p:sp>
+        <p:nvSpPr>
+          <p:cNvPr id="38" name="text_035">
+            <a:extLst>
+              <a:ext uri="{FF2B5EF4-FFF2-40B4-BE49-F238E27FC236}">
+                <a16:creationId xmlns:a16="http://schemas.microsoft.com/office/drawing/2014/main" id="{554EC863-FCEC-530B-7C28-AC300DD5E7E5}"/>
+              </a:ext>
+            </a:extLst>
+          </p:cNvPr>
+          <p:cNvSpPr txBox="1"/>
+          <p:nvPr/>
+        </p:nvSpPr>
+        <p:spPr>
+          <a:xfrm>
+            <a:off x="5651500" y="4102099"/>
+            <a:ext cx="2120900" cy="431800"/>
+          </a:xfrm>
+          <a:prstGeom prst="rect">
+            <a:avLst/>
+          </a:prstGeom>
+          <a:noFill/>
+        </p:spPr>
+        <p:txBody>
+          <a:bodyPr vert="horz" wrap="square" lIns="0" tIns="0" rIns="0" bIns="0" rtlCol="0" anchor="ctr">
+            <a:noAutofit/>
+          </a:bodyPr>
+          <a:lstStyle/>
+          <a:p>
+            <a:pPr algn="ctr"/>
+            <a:r>
+              <a:rPr lang="en-US" altLang="zh-CN" sz="1400">
+                <a:solidFill>
+                  <a:srgbClr val="181818"/>
+                </a:solidFill>
+                <a:latin typeface="Times New Roman" panose="02020603050405020304" pitchFamily="18" charset="0"/>
+              </a:rPr>
+              <a:t>Scale + Qwen VAE</a:t>
+            </a:r>
+            <a:endParaRPr lang="zh-CN" altLang="en-US" sz="1400">
+              <a:solidFill>
+                <a:srgbClr val="181818"/>
+              </a:solidFill>
+              <a:latin typeface="Times New Roman" panose="02020603050405020304" pitchFamily="18" charset="0"/>
+            </a:endParaRPr>
+          </a:p>
+        </p:txBody>
+      </p:sp>
+      <p:cxnSp>
+        <p:nvCxnSpPr>
+          <p:cNvPr id="39" name="line_036">
+            <a:extLst>
+              <a:ext uri="{FF2B5EF4-FFF2-40B4-BE49-F238E27FC236}">
+                <a16:creationId xmlns:a16="http://schemas.microsoft.com/office/drawing/2014/main" id="{DB098281-EF10-4C39-214B-044A94376588}"/>
+              </a:ext>
+            </a:extLst>
+          </p:cNvPr>
+          <p:cNvCxnSpPr/>
+          <p:nvPr/>
+        </p:nvCxnSpPr>
+        <p:spPr>
+          <a:xfrm>
+            <a:off x="5105400" y="4152900"/>
+            <a:ext cx="419100" cy="0"/>
+          </a:xfrm>
+          <a:prstGeom prst="line">
+            <a:avLst/>
+          </a:prstGeom>
+          <a:ln w="13970">
+            <a:solidFill>
+              <a:srgbClr val="202020"/>
+            </a:solidFill>
+            <a:tailEnd type="triangle" w="sm" len="sm"/>
+          </a:ln>
+        </p:spPr>
+        <p:style>
+          <a:lnRef idx="2">
+            <a:schemeClr val="accent1"/>
+          </a:lnRef>
+          <a:fillRef idx="0">
+            <a:schemeClr val="accent1"/>
+          </a:fillRef>
+          <a:effectRef idx="1">
+            <a:schemeClr val="accent1"/>
+          </a:effectRef>
+          <a:fontRef idx="minor">
+            <a:schemeClr val="tx1"/>
+          </a:fontRef>
+        </p:style>
+      </p:cxnSp>
+      <p:cxnSp>
+        <p:nvCxnSpPr>
+          <p:cNvPr id="40" name="line_037">
+            <a:extLst>
+              <a:ext uri="{FF2B5EF4-FFF2-40B4-BE49-F238E27FC236}">
+                <a16:creationId xmlns:a16="http://schemas.microsoft.com/office/drawing/2014/main" id="{7729D3B9-0961-B5C7-447B-9770038AE116}"/>
+              </a:ext>
+            </a:extLst>
+          </p:cNvPr>
+          <p:cNvCxnSpPr/>
+          <p:nvPr/>
+        </p:nvCxnSpPr>
+        <p:spPr>
+          <a:xfrm>
+            <a:off x="7899400" y="4152900"/>
+            <a:ext cx="774700" cy="0"/>
+          </a:xfrm>
+          <a:prstGeom prst="line">
+            <a:avLst/>
+          </a:prstGeom>
+          <a:ln w="16510">
+            <a:solidFill>
+              <a:srgbClr val="202020"/>
+            </a:solidFill>
+            <a:tailEnd type="triangle" w="sm" len="sm"/>
+          </a:ln>
+        </p:spPr>
+        <p:style>
+          <a:lnRef idx="2">
+            <a:schemeClr val="accent1"/>
+          </a:lnRef>
+          <a:fillRef idx="0">
+            <a:schemeClr val="accent1"/>
+          </a:fillRef>
+          <a:effectRef idx="1">
+            <a:schemeClr val="accent1"/>
+          </a:effectRef>
+          <a:fontRef idx="minor">
+            <a:schemeClr val="tx1"/>
+          </a:fontRef>
+        </p:style>
+      </p:cxnSp>
+      <p:sp>
+        <p:nvSpPr>
+          <p:cNvPr id="41" name="text_038">
+            <a:extLst>
+              <a:ext uri="{FF2B5EF4-FFF2-40B4-BE49-F238E27FC236}">
+                <a16:creationId xmlns:a16="http://schemas.microsoft.com/office/drawing/2014/main" id="{B960C9B8-46E0-C8D0-EDC2-4D2CEB0843F0}"/>
+              </a:ext>
+            </a:extLst>
+          </p:cNvPr>
+          <p:cNvSpPr txBox="1"/>
+          <p:nvPr/>
+        </p:nvSpPr>
+        <p:spPr>
+          <a:xfrm>
+            <a:off x="5562600" y="4698999"/>
+            <a:ext cx="2273300" cy="317500"/>
+          </a:xfrm>
+          <a:prstGeom prst="rect">
+            <a:avLst/>
+          </a:prstGeom>
+          <a:noFill/>
+        </p:spPr>
+        <p:txBody>
+          <a:bodyPr vert="horz" wrap="square" lIns="0" tIns="0" rIns="0" bIns="0" rtlCol="0" anchor="ctr">
+            <a:noAutofit/>
+          </a:bodyPr>
+          <a:lstStyle/>
+          <a:p>
+            <a:pPr algn="ctr"/>
+            <a:r>
+              <a:rPr lang="en-US" altLang="zh-CN" sz="1500" i="1">
+                <a:solidFill>
+                  <a:srgbClr val="181818"/>
+                </a:solidFill>
+                <a:latin typeface="Times New Roman" panose="02020603050405020304" pitchFamily="18" charset="0"/>
+              </a:rPr>
+              <a:t>Reference latent</a:t>
+            </a:r>
+            <a:endParaRPr lang="zh-CN" altLang="en-US" sz="1500" i="1">
+              <a:solidFill>
+                <a:srgbClr val="181818"/>
+              </a:solidFill>
+              <a:latin typeface="Times New Roman" panose="02020603050405020304" pitchFamily="18" charset="0"/>
+            </a:endParaRPr>
+          </a:p>
+        </p:txBody>
+      </p:sp>
+      <p:sp>
+        <p:nvSpPr>
+          <p:cNvPr id="42" name="roundrect_039">
+            <a:extLst>
+              <a:ext uri="{FF2B5EF4-FFF2-40B4-BE49-F238E27FC236}">
+                <a16:creationId xmlns:a16="http://schemas.microsoft.com/office/drawing/2014/main" id="{B9B56811-6077-5BC2-64A4-D3BC6547E456}"/>
+              </a:ext>
+            </a:extLst>
+          </p:cNvPr>
+          <p:cNvSpPr/>
+          <p:nvPr/>
+        </p:nvSpPr>
+        <p:spPr>
+          <a:xfrm>
+            <a:off x="8674100" y="3086100"/>
+            <a:ext cx="4419600" cy="2578100"/>
+          </a:xfrm>
+          <a:prstGeom prst="roundRect">
+            <a:avLst>
+              <a:gd name="adj" fmla="val 8000"/>
+            </a:avLst>
+          </a:prstGeom>
+          <a:solidFill>
+            <a:srgbClr val="BFD3E8"/>
+          </a:solidFill>
+          <a:ln w="15240">
+            <a:solidFill>
+              <a:srgbClr val="536F8E"/>
+            </a:solidFill>
+          </a:ln>
+        </p:spPr>
+        <p:style>
+          <a:lnRef idx="2">
+            <a:schemeClr val="accent1">
+              <a:shade val="15000"/>
+            </a:schemeClr>
+          </a:lnRef>
+          <a:fillRef idx="1">
+            <a:schemeClr val="accent1"/>
+          </a:fillRef>
+          <a:effectRef idx="0">
+            <a:schemeClr val="accent1"/>
+          </a:effectRef>
+          <a:fontRef idx="minor">
+            <a:schemeClr val="lt1"/>
+          </a:fontRef>
+        </p:style>
+        <p:txBody>
+          <a:bodyPr rtlCol="0" anchor="ctr"/>
+          <a:lstStyle/>
+          <a:p>
+            <a:pPr algn="ctr"/>
+            <a:endParaRPr lang="zh-CN" altLang="en-US"/>
+          </a:p>
+        </p:txBody>
+      </p:sp>
+      <p:sp>
+        <p:nvSpPr>
+          <p:cNvPr id="43" name="text_040">
+            <a:extLst>
+              <a:ext uri="{FF2B5EF4-FFF2-40B4-BE49-F238E27FC236}">
+                <a16:creationId xmlns:a16="http://schemas.microsoft.com/office/drawing/2014/main" id="{27B86554-3116-EE99-C73F-BED31727DDAF}"/>
+              </a:ext>
+            </a:extLst>
+          </p:cNvPr>
+          <p:cNvSpPr txBox="1"/>
+          <p:nvPr/>
+        </p:nvSpPr>
+        <p:spPr>
+          <a:xfrm>
+            <a:off x="8851900" y="3187699"/>
+            <a:ext cx="4064000" cy="406400"/>
+          </a:xfrm>
+          <a:prstGeom prst="rect">
+            <a:avLst/>
+          </a:prstGeom>
+          <a:noFill/>
+        </p:spPr>
+        <p:txBody>
+          <a:bodyPr vert="horz" wrap="square" lIns="0" tIns="0" rIns="0" bIns="0" rtlCol="0" anchor="ctr">
+            <a:noAutofit/>
+          </a:bodyPr>
+          <a:lstStyle/>
+          <a:p>
+            <a:pPr algn="ctr"/>
+            <a:r>
+              <a:rPr lang="en-US" altLang="zh-CN" sz="2200" b="1">
+                <a:solidFill>
+                  <a:srgbClr val="181818"/>
+                </a:solidFill>
+                <a:latin typeface="Times New Roman" panose="02020603050405020304" pitchFamily="18" charset="0"/>
+              </a:rPr>
+              <a:t>Qwen-Image-Edit-2509</a:t>
+            </a:r>
+            <a:endParaRPr lang="zh-CN" altLang="en-US" sz="2200" b="1">
+              <a:solidFill>
+                <a:srgbClr val="181818"/>
+              </a:solidFill>
+              <a:latin typeface="Times New Roman" panose="02020603050405020304" pitchFamily="18" charset="0"/>
+            </a:endParaRPr>
+          </a:p>
+        </p:txBody>
+      </p:sp>
+      <p:sp>
+        <p:nvSpPr>
+          <p:cNvPr id="44" name="text_041">
+            <a:extLst>
+              <a:ext uri="{FF2B5EF4-FFF2-40B4-BE49-F238E27FC236}">
+                <a16:creationId xmlns:a16="http://schemas.microsoft.com/office/drawing/2014/main" id="{49758A34-5981-CDB1-3D82-4EA58C934946}"/>
+              </a:ext>
+            </a:extLst>
+          </p:cNvPr>
+          <p:cNvSpPr txBox="1"/>
+          <p:nvPr/>
+        </p:nvSpPr>
+        <p:spPr>
+          <a:xfrm>
+            <a:off x="8953500" y="3632199"/>
+            <a:ext cx="3860800" cy="342900"/>
+          </a:xfrm>
+          <a:prstGeom prst="rect">
+            <a:avLst/>
+          </a:prstGeom>
+          <a:noFill/>
+        </p:spPr>
+        <p:txBody>
+          <a:bodyPr vert="horz" wrap="square" lIns="0" tIns="0" rIns="0" bIns="0" rtlCol="0" anchor="ctr">
+            <a:noAutofit/>
+          </a:bodyPr>
+          <a:lstStyle/>
+          <a:p>
+            <a:pPr algn="ctr"/>
+            <a:r>
+              <a:rPr lang="en-US" altLang="zh-CN" sz="1700">
+                <a:solidFill>
+                  <a:srgbClr val="181818"/>
+                </a:solidFill>
+                <a:latin typeface="Times New Roman" panose="02020603050405020304" pitchFamily="18" charset="0"/>
+              </a:rPr>
+              <a:t>FP8 diffusion backbone</a:t>
+            </a:r>
+            <a:endParaRPr lang="zh-CN" altLang="en-US" sz="1700">
+              <a:solidFill>
+                <a:srgbClr val="181818"/>
+              </a:solidFill>
+              <a:latin typeface="Times New Roman" panose="02020603050405020304" pitchFamily="18" charset="0"/>
+            </a:endParaRPr>
+          </a:p>
+        </p:txBody>
+      </p:sp>
+      <p:sp>
+        <p:nvSpPr>
+          <p:cNvPr id="45" name="rect_042">
+            <a:extLst>
+              <a:ext uri="{FF2B5EF4-FFF2-40B4-BE49-F238E27FC236}">
+                <a16:creationId xmlns:a16="http://schemas.microsoft.com/office/drawing/2014/main" id="{E7353F7E-3971-C7E3-CEAD-254F20DCBFEC}"/>
+              </a:ext>
+            </a:extLst>
+          </p:cNvPr>
+          <p:cNvSpPr/>
+          <p:nvPr/>
+        </p:nvSpPr>
+        <p:spPr>
+          <a:xfrm>
+            <a:off x="8915400" y="4165600"/>
+            <a:ext cx="3937000" cy="685800"/>
+          </a:xfrm>
+          <a:prstGeom prst="rect">
+            <a:avLst/>
+          </a:prstGeom>
+          <a:solidFill>
+            <a:srgbClr val="F7FAFD"/>
+          </a:solidFill>
+          <a:ln w="8890">
+            <a:solidFill>
+              <a:srgbClr val="536F8E"/>
+            </a:solidFill>
+          </a:ln>
+        </p:spPr>
+        <p:style>
+          <a:lnRef idx="2">
+            <a:schemeClr val="accent1">
+              <a:shade val="15000"/>
+            </a:schemeClr>
+          </a:lnRef>
+          <a:fillRef idx="1">
+            <a:schemeClr val="accent1"/>
+          </a:fillRef>
+          <a:effectRef idx="0">
+            <a:schemeClr val="accent1"/>
+          </a:effectRef>
+          <a:fontRef idx="minor">
+            <a:schemeClr val="lt1"/>
+          </a:fontRef>
+        </p:style>
+        <p:txBody>
+          <a:bodyPr rtlCol="0" anchor="ctr"/>
+          <a:lstStyle/>
+          <a:p>
+            <a:pPr algn="ctr"/>
+            <a:endParaRPr lang="zh-CN" altLang="en-US"/>
+          </a:p>
+        </p:txBody>
+      </p:sp>
+      <p:sp>
+        <p:nvSpPr>
+          <p:cNvPr id="46" name="text_043">
+            <a:extLst>
+              <a:ext uri="{FF2B5EF4-FFF2-40B4-BE49-F238E27FC236}">
+                <a16:creationId xmlns:a16="http://schemas.microsoft.com/office/drawing/2014/main" id="{40351A26-1E6D-ABC1-4D50-A2940EBABC7F}"/>
+              </a:ext>
+            </a:extLst>
+          </p:cNvPr>
+          <p:cNvSpPr txBox="1"/>
+          <p:nvPr/>
+        </p:nvSpPr>
+        <p:spPr>
+          <a:xfrm>
+            <a:off x="9042400" y="4267199"/>
+            <a:ext cx="3683000" cy="444500"/>
+          </a:xfrm>
+          <a:prstGeom prst="rect">
+            <a:avLst/>
+          </a:prstGeom>
+          <a:noFill/>
+        </p:spPr>
+        <p:txBody>
+          <a:bodyPr vert="horz" wrap="square" lIns="0" tIns="0" rIns="0" bIns="0" rtlCol="0" anchor="ctr">
+            <a:noAutofit/>
+          </a:bodyPr>
+          <a:lstStyle/>
+          <a:p>
+            <a:pPr algn="ctr"/>
+            <a:r>
+              <a:rPr lang="en-US" altLang="zh-CN" sz="2000" b="1">
+                <a:solidFill>
+                  <a:srgbClr val="181818"/>
+                </a:solidFill>
+                <a:latin typeface="Times New Roman" panose="02020603050405020304" pitchFamily="18" charset="0"/>
+              </a:rPr>
+              <a:t>Conditioned denoising</a:t>
+            </a:r>
+            <a:endParaRPr lang="zh-CN" altLang="en-US" sz="2000" b="1">
+              <a:solidFill>
+                <a:srgbClr val="181818"/>
+              </a:solidFill>
+              <a:latin typeface="Times New Roman" panose="02020603050405020304" pitchFamily="18" charset="0"/>
+            </a:endParaRPr>
+          </a:p>
+        </p:txBody>
+      </p:sp>
+      <p:sp>
+        <p:nvSpPr>
+          <p:cNvPr id="47" name="text_044">
+            <a:extLst>
+              <a:ext uri="{FF2B5EF4-FFF2-40B4-BE49-F238E27FC236}">
+                <a16:creationId xmlns:a16="http://schemas.microsoft.com/office/drawing/2014/main" id="{DE8F69D1-56BE-6A99-55F1-E3945ED628F5}"/>
+              </a:ext>
+            </a:extLst>
+          </p:cNvPr>
+          <p:cNvSpPr txBox="1"/>
+          <p:nvPr/>
+        </p:nvSpPr>
+        <p:spPr>
+          <a:xfrm>
+            <a:off x="8966200" y="5092699"/>
+            <a:ext cx="3835400" cy="304800"/>
+          </a:xfrm>
+          <a:prstGeom prst="rect">
+            <a:avLst/>
+          </a:prstGeom>
+          <a:noFill/>
+        </p:spPr>
+        <p:txBody>
+          <a:bodyPr vert="horz" wrap="square" lIns="0" tIns="0" rIns="0" bIns="0" rtlCol="0" anchor="ctr">
+            <a:noAutofit/>
+          </a:bodyPr>
+          <a:lstStyle/>
+          <a:p>
+            <a:pPr algn="ctr"/>
+            <a:r>
+              <a:rPr lang="en-US" altLang="zh-CN" sz="1400">
+                <a:solidFill>
+                  <a:srgbClr val="181818"/>
                 </a:solidFill>
                 <a:latin typeface="Arial" panose="020B0604020202020204" pitchFamily="34" charset="0"/>
               </a:rPr>
-              <a:t>VAE decode</a:t>
-            </a:r>
-            <a:endParaRPr lang="zh-CN" altLang="en-US" sz="1200" b="1">
+              <a:t>KSampler · Euler / simple</a:t>
+            </a:r>
+            <a:endParaRPr lang="zh-CN" altLang="en-US" sz="1400">
               <a:solidFill>
-                <a:srgbClr val="266A71"/>
+                <a:srgbClr val="181818"/>
               </a:solidFill>
               <a:latin typeface="Arial" panose="020B0604020202020204" pitchFamily="34" charset="0"/>
             </a:endParaRPr>
@@ -8159,10 +5863,66 @@
       </p:sp>
       <p:sp>
         <p:nvSpPr>
-          <p:cNvPr id="91" name="text_089">
-            <a:extLst>
-              <a:ext uri="{FF2B5EF4-FFF2-40B4-BE49-F238E27FC236}">
-                <a16:creationId xmlns:a16="http://schemas.microsoft.com/office/drawing/2014/main" id="{23802949-2BE1-F745-EC21-79D831F9C40D}"/>
+          <p:cNvPr id="48" name="roundrect_045">
+            <a:extLst>
+              <a:ext uri="{FF2B5EF4-FFF2-40B4-BE49-F238E27FC236}">
+                <a16:creationId xmlns:a16="http://schemas.microsoft.com/office/drawing/2014/main" id="{86E7244C-651F-AC33-5A40-BEC330F95255}"/>
+              </a:ext>
+            </a:extLst>
+          </p:cNvPr>
+          <p:cNvSpPr/>
+          <p:nvPr/>
+        </p:nvSpPr>
+        <p:spPr>
+          <a:xfrm>
+            <a:off x="8674100" y="6311900"/>
+            <a:ext cx="4419600" cy="939800"/>
+          </a:xfrm>
+          <a:prstGeom prst="roundRect">
+            <a:avLst>
+              <a:gd name="adj" fmla="val 8000"/>
+            </a:avLst>
+          </a:prstGeom>
+          <a:solidFill>
+            <a:srgbClr val="F3F0E7"/>
+          </a:solidFill>
+          <a:ln w="12700">
+            <a:solidFill>
+              <a:srgbClr val="181818"/>
+            </a:solidFill>
+          </a:ln>
+        </p:spPr>
+        <p:style>
+          <a:lnRef idx="2">
+            <a:schemeClr val="accent1">
+              <a:shade val="15000"/>
+            </a:schemeClr>
+          </a:lnRef>
+          <a:fillRef idx="1">
+            <a:schemeClr val="accent1"/>
+          </a:fillRef>
+          <a:effectRef idx="0">
+            <a:schemeClr val="accent1"/>
+          </a:effectRef>
+          <a:fontRef idx="minor">
+            <a:schemeClr val="lt1"/>
+          </a:fontRef>
+        </p:style>
+        <p:txBody>
+          <a:bodyPr rtlCol="0" anchor="ctr"/>
+          <a:lstStyle/>
+          <a:p>
+            <a:pPr algn="ctr"/>
+            <a:endParaRPr lang="zh-CN" altLang="en-US"/>
+          </a:p>
+        </p:txBody>
+      </p:sp>
+      <p:sp>
+        <p:nvSpPr>
+          <p:cNvPr id="49" name="text_046">
+            <a:extLst>
+              <a:ext uri="{FF2B5EF4-FFF2-40B4-BE49-F238E27FC236}">
+                <a16:creationId xmlns:a16="http://schemas.microsoft.com/office/drawing/2014/main" id="{6919236E-6053-C46E-4035-A061DCD02D47}"/>
               </a:ext>
             </a:extLst>
           </p:cNvPr>
@@ -8171,8 +5931,8 @@
         </p:nvSpPr>
         <p:spPr>
           <a:xfrm>
-            <a:off x="7239000" y="5308599"/>
-            <a:ext cx="3632200" cy="330200"/>
+            <a:off x="8801100" y="6400799"/>
+            <a:ext cx="4165600" cy="368300"/>
           </a:xfrm>
           <a:prstGeom prst="rect">
             <a:avLst/>
@@ -8185,6 +5945,644 @@
           </a:bodyPr>
           <a:lstStyle/>
           <a:p>
+            <a:pPr algn="ctr"/>
+            <a:r>
+              <a:rPr lang="en-US" altLang="zh-CN" sz="1900" b="1">
+                <a:solidFill>
+                  <a:srgbClr val="181818"/>
+                </a:solidFill>
+                <a:latin typeface="Times New Roman" panose="02020603050405020304" pitchFamily="18" charset="0"/>
+              </a:rPr>
+              <a:t>Sampling configuration</a:t>
+            </a:r>
+            <a:endParaRPr lang="zh-CN" altLang="en-US" sz="1900" b="1">
+              <a:solidFill>
+                <a:srgbClr val="181818"/>
+              </a:solidFill>
+              <a:latin typeface="Times New Roman" panose="02020603050405020304" pitchFamily="18" charset="0"/>
+            </a:endParaRPr>
+          </a:p>
+        </p:txBody>
+      </p:sp>
+      <p:sp>
+        <p:nvSpPr>
+          <p:cNvPr id="50" name="text_047">
+            <a:extLst>
+              <a:ext uri="{FF2B5EF4-FFF2-40B4-BE49-F238E27FC236}">
+                <a16:creationId xmlns:a16="http://schemas.microsoft.com/office/drawing/2014/main" id="{D7948D9D-4BBC-ABBE-C4EB-9CB68FB3FCC7}"/>
+              </a:ext>
+            </a:extLst>
+          </p:cNvPr>
+          <p:cNvSpPr txBox="1"/>
+          <p:nvPr/>
+        </p:nvSpPr>
+        <p:spPr>
+          <a:xfrm>
+            <a:off x="8801100" y="6794499"/>
+            <a:ext cx="4165600" cy="381000"/>
+          </a:xfrm>
+          <a:prstGeom prst="rect">
+            <a:avLst/>
+          </a:prstGeom>
+          <a:noFill/>
+        </p:spPr>
+        <p:txBody>
+          <a:bodyPr vert="horz" wrap="square" lIns="0" tIns="0" rIns="0" bIns="0" rtlCol="0" anchor="ctr">
+            <a:noAutofit/>
+          </a:bodyPr>
+          <a:lstStyle/>
+          <a:p>
+            <a:pPr algn="ctr"/>
+            <a:r>
+              <a:rPr lang="en-US" altLang="zh-CN" sz="1400">
+                <a:solidFill>
+                  <a:srgbClr val="181818"/>
+                </a:solidFill>
+                <a:latin typeface="Times New Roman" panose="02020603050405020304" pitchFamily="18" charset="0"/>
+              </a:rPr>
+              <a:t>Standard / optional Lightning path</a:t>
+            </a:r>
+            <a:endParaRPr lang="zh-CN" altLang="en-US" sz="1400">
+              <a:solidFill>
+                <a:srgbClr val="181818"/>
+              </a:solidFill>
+              <a:latin typeface="Times New Roman" panose="02020603050405020304" pitchFamily="18" charset="0"/>
+            </a:endParaRPr>
+          </a:p>
+        </p:txBody>
+      </p:sp>
+      <p:cxnSp>
+        <p:nvCxnSpPr>
+          <p:cNvPr id="51" name="line_048">
+            <a:extLst>
+              <a:ext uri="{FF2B5EF4-FFF2-40B4-BE49-F238E27FC236}">
+                <a16:creationId xmlns:a16="http://schemas.microsoft.com/office/drawing/2014/main" id="{58D106B3-C3C3-237F-26DA-A10C87838624}"/>
+              </a:ext>
+            </a:extLst>
+          </p:cNvPr>
+          <p:cNvCxnSpPr/>
+          <p:nvPr/>
+        </p:nvCxnSpPr>
+        <p:spPr>
+          <a:xfrm flipV="1">
+            <a:off x="10883900" y="5664200"/>
+            <a:ext cx="0" cy="647700"/>
+          </a:xfrm>
+          <a:prstGeom prst="line">
+            <a:avLst/>
+          </a:prstGeom>
+          <a:ln w="12700">
+            <a:solidFill>
+              <a:srgbClr val="181818"/>
+            </a:solidFill>
+            <a:tailEnd type="triangle" w="sm" len="sm"/>
+          </a:ln>
+        </p:spPr>
+        <p:style>
+          <a:lnRef idx="2">
+            <a:schemeClr val="accent1"/>
+          </a:lnRef>
+          <a:fillRef idx="0">
+            <a:schemeClr val="accent1"/>
+          </a:fillRef>
+          <a:effectRef idx="1">
+            <a:schemeClr val="accent1"/>
+          </a:effectRef>
+          <a:fontRef idx="minor">
+            <a:schemeClr val="tx1"/>
+          </a:fontRef>
+        </p:style>
+      </p:cxnSp>
+      <p:sp>
+        <p:nvSpPr>
+          <p:cNvPr id="52" name="roundrect_049">
+            <a:extLst>
+              <a:ext uri="{FF2B5EF4-FFF2-40B4-BE49-F238E27FC236}">
+                <a16:creationId xmlns:a16="http://schemas.microsoft.com/office/drawing/2014/main" id="{0D42174E-DDCA-4430-40EE-19E8318A28A4}"/>
+              </a:ext>
+            </a:extLst>
+          </p:cNvPr>
+          <p:cNvSpPr/>
+          <p:nvPr/>
+        </p:nvSpPr>
+        <p:spPr>
+          <a:xfrm>
+            <a:off x="5562600" y="6261100"/>
+            <a:ext cx="2324100" cy="990600"/>
+          </a:xfrm>
+          <a:prstGeom prst="roundRect">
+            <a:avLst>
+              <a:gd name="adj" fmla="val 8000"/>
+            </a:avLst>
+          </a:prstGeom>
+          <a:solidFill>
+            <a:srgbClr val="F4F4F4"/>
+          </a:solidFill>
+          <a:ln w="12700">
+            <a:solidFill>
+              <a:srgbClr val="181818"/>
+            </a:solidFill>
+          </a:ln>
+        </p:spPr>
+        <p:style>
+          <a:lnRef idx="2">
+            <a:schemeClr val="accent1">
+              <a:shade val="15000"/>
+            </a:schemeClr>
+          </a:lnRef>
+          <a:fillRef idx="1">
+            <a:schemeClr val="accent1"/>
+          </a:fillRef>
+          <a:effectRef idx="0">
+            <a:schemeClr val="accent1"/>
+          </a:effectRef>
+          <a:fontRef idx="minor">
+            <a:schemeClr val="lt1"/>
+          </a:fontRef>
+        </p:style>
+        <p:txBody>
+          <a:bodyPr rtlCol="0" anchor="ctr"/>
+          <a:lstStyle/>
+          <a:p>
+            <a:pPr algn="ctr"/>
+            <a:endParaRPr lang="zh-CN" altLang="en-US"/>
+          </a:p>
+        </p:txBody>
+      </p:sp>
+      <p:sp>
+        <p:nvSpPr>
+          <p:cNvPr id="53" name="text_050">
+            <a:extLst>
+              <a:ext uri="{FF2B5EF4-FFF2-40B4-BE49-F238E27FC236}">
+                <a16:creationId xmlns:a16="http://schemas.microsoft.com/office/drawing/2014/main" id="{01D1B805-99EC-A877-F755-26B574A211B7}"/>
+              </a:ext>
+            </a:extLst>
+          </p:cNvPr>
+          <p:cNvSpPr txBox="1"/>
+          <p:nvPr/>
+        </p:nvSpPr>
+        <p:spPr>
+          <a:xfrm>
+            <a:off x="5689600" y="6349999"/>
+            <a:ext cx="2070100" cy="368300"/>
+          </a:xfrm>
+          <a:prstGeom prst="rect">
+            <a:avLst/>
+          </a:prstGeom>
+          <a:noFill/>
+        </p:spPr>
+        <p:txBody>
+          <a:bodyPr vert="horz" wrap="square" lIns="0" tIns="0" rIns="0" bIns="0" rtlCol="0" anchor="ctr">
+            <a:noAutofit/>
+          </a:bodyPr>
+          <a:lstStyle/>
+          <a:p>
+            <a:pPr algn="ctr"/>
+            <a:r>
+              <a:rPr lang="en-US" altLang="zh-CN" sz="1700" b="1">
+                <a:solidFill>
+                  <a:srgbClr val="181818"/>
+                </a:solidFill>
+                <a:latin typeface="Times New Roman" panose="02020603050405020304" pitchFamily="18" charset="0"/>
+              </a:rPr>
+              <a:t>Noise latent</a:t>
+            </a:r>
+            <a:endParaRPr lang="zh-CN" altLang="en-US" sz="1700" b="1">
+              <a:solidFill>
+                <a:srgbClr val="181818"/>
+              </a:solidFill>
+              <a:latin typeface="Times New Roman" panose="02020603050405020304" pitchFamily="18" charset="0"/>
+            </a:endParaRPr>
+          </a:p>
+        </p:txBody>
+      </p:sp>
+      <p:sp>
+        <p:nvSpPr>
+          <p:cNvPr id="54" name="text_051">
+            <a:extLst>
+              <a:ext uri="{FF2B5EF4-FFF2-40B4-BE49-F238E27FC236}">
+                <a16:creationId xmlns:a16="http://schemas.microsoft.com/office/drawing/2014/main" id="{9FEEC65B-C266-EC1C-3E65-B220635AA7C1}"/>
+              </a:ext>
+            </a:extLst>
+          </p:cNvPr>
+          <p:cNvSpPr txBox="1"/>
+          <p:nvPr/>
+        </p:nvSpPr>
+        <p:spPr>
+          <a:xfrm>
+            <a:off x="5689600" y="6743699"/>
+            <a:ext cx="2070100" cy="431800"/>
+          </a:xfrm>
+          <a:prstGeom prst="rect">
+            <a:avLst/>
+          </a:prstGeom>
+          <a:noFill/>
+        </p:spPr>
+        <p:txBody>
+          <a:bodyPr vert="horz" wrap="square" lIns="0" tIns="0" rIns="0" bIns="0" rtlCol="0" anchor="ctr">
+            <a:noAutofit/>
+          </a:bodyPr>
+          <a:lstStyle/>
+          <a:p>
+            <a:pPr algn="ctr"/>
+            <a:r>
+              <a:rPr lang="en-US" altLang="zh-CN" sz="1400">
+                <a:solidFill>
+                  <a:srgbClr val="181818"/>
+                </a:solidFill>
+                <a:latin typeface="Times New Roman" panose="02020603050405020304" pitchFamily="18" charset="0"/>
+              </a:rPr>
+              <a:t>Seed + output size</a:t>
+            </a:r>
+            <a:endParaRPr lang="zh-CN" altLang="en-US" sz="1400">
+              <a:solidFill>
+                <a:srgbClr val="181818"/>
+              </a:solidFill>
+              <a:latin typeface="Times New Roman" panose="02020603050405020304" pitchFamily="18" charset="0"/>
+            </a:endParaRPr>
+          </a:p>
+        </p:txBody>
+      </p:sp>
+      <p:cxnSp>
+        <p:nvCxnSpPr>
+          <p:cNvPr id="55" name="line_052">
+            <a:extLst>
+              <a:ext uri="{FF2B5EF4-FFF2-40B4-BE49-F238E27FC236}">
+                <a16:creationId xmlns:a16="http://schemas.microsoft.com/office/drawing/2014/main" id="{2CCC80CA-038F-0573-7E74-3F665819F8CE}"/>
+              </a:ext>
+            </a:extLst>
+          </p:cNvPr>
+          <p:cNvCxnSpPr/>
+          <p:nvPr/>
+        </p:nvCxnSpPr>
+        <p:spPr>
+          <a:xfrm>
+            <a:off x="7886700" y="6756400"/>
+            <a:ext cx="342900" cy="0"/>
+          </a:xfrm>
+          <a:prstGeom prst="line">
+            <a:avLst/>
+          </a:prstGeom>
+          <a:ln w="13970">
+            <a:solidFill>
+              <a:srgbClr val="202020"/>
+            </a:solidFill>
+          </a:ln>
+        </p:spPr>
+        <p:style>
+          <a:lnRef idx="2">
+            <a:schemeClr val="accent1"/>
+          </a:lnRef>
+          <a:fillRef idx="0">
+            <a:schemeClr val="accent1"/>
+          </a:fillRef>
+          <a:effectRef idx="1">
+            <a:schemeClr val="accent1"/>
+          </a:effectRef>
+          <a:fontRef idx="minor">
+            <a:schemeClr val="tx1"/>
+          </a:fontRef>
+        </p:style>
+      </p:cxnSp>
+      <p:cxnSp>
+        <p:nvCxnSpPr>
+          <p:cNvPr id="56" name="line_053">
+            <a:extLst>
+              <a:ext uri="{FF2B5EF4-FFF2-40B4-BE49-F238E27FC236}">
+                <a16:creationId xmlns:a16="http://schemas.microsoft.com/office/drawing/2014/main" id="{8A591F61-D006-8264-3535-0399303791D3}"/>
+              </a:ext>
+            </a:extLst>
+          </p:cNvPr>
+          <p:cNvCxnSpPr/>
+          <p:nvPr/>
+        </p:nvCxnSpPr>
+        <p:spPr>
+          <a:xfrm flipV="1">
+            <a:off x="8229600" y="5295900"/>
+            <a:ext cx="0" cy="1460500"/>
+          </a:xfrm>
+          <a:prstGeom prst="line">
+            <a:avLst/>
+          </a:prstGeom>
+          <a:ln w="13970">
+            <a:solidFill>
+              <a:srgbClr val="202020"/>
+            </a:solidFill>
+          </a:ln>
+        </p:spPr>
+        <p:style>
+          <a:lnRef idx="2">
+            <a:schemeClr val="accent1"/>
+          </a:lnRef>
+          <a:fillRef idx="0">
+            <a:schemeClr val="accent1"/>
+          </a:fillRef>
+          <a:effectRef idx="1">
+            <a:schemeClr val="accent1"/>
+          </a:effectRef>
+          <a:fontRef idx="minor">
+            <a:schemeClr val="tx1"/>
+          </a:fontRef>
+        </p:style>
+      </p:cxnSp>
+      <p:cxnSp>
+        <p:nvCxnSpPr>
+          <p:cNvPr id="57" name="line_054">
+            <a:extLst>
+              <a:ext uri="{FF2B5EF4-FFF2-40B4-BE49-F238E27FC236}">
+                <a16:creationId xmlns:a16="http://schemas.microsoft.com/office/drawing/2014/main" id="{69A25CF9-7859-9977-B62C-A97BC192CFF5}"/>
+              </a:ext>
+            </a:extLst>
+          </p:cNvPr>
+          <p:cNvCxnSpPr/>
+          <p:nvPr/>
+        </p:nvCxnSpPr>
+        <p:spPr>
+          <a:xfrm>
+            <a:off x="8229600" y="5295900"/>
+            <a:ext cx="444500" cy="0"/>
+          </a:xfrm>
+          <a:prstGeom prst="line">
+            <a:avLst/>
+          </a:prstGeom>
+          <a:ln w="13970">
+            <a:solidFill>
+              <a:srgbClr val="202020"/>
+            </a:solidFill>
+            <a:tailEnd type="triangle" w="sm" len="sm"/>
+          </a:ln>
+        </p:spPr>
+        <p:style>
+          <a:lnRef idx="2">
+            <a:schemeClr val="accent1"/>
+          </a:lnRef>
+          <a:fillRef idx="0">
+            <a:schemeClr val="accent1"/>
+          </a:fillRef>
+          <a:effectRef idx="1">
+            <a:schemeClr val="accent1"/>
+          </a:effectRef>
+          <a:fontRef idx="minor">
+            <a:schemeClr val="tx1"/>
+          </a:fontRef>
+        </p:style>
+      </p:cxnSp>
+      <p:cxnSp>
+        <p:nvCxnSpPr>
+          <p:cNvPr id="58" name="line_055">
+            <a:extLst>
+              <a:ext uri="{FF2B5EF4-FFF2-40B4-BE49-F238E27FC236}">
+                <a16:creationId xmlns:a16="http://schemas.microsoft.com/office/drawing/2014/main" id="{DBBEF47B-98FB-5B7B-CA92-4B0E753FAFCD}"/>
+              </a:ext>
+            </a:extLst>
+          </p:cNvPr>
+          <p:cNvCxnSpPr/>
+          <p:nvPr/>
+        </p:nvCxnSpPr>
+        <p:spPr>
+          <a:xfrm>
+            <a:off x="13093700" y="4508500"/>
+            <a:ext cx="368300" cy="0"/>
+          </a:xfrm>
+          <a:prstGeom prst="line">
+            <a:avLst/>
+          </a:prstGeom>
+          <a:ln w="15240">
+            <a:solidFill>
+              <a:srgbClr val="202020"/>
+            </a:solidFill>
+          </a:ln>
+        </p:spPr>
+        <p:style>
+          <a:lnRef idx="2">
+            <a:schemeClr val="accent1"/>
+          </a:lnRef>
+          <a:fillRef idx="0">
+            <a:schemeClr val="accent1"/>
+          </a:fillRef>
+          <a:effectRef idx="1">
+            <a:schemeClr val="accent1"/>
+          </a:effectRef>
+          <a:fontRef idx="minor">
+            <a:schemeClr val="tx1"/>
+          </a:fontRef>
+        </p:style>
+      </p:cxnSp>
+      <p:cxnSp>
+        <p:nvCxnSpPr>
+          <p:cNvPr id="59" name="line_056">
+            <a:extLst>
+              <a:ext uri="{FF2B5EF4-FFF2-40B4-BE49-F238E27FC236}">
+                <a16:creationId xmlns:a16="http://schemas.microsoft.com/office/drawing/2014/main" id="{CB4856AD-C333-CC0F-5368-7B965ADFE4E6}"/>
+              </a:ext>
+            </a:extLst>
+          </p:cNvPr>
+          <p:cNvCxnSpPr/>
+          <p:nvPr/>
+        </p:nvCxnSpPr>
+        <p:spPr>
+          <a:xfrm flipV="1">
+            <a:off x="13462000" y="1866900"/>
+            <a:ext cx="0" cy="2641600"/>
+          </a:xfrm>
+          <a:prstGeom prst="line">
+            <a:avLst/>
+          </a:prstGeom>
+          <a:ln w="15240">
+            <a:solidFill>
+              <a:srgbClr val="202020"/>
+            </a:solidFill>
+          </a:ln>
+        </p:spPr>
+        <p:style>
+          <a:lnRef idx="2">
+            <a:schemeClr val="accent1"/>
+          </a:lnRef>
+          <a:fillRef idx="0">
+            <a:schemeClr val="accent1"/>
+          </a:fillRef>
+          <a:effectRef idx="1">
+            <a:schemeClr val="accent1"/>
+          </a:effectRef>
+          <a:fontRef idx="minor">
+            <a:schemeClr val="tx1"/>
+          </a:fontRef>
+        </p:style>
+      </p:cxnSp>
+      <p:cxnSp>
+        <p:nvCxnSpPr>
+          <p:cNvPr id="60" name="line_057">
+            <a:extLst>
+              <a:ext uri="{FF2B5EF4-FFF2-40B4-BE49-F238E27FC236}">
+                <a16:creationId xmlns:a16="http://schemas.microsoft.com/office/drawing/2014/main" id="{55551BAA-C22E-C151-41B2-D38583308121}"/>
+              </a:ext>
+            </a:extLst>
+          </p:cNvPr>
+          <p:cNvCxnSpPr/>
+          <p:nvPr/>
+        </p:nvCxnSpPr>
+        <p:spPr>
+          <a:xfrm>
+            <a:off x="13462000" y="1866900"/>
+            <a:ext cx="381000" cy="0"/>
+          </a:xfrm>
+          <a:prstGeom prst="line">
+            <a:avLst/>
+          </a:prstGeom>
+          <a:ln w="15240">
+            <a:solidFill>
+              <a:srgbClr val="202020"/>
+            </a:solidFill>
+            <a:tailEnd type="triangle" w="sm" len="sm"/>
+          </a:ln>
+        </p:spPr>
+        <p:style>
+          <a:lnRef idx="2">
+            <a:schemeClr val="accent1"/>
+          </a:lnRef>
+          <a:fillRef idx="0">
+            <a:schemeClr val="accent1"/>
+          </a:fillRef>
+          <a:effectRef idx="1">
+            <a:schemeClr val="accent1"/>
+          </a:effectRef>
+          <a:fontRef idx="minor">
+            <a:schemeClr val="tx1"/>
+          </a:fontRef>
+        </p:style>
+      </p:cxnSp>
+      <p:sp>
+        <p:nvSpPr>
+          <p:cNvPr id="61" name="roundrect_058">
+            <a:extLst>
+              <a:ext uri="{FF2B5EF4-FFF2-40B4-BE49-F238E27FC236}">
+                <a16:creationId xmlns:a16="http://schemas.microsoft.com/office/drawing/2014/main" id="{E7CF7C8A-D49D-3A99-32CC-EBE428B81BC2}"/>
+              </a:ext>
+            </a:extLst>
+          </p:cNvPr>
+          <p:cNvSpPr/>
+          <p:nvPr/>
+        </p:nvSpPr>
+        <p:spPr>
+          <a:xfrm>
+            <a:off x="13843000" y="1384300"/>
+            <a:ext cx="3073400" cy="965200"/>
+          </a:xfrm>
+          <a:prstGeom prst="roundRect">
+            <a:avLst>
+              <a:gd name="adj" fmla="val 8000"/>
+            </a:avLst>
+          </a:prstGeom>
+          <a:solidFill>
+            <a:srgbClr val="E0EEEE"/>
+          </a:solidFill>
+          <a:ln w="12700">
+            <a:solidFill>
+              <a:srgbClr val="181818"/>
+            </a:solidFill>
+          </a:ln>
+        </p:spPr>
+        <p:style>
+          <a:lnRef idx="2">
+            <a:schemeClr val="accent1">
+              <a:shade val="15000"/>
+            </a:schemeClr>
+          </a:lnRef>
+          <a:fillRef idx="1">
+            <a:schemeClr val="accent1"/>
+          </a:fillRef>
+          <a:effectRef idx="0">
+            <a:schemeClr val="accent1"/>
+          </a:effectRef>
+          <a:fontRef idx="minor">
+            <a:schemeClr val="lt1"/>
+          </a:fontRef>
+        </p:style>
+        <p:txBody>
+          <a:bodyPr rtlCol="0" anchor="ctr"/>
+          <a:lstStyle/>
+          <a:p>
+            <a:pPr algn="ctr"/>
+            <a:endParaRPr lang="zh-CN" altLang="en-US"/>
+          </a:p>
+        </p:txBody>
+      </p:sp>
+      <p:sp>
+        <p:nvSpPr>
+          <p:cNvPr id="62" name="text_059">
+            <a:extLst>
+              <a:ext uri="{FF2B5EF4-FFF2-40B4-BE49-F238E27FC236}">
+                <a16:creationId xmlns:a16="http://schemas.microsoft.com/office/drawing/2014/main" id="{3165572C-D135-29EE-6567-64DC3EADB4E5}"/>
+              </a:ext>
+            </a:extLst>
+          </p:cNvPr>
+          <p:cNvSpPr txBox="1"/>
+          <p:nvPr/>
+        </p:nvSpPr>
+        <p:spPr>
+          <a:xfrm>
+            <a:off x="13970000" y="1473199"/>
+            <a:ext cx="2819400" cy="368300"/>
+          </a:xfrm>
+          <a:prstGeom prst="rect">
+            <a:avLst/>
+          </a:prstGeom>
+          <a:noFill/>
+        </p:spPr>
+        <p:txBody>
+          <a:bodyPr vert="horz" wrap="square" lIns="0" tIns="0" rIns="0" bIns="0" rtlCol="0" anchor="ctr">
+            <a:noAutofit/>
+          </a:bodyPr>
+          <a:lstStyle/>
+          <a:p>
+            <a:pPr algn="ctr"/>
+            <a:r>
+              <a:rPr lang="en-US" altLang="zh-CN" sz="2000" b="1">
+                <a:solidFill>
+                  <a:srgbClr val="181818"/>
+                </a:solidFill>
+                <a:latin typeface="Times New Roman" panose="02020603050405020304" pitchFamily="18" charset="0"/>
+              </a:rPr>
+              <a:t>VAE decoding</a:t>
+            </a:r>
+            <a:endParaRPr lang="zh-CN" altLang="en-US" sz="2000" b="1">
+              <a:solidFill>
+                <a:srgbClr val="181818"/>
+              </a:solidFill>
+              <a:latin typeface="Times New Roman" panose="02020603050405020304" pitchFamily="18" charset="0"/>
+            </a:endParaRPr>
+          </a:p>
+        </p:txBody>
+      </p:sp>
+      <p:sp>
+        <p:nvSpPr>
+          <p:cNvPr id="63" name="text_060">
+            <a:extLst>
+              <a:ext uri="{FF2B5EF4-FFF2-40B4-BE49-F238E27FC236}">
+                <a16:creationId xmlns:a16="http://schemas.microsoft.com/office/drawing/2014/main" id="{658ABE34-F252-2978-844D-E54FA6A933DF}"/>
+              </a:ext>
+            </a:extLst>
+          </p:cNvPr>
+          <p:cNvSpPr txBox="1"/>
+          <p:nvPr/>
+        </p:nvSpPr>
+        <p:spPr>
+          <a:xfrm>
+            <a:off x="13970000" y="1866899"/>
+            <a:ext cx="2819400" cy="406400"/>
+          </a:xfrm>
+          <a:prstGeom prst="rect">
+            <a:avLst/>
+          </a:prstGeom>
+          <a:noFill/>
+        </p:spPr>
+        <p:txBody>
+          <a:bodyPr vert="horz" wrap="square" lIns="0" tIns="0" rIns="0" bIns="0" rtlCol="0" anchor="ctr">
+            <a:noAutofit/>
+          </a:bodyPr>
+          <a:lstStyle/>
+          <a:p>
+            <a:pPr algn="ctr"/>
             <a:r>
               <a:rPr lang="en-US" altLang="zh-CN" sz="1400">
                 <a:solidFill>
@@ -8205,10 +6603,10 @@
       </p:sp>
       <p:cxnSp>
         <p:nvCxnSpPr>
-          <p:cNvPr id="92" name="line_090">
-            <a:extLst>
-              <a:ext uri="{FF2B5EF4-FFF2-40B4-BE49-F238E27FC236}">
-                <a16:creationId xmlns:a16="http://schemas.microsoft.com/office/drawing/2014/main" id="{FDF8A416-1048-F853-48B6-A9F753B82BF9}"/>
+          <p:cNvPr id="64" name="line_061">
+            <a:extLst>
+              <a:ext uri="{FF2B5EF4-FFF2-40B4-BE49-F238E27FC236}">
+                <a16:creationId xmlns:a16="http://schemas.microsoft.com/office/drawing/2014/main" id="{534937F3-8B6B-AA29-24D0-C8F5D4DB44E0}"/>
               </a:ext>
             </a:extLst>
           </p:cNvPr>
@@ -8217,15 +6615,15 @@
         </p:nvCxnSpPr>
         <p:spPr>
           <a:xfrm>
-            <a:off x="9067800" y="5702300"/>
-            <a:ext cx="0" cy="368300"/>
+            <a:off x="15379700" y="2349500"/>
+            <a:ext cx="0" cy="609600"/>
           </a:xfrm>
           <a:prstGeom prst="line">
             <a:avLst/>
           </a:prstGeom>
-          <a:ln w="9525">
+          <a:ln w="12700">
             <a:solidFill>
-              <a:srgbClr val="266A71"/>
+              <a:srgbClr val="181818"/>
             </a:solidFill>
             <a:tailEnd type="triangle" w="sm" len="sm"/>
           </a:ln>
@@ -8247,10 +6645,10 @@
       </p:cxnSp>
       <p:pic>
         <p:nvPicPr>
-          <p:cNvPr id="94" name="picture_091">
-            <a:extLst>
-              <a:ext uri="{FF2B5EF4-FFF2-40B4-BE49-F238E27FC236}">
-                <a16:creationId xmlns:a16="http://schemas.microsoft.com/office/drawing/2014/main" id="{D970E81A-D18D-C172-7F6A-79F25E1CF1F8}"/>
+          <p:cNvPr id="66" name="picture_062">
+            <a:extLst>
+              <a:ext uri="{FF2B5EF4-FFF2-40B4-BE49-F238E27FC236}">
+                <a16:creationId xmlns:a16="http://schemas.microsoft.com/office/drawing/2014/main" id="{4378C24F-2AD7-C773-98C9-A9CE7BA64DB7}"/>
               </a:ext>
             </a:extLst>
           </p:cNvPr>
@@ -8260,7 +6658,7 @@
           <p:nvPr/>
         </p:nvPicPr>
         <p:blipFill>
-          <a:blip r:embed="rId5">
+          <a:blip r:embed="rId6">
             <a:extLst>
               <a:ext uri="{28A0092B-C50C-407E-A947-70E740481C1C}">
                 <a14:useLocalDpi xmlns:a14="http://schemas.microsoft.com/office/drawing/2010/main" val="0"/>
@@ -8273,20 +6671,27 @@
         </p:blipFill>
         <p:spPr>
           <a:xfrm>
-            <a:off x="6985000" y="6110845"/>
-            <a:ext cx="2044700" cy="1519709"/>
+            <a:off x="13804900" y="2982441"/>
+            <a:ext cx="3149600" cy="2340919"/>
           </a:xfrm>
           <a:prstGeom prst="rect">
             <a:avLst/>
           </a:prstGeom>
+          <a:effectLst>
+            <a:outerShdw blurRad="50800" dist="45790" dir="3378598" rotWithShape="0">
+              <a:srgbClr val="000000">
+                <a:alpha val="18000"/>
+              </a:srgbClr>
+            </a:outerShdw>
+          </a:effectLst>
         </p:spPr>
       </p:pic>
       <p:sp>
         <p:nvSpPr>
-          <p:cNvPr id="95" name="rect_092">
-            <a:extLst>
-              <a:ext uri="{FF2B5EF4-FFF2-40B4-BE49-F238E27FC236}">
-                <a16:creationId xmlns:a16="http://schemas.microsoft.com/office/drawing/2014/main" id="{CB58A385-473B-104E-3E86-273C7638D1CD}"/>
+          <p:cNvPr id="67" name="rect_063">
+            <a:extLst>
+              <a:ext uri="{FF2B5EF4-FFF2-40B4-BE49-F238E27FC236}">
+                <a16:creationId xmlns:a16="http://schemas.microsoft.com/office/drawing/2014/main" id="{87C2F8AE-355A-CE18-0885-ED1547E72861}"/>
               </a:ext>
             </a:extLst>
           </p:cNvPr>
@@ -8295,16 +6700,16 @@
         </p:nvSpPr>
         <p:spPr>
           <a:xfrm>
-            <a:off x="6985000" y="6110845"/>
-            <a:ext cx="2044700" cy="1519709"/>
+            <a:off x="13804900" y="2982441"/>
+            <a:ext cx="3149600" cy="2340919"/>
           </a:xfrm>
           <a:prstGeom prst="rect">
             <a:avLst/>
           </a:prstGeom>
           <a:noFill/>
-          <a:ln w="4445" cap="flat" cmpd="sng" algn="ctr">
+          <a:ln w="8255" cap="flat" cmpd="sng" algn="ctr">
             <a:solidFill>
-              <a:srgbClr val="BDBDBD"/>
+              <a:srgbClr val="696969"/>
             </a:solidFill>
             <a:prstDash val="solid"/>
             <a:miter lim="800000"/>
@@ -8347,10 +6752,10 @@
       </p:sp>
       <p:sp>
         <p:nvSpPr>
-          <p:cNvPr id="96" name="text_093">
-            <a:extLst>
-              <a:ext uri="{FF2B5EF4-FFF2-40B4-BE49-F238E27FC236}">
-                <a16:creationId xmlns:a16="http://schemas.microsoft.com/office/drawing/2014/main" id="{8C79B852-7733-8D30-3E45-C9B1EC41A895}"/>
+          <p:cNvPr id="68" name="text_064">
+            <a:extLst>
+              <a:ext uri="{FF2B5EF4-FFF2-40B4-BE49-F238E27FC236}">
+                <a16:creationId xmlns:a16="http://schemas.microsoft.com/office/drawing/2014/main" id="{35CC092E-AE98-0979-35D1-6A95D3BDEC02}"/>
               </a:ext>
             </a:extLst>
           </p:cNvPr>
@@ -8359,8 +6764,8 @@
         </p:nvSpPr>
         <p:spPr>
           <a:xfrm>
-            <a:off x="9398000" y="6210299"/>
-            <a:ext cx="1917700" cy="381000"/>
+            <a:off x="13804900" y="5448299"/>
+            <a:ext cx="3149600" cy="355600"/>
           </a:xfrm>
           <a:prstGeom prst="rect">
             <a:avLst/>
@@ -8373,16 +6778,17 @@
           </a:bodyPr>
           <a:lstStyle/>
           <a:p>
-            <a:r>
-              <a:rPr lang="en-US" altLang="zh-CN" sz="1700" b="1">
+            <a:pPr algn="ctr"/>
+            <a:r>
+              <a:rPr lang="en-US" altLang="zh-CN" b="1">
                 <a:solidFill>
                   <a:srgbClr val="181818"/>
                 </a:solidFill>
                 <a:latin typeface="Times New Roman" panose="02020603050405020304" pitchFamily="18" charset="0"/>
               </a:rPr>
-              <a:t>Generated edit</a:t>
-            </a:r>
-            <a:endParaRPr lang="zh-CN" altLang="en-US" sz="1700" b="1">
+              <a:t>Generated image 301</a:t>
+            </a:r>
+            <a:endParaRPr lang="zh-CN" altLang="en-US" b="1">
               <a:solidFill>
                 <a:srgbClr val="181818"/>
               </a:solidFill>
@@ -8391,60 +6797,12 @@
           </a:p>
         </p:txBody>
       </p:sp>
-      <p:sp>
-        <p:nvSpPr>
-          <p:cNvPr id="97" name="text_094">
-            <a:extLst>
-              <a:ext uri="{FF2B5EF4-FFF2-40B4-BE49-F238E27FC236}">
-                <a16:creationId xmlns:a16="http://schemas.microsoft.com/office/drawing/2014/main" id="{3BFD836D-B8FE-E219-8165-56B4436B0CF6}"/>
-              </a:ext>
-            </a:extLst>
-          </p:cNvPr>
-          <p:cNvSpPr txBox="1"/>
-          <p:nvPr/>
-        </p:nvSpPr>
-        <p:spPr>
-          <a:xfrm>
-            <a:off x="9398000" y="6718299"/>
-            <a:ext cx="1917700" cy="838200"/>
-          </a:xfrm>
-          <a:prstGeom prst="rect">
-            <a:avLst/>
-          </a:prstGeom>
-          <a:noFill/>
-        </p:spPr>
-        <p:txBody>
-          <a:bodyPr vert="horz" wrap="square" lIns="0" tIns="0" rIns="0" bIns="0" rtlCol="0" anchor="ctr">
-            <a:noAutofit/>
-          </a:bodyPr>
-          <a:lstStyle/>
-          <a:p>
-            <a:r>
-              <a:rPr lang="en-US" altLang="zh-CN" sz="1400">
-                <a:solidFill>
-                  <a:srgbClr val="181818"/>
-                </a:solidFill>
-                <a:latin typeface="Times New Roman" panose="02020603050405020304" pitchFamily="18" charset="0"/>
-              </a:rPr>
-              <a:t>Scene content
-Safety state
-Image quality</a:t>
-            </a:r>
-            <a:endParaRPr lang="zh-CN" altLang="en-US" sz="1400">
-              <a:solidFill>
-                <a:srgbClr val="181818"/>
-              </a:solidFill>
-              <a:latin typeface="Times New Roman" panose="02020603050405020304" pitchFamily="18" charset="0"/>
-            </a:endParaRPr>
-          </a:p>
-        </p:txBody>
-      </p:sp>
       <p:cxnSp>
         <p:nvCxnSpPr>
-          <p:cNvPr id="98" name="line_095">
-            <a:extLst>
-              <a:ext uri="{FF2B5EF4-FFF2-40B4-BE49-F238E27FC236}">
-                <a16:creationId xmlns:a16="http://schemas.microsoft.com/office/drawing/2014/main" id="{21DBED29-8176-B9D4-A9F4-E0F0211CCA11}"/>
+          <p:cNvPr id="69" name="line_065">
+            <a:extLst>
+              <a:ext uri="{FF2B5EF4-FFF2-40B4-BE49-F238E27FC236}">
+                <a16:creationId xmlns:a16="http://schemas.microsoft.com/office/drawing/2014/main" id="{4332B18F-C19B-4230-B42E-3E85D849E07A}"/>
               </a:ext>
             </a:extLst>
           </p:cNvPr>
@@ -8453,15 +6811,15 @@
         </p:nvCxnSpPr>
         <p:spPr>
           <a:xfrm>
-            <a:off x="9067800" y="7658100"/>
-            <a:ext cx="0" cy="317500"/>
+            <a:off x="15379700" y="5905500"/>
+            <a:ext cx="0" cy="393700"/>
           </a:xfrm>
           <a:prstGeom prst="line">
             <a:avLst/>
           </a:prstGeom>
-          <a:ln w="9525">
+          <a:ln w="12700">
             <a:solidFill>
-              <a:srgbClr val="266A71"/>
+              <a:srgbClr val="181818"/>
             </a:solidFill>
             <a:tailEnd type="triangle" w="sm" len="sm"/>
           </a:ln>
@@ -8483,10 +6841,10 @@
       </p:cxnSp>
       <p:sp>
         <p:nvSpPr>
-          <p:cNvPr id="99" name="text_096">
-            <a:extLst>
-              <a:ext uri="{FF2B5EF4-FFF2-40B4-BE49-F238E27FC236}">
-                <a16:creationId xmlns:a16="http://schemas.microsoft.com/office/drawing/2014/main" id="{39B2C5A1-9688-1679-F7C3-5AFEA03D59D4}"/>
+          <p:cNvPr id="70" name="text_066">
+            <a:extLst>
+              <a:ext uri="{FF2B5EF4-FFF2-40B4-BE49-F238E27FC236}">
+                <a16:creationId xmlns:a16="http://schemas.microsoft.com/office/drawing/2014/main" id="{116C3C66-04BA-5A76-24B4-90128753D3D4}"/>
               </a:ext>
             </a:extLst>
           </p:cNvPr>
@@ -8495,8 +6853,8 @@
         </p:nvSpPr>
         <p:spPr>
           <a:xfrm>
-            <a:off x="6946900" y="7975599"/>
-            <a:ext cx="4267200" cy="355600"/>
+            <a:off x="13665200" y="6349999"/>
+            <a:ext cx="3429000" cy="647700"/>
           </a:xfrm>
           <a:prstGeom prst="rect">
             <a:avLst/>
@@ -8509,30 +6867,32 @@
           </a:bodyPr>
           <a:lstStyle/>
           <a:p>
-            <a:r>
-              <a:rPr lang="en-US" altLang="zh-CN" sz="1250" b="1">
+            <a:pPr algn="ctr"/>
+            <a:r>
+              <a:rPr lang="en-US" altLang="zh-CN" b="1">
                 <a:solidFill>
                   <a:srgbClr val="181818"/>
                 </a:solidFill>
-                <a:latin typeface="Arial" panose="020B0604020202020204" pitchFamily="34" charset="0"/>
+                <a:latin typeface="Times New Roman" panose="02020603050405020304" pitchFamily="18" charset="0"/>
               </a:rPr>
-              <a:t>Human review and YOLO annotation</a:t>
-            </a:r>
-            <a:endParaRPr lang="zh-CN" altLang="en-US" sz="1250" b="1">
+              <a:t>Human review
+and YOLO annotation</a:t>
+            </a:r>
+            <a:endParaRPr lang="zh-CN" altLang="en-US" b="1">
               <a:solidFill>
                 <a:srgbClr val="181818"/>
               </a:solidFill>
-              <a:latin typeface="Arial" panose="020B0604020202020204" pitchFamily="34" charset="0"/>
+              <a:latin typeface="Times New Roman" panose="02020603050405020304" pitchFamily="18" charset="0"/>
             </a:endParaRPr>
           </a:p>
         </p:txBody>
       </p:sp>
       <p:cxnSp>
         <p:nvCxnSpPr>
-          <p:cNvPr id="100" name="line_097">
-            <a:extLst>
-              <a:ext uri="{FF2B5EF4-FFF2-40B4-BE49-F238E27FC236}">
-                <a16:creationId xmlns:a16="http://schemas.microsoft.com/office/drawing/2014/main" id="{CDB7E9B2-DCC2-BBCD-F30F-954E6FD3349C}"/>
+          <p:cNvPr id="71" name="line_067">
+            <a:extLst>
+              <a:ext uri="{FF2B5EF4-FFF2-40B4-BE49-F238E27FC236}">
+                <a16:creationId xmlns:a16="http://schemas.microsoft.com/office/drawing/2014/main" id="{5CBDD36C-E0A1-FA98-C521-62F3FEBE0DF8}"/>
               </a:ext>
             </a:extLst>
           </p:cNvPr>
@@ -8541,15 +6901,15 @@
         </p:nvCxnSpPr>
         <p:spPr>
           <a:xfrm>
-            <a:off x="9067800" y="8407400"/>
-            <a:ext cx="0" cy="241300"/>
+            <a:off x="15379700" y="7099300"/>
+            <a:ext cx="0" cy="279400"/>
           </a:xfrm>
           <a:prstGeom prst="line">
             <a:avLst/>
           </a:prstGeom>
-          <a:ln w="9525">
+          <a:ln w="12700">
             <a:solidFill>
-              <a:srgbClr val="266A71"/>
+              <a:srgbClr val="181818"/>
             </a:solidFill>
             <a:tailEnd type="triangle" w="sm" len="sm"/>
           </a:ln>
@@ -8571,10 +6931,10 @@
       </p:cxnSp>
       <p:sp>
         <p:nvSpPr>
-          <p:cNvPr id="101" name="text_098">
-            <a:extLst>
-              <a:ext uri="{FF2B5EF4-FFF2-40B4-BE49-F238E27FC236}">
-                <a16:creationId xmlns:a16="http://schemas.microsoft.com/office/drawing/2014/main" id="{A888212A-57D6-EBBD-C730-47934DCE080A}"/>
+          <p:cNvPr id="72" name="text_068">
+            <a:extLst>
+              <a:ext uri="{FF2B5EF4-FFF2-40B4-BE49-F238E27FC236}">
+                <a16:creationId xmlns:a16="http://schemas.microsoft.com/office/drawing/2014/main" id="{88D8E823-5280-3D4E-E537-E15DBB35A480}"/>
               </a:ext>
             </a:extLst>
           </p:cNvPr>
@@ -8583,8 +6943,8 @@
         </p:nvSpPr>
         <p:spPr>
           <a:xfrm>
-            <a:off x="6959600" y="8661399"/>
-            <a:ext cx="4368800" cy="393700"/>
+            <a:off x="13309600" y="7429499"/>
+            <a:ext cx="3924300" cy="368300"/>
           </a:xfrm>
           <a:prstGeom prst="rect">
             <a:avLst/>
@@ -8597,103 +6957,63 @@
           </a:bodyPr>
           <a:lstStyle/>
           <a:p>
-            <a:r>
-              <a:rPr lang="en-US" altLang="zh-CN" sz="2000" b="1">
-                <a:solidFill>
-                  <a:srgbClr val="266A71"/>
-                </a:solidFill>
-                <a:latin typeface="Times New Roman" panose="02020603050405020304" pitchFamily="18" charset="0"/>
-              </a:rPr>
-              <a:t>Arm C: 1,085 retained images</a:t>
-            </a:r>
-            <a:endParaRPr lang="zh-CN" altLang="en-US" sz="2000" b="1">
-              <a:solidFill>
-                <a:srgbClr val="266A71"/>
-              </a:solidFill>
-              <a:latin typeface="Times New Roman" panose="02020603050405020304" pitchFamily="18" charset="0"/>
-            </a:endParaRPr>
-          </a:p>
-        </p:txBody>
-      </p:sp>
-      <p:cxnSp>
-        <p:nvCxnSpPr>
-          <p:cNvPr id="102" name="line_099">
-            <a:extLst>
-              <a:ext uri="{FF2B5EF4-FFF2-40B4-BE49-F238E27FC236}">
-                <a16:creationId xmlns:a16="http://schemas.microsoft.com/office/drawing/2014/main" id="{3025A245-AF55-BF15-E659-F85261ABEA5F}"/>
-              </a:ext>
-            </a:extLst>
-          </p:cNvPr>
-          <p:cNvCxnSpPr/>
-          <p:nvPr/>
-        </p:nvCxnSpPr>
-        <p:spPr>
-          <a:xfrm>
-            <a:off x="6959600" y="9105900"/>
-            <a:ext cx="4356100" cy="0"/>
-          </a:xfrm>
-          <a:prstGeom prst="line">
-            <a:avLst/>
-          </a:prstGeom>
-          <a:ln w="12700">
-            <a:solidFill>
-              <a:srgbClr val="266A71"/>
-            </a:solidFill>
-          </a:ln>
-        </p:spPr>
-        <p:style>
-          <a:lnRef idx="2">
-            <a:schemeClr val="accent1"/>
-          </a:lnRef>
-          <a:fillRef idx="0">
-            <a:schemeClr val="accent1"/>
-          </a:fillRef>
-          <a:effectRef idx="1">
-            <a:schemeClr val="accent1"/>
-          </a:effectRef>
-          <a:fontRef idx="minor">
-            <a:schemeClr val="tx1"/>
-          </a:fontRef>
-        </p:style>
-      </p:cxnSp>
-      <p:sp>
-        <p:nvSpPr>
-          <p:cNvPr id="103" name="text_100">
-            <a:extLst>
-              <a:ext uri="{FF2B5EF4-FFF2-40B4-BE49-F238E27FC236}">
-                <a16:creationId xmlns:a16="http://schemas.microsoft.com/office/drawing/2014/main" id="{80E266E2-A03B-7553-38A5-DE4BA3125DE7}"/>
-              </a:ext>
-            </a:extLst>
-          </p:cNvPr>
-          <p:cNvSpPr txBox="1"/>
-          <p:nvPr/>
-        </p:nvSpPr>
-        <p:spPr>
-          <a:xfrm>
-            <a:off x="304800" y="9258300"/>
-            <a:ext cx="11074400" cy="241300"/>
-          </a:xfrm>
-          <a:prstGeom prst="rect">
-            <a:avLst/>
-          </a:prstGeom>
-          <a:noFill/>
-        </p:spPr>
-        <p:txBody>
-          <a:bodyPr vert="horz" wrap="square" lIns="0" tIns="0" rIns="0" bIns="0" rtlCol="0" anchor="ctr">
-            <a:noAutofit/>
-          </a:bodyPr>
-          <a:lstStyle/>
-          <a:p>
-            <a:r>
-              <a:rPr lang="en-US" altLang="zh-CN" sz="1100" i="1">
+            <a:pPr algn="ctr"/>
+            <a:r>
+              <a:rPr lang="en-US" altLang="zh-CN" sz="2200" b="1">
                 <a:solidFill>
                   <a:srgbClr val="181818"/>
                 </a:solidFill>
                 <a:latin typeface="Times New Roman" panose="02020603050405020304" pitchFamily="18" charset="0"/>
               </a:rPr>
-              <a:t>Reference and retained example are unpaired; four-step acceleration is optional.</a:t>
-            </a:r>
-            <a:endParaRPr lang="zh-CN" altLang="en-US" sz="1100" i="1">
+              <a:t>Arm C: 1,085 images</a:t>
+            </a:r>
+            <a:endParaRPr lang="zh-CN" altLang="en-US" sz="2200" b="1">
+              <a:solidFill>
+                <a:srgbClr val="181818"/>
+              </a:solidFill>
+              <a:latin typeface="Times New Roman" panose="02020603050405020304" pitchFamily="18" charset="0"/>
+            </a:endParaRPr>
+          </a:p>
+        </p:txBody>
+      </p:sp>
+      <p:sp>
+        <p:nvSpPr>
+          <p:cNvPr id="73" name="text_069">
+            <a:extLst>
+              <a:ext uri="{FF2B5EF4-FFF2-40B4-BE49-F238E27FC236}">
+                <a16:creationId xmlns:a16="http://schemas.microsoft.com/office/drawing/2014/main" id="{26C74784-1A56-E278-9374-EF5F8A11084C}"/>
+              </a:ext>
+            </a:extLst>
+          </p:cNvPr>
+          <p:cNvSpPr txBox="1"/>
+          <p:nvPr/>
+        </p:nvSpPr>
+        <p:spPr>
+          <a:xfrm>
+            <a:off x="5257800" y="7594599"/>
+            <a:ext cx="7747000" cy="304800"/>
+          </a:xfrm>
+          <a:prstGeom prst="rect">
+            <a:avLst/>
+          </a:prstGeom>
+          <a:noFill/>
+        </p:spPr>
+        <p:txBody>
+          <a:bodyPr vert="horz" wrap="square" lIns="0" tIns="0" rIns="0" bIns="0" rtlCol="0" anchor="ctr">
+            <a:noAutofit/>
+          </a:bodyPr>
+          <a:lstStyle/>
+          <a:p>
+            <a:r>
+              <a:rPr lang="en-US" altLang="zh-CN" sz="1200" i="1">
+                <a:solidFill>
+                  <a:srgbClr val="181818"/>
+                </a:solidFill>
+                <a:latin typeface="Times New Roman" panose="02020603050405020304" pitchFamily="18" charset="0"/>
+              </a:rPr>
+              <a:t>Reference pairing shown for image 301; sampling settings can vary across C.</a:t>
+            </a:r>
+            <a:endParaRPr lang="zh-CN" altLang="en-US" sz="1200" i="1">
               <a:solidFill>
                 <a:srgbClr val="181818"/>
               </a:solidFill>
@@ -8708,13 +7028,16 @@
     </p:custDataLst>
     <p:extLst>
       <p:ext uri="{BB962C8B-B14F-4D97-AF65-F5344CB8AC3E}">
-        <p14:creationId xmlns:p14="http://schemas.microsoft.com/office/powerpoint/2010/main" val="856233558"/>
+        <p14:creationId xmlns:p14="http://schemas.microsoft.com/office/powerpoint/2010/main" val="3241359769"/>
       </p:ext>
     </p:extLst>
   </p:cSld>
   <p:clrMapOvr>
     <a:masterClrMapping/>
   </p:clrMapOvr>
+  <p:transition spd="med">
+    <p:fade/>
+  </p:transition>
 </p:sld>
 </file>
 
